--- a/Python alapok.pptx
+++ b/Python alapok.pptx
@@ -9,27 +9,28 @@
     <p:sldId id="257" r:id="rId3"/>
     <p:sldId id="258" r:id="rId4"/>
     <p:sldId id="270" r:id="rId5"/>
-    <p:sldId id="259" r:id="rId6"/>
-    <p:sldId id="271" r:id="rId7"/>
-    <p:sldId id="260" r:id="rId8"/>
-    <p:sldId id="272" r:id="rId9"/>
-    <p:sldId id="261" r:id="rId10"/>
-    <p:sldId id="273" r:id="rId11"/>
-    <p:sldId id="262" r:id="rId12"/>
-    <p:sldId id="274" r:id="rId13"/>
-    <p:sldId id="263" r:id="rId14"/>
-    <p:sldId id="275" r:id="rId15"/>
-    <p:sldId id="264" r:id="rId16"/>
-    <p:sldId id="276" r:id="rId17"/>
-    <p:sldId id="265" r:id="rId18"/>
-    <p:sldId id="277" r:id="rId19"/>
-    <p:sldId id="266" r:id="rId20"/>
-    <p:sldId id="278" r:id="rId21"/>
-    <p:sldId id="267" r:id="rId22"/>
-    <p:sldId id="279" r:id="rId23"/>
-    <p:sldId id="268" r:id="rId24"/>
-    <p:sldId id="280" r:id="rId25"/>
-    <p:sldId id="269" r:id="rId26"/>
+    <p:sldId id="281" r:id="rId6"/>
+    <p:sldId id="259" r:id="rId7"/>
+    <p:sldId id="271" r:id="rId8"/>
+    <p:sldId id="260" r:id="rId9"/>
+    <p:sldId id="272" r:id="rId10"/>
+    <p:sldId id="261" r:id="rId11"/>
+    <p:sldId id="273" r:id="rId12"/>
+    <p:sldId id="262" r:id="rId13"/>
+    <p:sldId id="274" r:id="rId14"/>
+    <p:sldId id="263" r:id="rId15"/>
+    <p:sldId id="275" r:id="rId16"/>
+    <p:sldId id="264" r:id="rId17"/>
+    <p:sldId id="276" r:id="rId18"/>
+    <p:sldId id="265" r:id="rId19"/>
+    <p:sldId id="277" r:id="rId20"/>
+    <p:sldId id="266" r:id="rId21"/>
+    <p:sldId id="278" r:id="rId22"/>
+    <p:sldId id="267" r:id="rId23"/>
+    <p:sldId id="279" r:id="rId24"/>
+    <p:sldId id="268" r:id="rId25"/>
+    <p:sldId id="280" r:id="rId26"/>
+    <p:sldId id="269" r:id="rId27"/>
   </p:sldIdLst>
   <p:sldSz cx="12192000" cy="6858000"/>
   <p:notesSz cx="6858000" cy="9144000"/>
@@ -128,7 +129,123 @@
       </a:defRPr>
     </a:lvl9pPr>
   </p:defaultTextStyle>
+  <p:extLst>
+    <p:ext uri="{EFAFB233-063F-42B5-8137-9DF3F51BA10A}">
+      <p15:sldGuideLst xmlns:p15="http://schemas.microsoft.com/office/powerpoint/2012/main"/>
+    </p:ext>
+  </p:extLst>
 </p:presentation>
+</file>
+
+<file path=ppt/authors.xml><?xml version="1.0" encoding="utf-8"?>
+<p188:authorLst xmlns:a="http://schemas.openxmlformats.org/drawingml/2006/main" xmlns:r="http://schemas.openxmlformats.org/officeDocument/2006/relationships" xmlns:p188="http://schemas.microsoft.com/office/powerpoint/2018/8/main">
+  <p188:author id="{9373AF2F-D106-FDB6-8752-779A83C8F52E}" name="Gergely Gáll" initials="GG" userId="e9bbdbbc2ad2da8c" providerId="Windows Live"/>
+</p188:authorLst>
+</file>
+
+<file path=ppt/comments/modernComment_100_5FBB5A60.xml><?xml version="1.0" encoding="utf-8"?>
+<p188:cmLst xmlns:a="http://schemas.openxmlformats.org/drawingml/2006/main" xmlns:r="http://schemas.openxmlformats.org/officeDocument/2006/relationships" xmlns:p188="http://schemas.microsoft.com/office/powerpoint/2018/8/main">
+  <p188:cm id="{C59583AA-0436-47AE-87C7-93AE5D55A280}" authorId="{9373AF2F-D106-FDB6-8752-779A83C8F52E}" created="2023-06-27T09:52:11.679">
+    <pc:sldMkLst xmlns:pc="http://schemas.microsoft.com/office/powerpoint/2013/main/command">
+      <pc:docMk/>
+      <pc:sldMk cId="1606113888" sldId="256"/>
+    </pc:sldMkLst>
+    <p188:txBody>
+      <a:bodyPr/>
+      <a:lstStyle/>
+      <a:p>
+        <a:r>
+          <a:rPr lang="hu-HU"/>
+          <a:t>A címdia ez csak a legelején lesz a tananyag címével</a:t>
+        </a:r>
+      </a:p>
+    </p188:txBody>
+  </p188:cm>
+</p188:cmLst>
+</file>
+
+<file path=ppt/comments/modernComment_101_D8E68C50.xml><?xml version="1.0" encoding="utf-8"?>
+<p188:cmLst xmlns:a="http://schemas.openxmlformats.org/drawingml/2006/main" xmlns:r="http://schemas.openxmlformats.org/officeDocument/2006/relationships" xmlns:p188="http://schemas.microsoft.com/office/powerpoint/2018/8/main">
+  <p188:cm id="{465DD596-C32D-42E8-BB07-42FDFBA798C3}" authorId="{9373AF2F-D106-FDB6-8752-779A83C8F52E}" created="2023-06-27T09:52:30.920">
+    <pc:sldMkLst xmlns:pc="http://schemas.microsoft.com/office/powerpoint/2013/main/command">
+      <pc:docMk/>
+      <pc:sldMk cId="3638987856" sldId="257"/>
+    </pc:sldMkLst>
+    <p188:txBody>
+      <a:bodyPr/>
+      <a:lstStyle/>
+      <a:p>
+        <a:r>
+          <a:rPr lang="hu-HU"/>
+          <a:t>Itt vannak felsorolva a modulok, mind a 12</a:t>
+        </a:r>
+      </a:p>
+    </p188:txBody>
+  </p188:cm>
+</p188:cmLst>
+</file>
+
+<file path=ppt/comments/modernComment_102_C866EA24.xml><?xml version="1.0" encoding="utf-8"?>
+<p188:cmLst xmlns:a="http://schemas.openxmlformats.org/drawingml/2006/main" xmlns:r="http://schemas.openxmlformats.org/officeDocument/2006/relationships" xmlns:p188="http://schemas.microsoft.com/office/powerpoint/2018/8/main">
+  <p188:cm id="{7F97C3A7-62BC-462F-86B0-24B2168F7999}" authorId="{9373AF2F-D106-FDB6-8752-779A83C8F52E}" created="2023-06-27T09:53:47.704">
+    <pc:sldMkLst xmlns:pc="http://schemas.microsoft.com/office/powerpoint/2013/main/command">
+      <pc:docMk/>
+      <pc:sldMk cId="3362187812" sldId="258"/>
+    </pc:sldMkLst>
+    <p188:txBody>
+      <a:bodyPr/>
+      <a:lstStyle/>
+      <a:p>
+        <a:r>
+          <a:rPr lang="hu-HU"/>
+          <a:t>Minden modulnak lesz  egy külön címdiája</a:t>
+        </a:r>
+      </a:p>
+    </p188:txBody>
+  </p188:cm>
+</p188:cmLst>
+</file>
+
+<file path=ppt/comments/modernComment_10E_61C7C94.xml><?xml version="1.0" encoding="utf-8"?>
+<p188:cmLst xmlns:a="http://schemas.openxmlformats.org/drawingml/2006/main" xmlns:r="http://schemas.openxmlformats.org/officeDocument/2006/relationships" xmlns:p188="http://schemas.microsoft.com/office/powerpoint/2018/8/main">
+  <p188:cm id="{B6501600-0268-4284-A313-1286C03B9111}" authorId="{9373AF2F-D106-FDB6-8752-779A83C8F52E}" created="2023-06-27T09:54:06.389">
+    <pc:sldMkLst xmlns:pc="http://schemas.microsoft.com/office/powerpoint/2013/main/command">
+      <pc:docMk/>
+      <pc:sldMk cId="102530196" sldId="270"/>
+    </pc:sldMkLst>
+    <p188:txBody>
+      <a:bodyPr/>
+      <a:lstStyle/>
+      <a:p>
+        <a:r>
+          <a:rPr lang="hu-HU"/>
+          <a:t>Ez pedig hogy az adott modul milyen leckéket tartalmaz</a:t>
+        </a:r>
+      </a:p>
+    </p188:txBody>
+  </p188:cm>
+</p188:cmLst>
+</file>
+
+<file path=ppt/comments/modernComment_119_42E1E778.xml><?xml version="1.0" encoding="utf-8"?>
+<p188:cmLst xmlns:a="http://schemas.openxmlformats.org/drawingml/2006/main" xmlns:r="http://schemas.openxmlformats.org/officeDocument/2006/relationships" xmlns:p188="http://schemas.microsoft.com/office/powerpoint/2018/8/main">
+  <p188:cm id="{A950DFC0-03B1-4478-BE72-653665BB09C8}" authorId="{9373AF2F-D106-FDB6-8752-779A83C8F52E}" created="2023-06-27T09:54:33.878">
+    <pc:sldMkLst xmlns:pc="http://schemas.microsoft.com/office/powerpoint/2013/main/command">
+      <pc:docMk/>
+      <pc:sldMk cId="1122101112" sldId="281"/>
+    </pc:sldMkLst>
+    <p188:txBody>
+      <a:bodyPr/>
+      <a:lstStyle/>
+      <a:p>
+        <a:r>
+          <a:rPr lang="hu-HU"/>
+          <a:t>Minden leckének szintén lesz egy diája, ebből cask ez az egyet készítettem el példának</a:t>
+        </a:r>
+      </a:p>
+    </p188:txBody>
+  </p188:cm>
+</p188:cmLst>
 </file>
 
 <file path=ppt/slideLayouts/slideLayout1.xml><?xml version="1.0" encoding="utf-8"?>
@@ -278,7 +395,7 @@
           <a:p>
             <a:fld id="{75E5F654-D2C6-4A32-849D-6BE925CD676B}" type="datetimeFigureOut">
               <a:rPr lang="hu-HU" smtClean="0"/>
-              <a:t>2023. 06. 20.</a:t>
+              <a:t>2023. 06. 27.</a:t>
             </a:fld>
             <a:endParaRPr lang="hu-HU"/>
           </a:p>
@@ -476,7 +593,7 @@
           <a:p>
             <a:fld id="{75E5F654-D2C6-4A32-849D-6BE925CD676B}" type="datetimeFigureOut">
               <a:rPr lang="hu-HU" smtClean="0"/>
-              <a:t>2023. 06. 20.</a:t>
+              <a:t>2023. 06. 27.</a:t>
             </a:fld>
             <a:endParaRPr lang="hu-HU"/>
           </a:p>
@@ -684,7 +801,7 @@
           <a:p>
             <a:fld id="{75E5F654-D2C6-4A32-849D-6BE925CD676B}" type="datetimeFigureOut">
               <a:rPr lang="hu-HU" smtClean="0"/>
-              <a:t>2023. 06. 20.</a:t>
+              <a:t>2023. 06. 27.</a:t>
             </a:fld>
             <a:endParaRPr lang="hu-HU"/>
           </a:p>
@@ -882,7 +999,7 @@
           <a:p>
             <a:fld id="{75E5F654-D2C6-4A32-849D-6BE925CD676B}" type="datetimeFigureOut">
               <a:rPr lang="hu-HU" smtClean="0"/>
-              <a:t>2023. 06. 20.</a:t>
+              <a:t>2023. 06. 27.</a:t>
             </a:fld>
             <a:endParaRPr lang="hu-HU"/>
           </a:p>
@@ -1157,7 +1274,7 @@
           <a:p>
             <a:fld id="{75E5F654-D2C6-4A32-849D-6BE925CD676B}" type="datetimeFigureOut">
               <a:rPr lang="hu-HU" smtClean="0"/>
-              <a:t>2023. 06. 20.</a:t>
+              <a:t>2023. 06. 27.</a:t>
             </a:fld>
             <a:endParaRPr lang="hu-HU"/>
           </a:p>
@@ -1422,7 +1539,7 @@
           <a:p>
             <a:fld id="{75E5F654-D2C6-4A32-849D-6BE925CD676B}" type="datetimeFigureOut">
               <a:rPr lang="hu-HU" smtClean="0"/>
-              <a:t>2023. 06. 20.</a:t>
+              <a:t>2023. 06. 27.</a:t>
             </a:fld>
             <a:endParaRPr lang="hu-HU"/>
           </a:p>
@@ -1834,7 +1951,7 @@
           <a:p>
             <a:fld id="{75E5F654-D2C6-4A32-849D-6BE925CD676B}" type="datetimeFigureOut">
               <a:rPr lang="hu-HU" smtClean="0"/>
-              <a:t>2023. 06. 20.</a:t>
+              <a:t>2023. 06. 27.</a:t>
             </a:fld>
             <a:endParaRPr lang="hu-HU"/>
           </a:p>
@@ -1975,7 +2092,7 @@
           <a:p>
             <a:fld id="{75E5F654-D2C6-4A32-849D-6BE925CD676B}" type="datetimeFigureOut">
               <a:rPr lang="hu-HU" smtClean="0"/>
-              <a:t>2023. 06. 20.</a:t>
+              <a:t>2023. 06. 27.</a:t>
             </a:fld>
             <a:endParaRPr lang="hu-HU"/>
           </a:p>
@@ -2088,7 +2205,7 @@
           <a:p>
             <a:fld id="{75E5F654-D2C6-4A32-849D-6BE925CD676B}" type="datetimeFigureOut">
               <a:rPr lang="hu-HU" smtClean="0"/>
-              <a:t>2023. 06. 20.</a:t>
+              <a:t>2023. 06. 27.</a:t>
             </a:fld>
             <a:endParaRPr lang="hu-HU"/>
           </a:p>
@@ -2399,7 +2516,7 @@
           <a:p>
             <a:fld id="{75E5F654-D2C6-4A32-849D-6BE925CD676B}" type="datetimeFigureOut">
               <a:rPr lang="hu-HU" smtClean="0"/>
-              <a:t>2023. 06. 20.</a:t>
+              <a:t>2023. 06. 27.</a:t>
             </a:fld>
             <a:endParaRPr lang="hu-HU"/>
           </a:p>
@@ -2687,7 +2804,7 @@
           <a:p>
             <a:fld id="{75E5F654-D2C6-4A32-849D-6BE925CD676B}" type="datetimeFigureOut">
               <a:rPr lang="hu-HU" smtClean="0"/>
-              <a:t>2023. 06. 20.</a:t>
+              <a:t>2023. 06. 27.</a:t>
             </a:fld>
             <a:endParaRPr lang="hu-HU"/>
           </a:p>
@@ -2928,7 +3045,7 @@
           <a:p>
             <a:fld id="{75E5F654-D2C6-4A32-849D-6BE925CD676B}" type="datetimeFigureOut">
               <a:rPr lang="hu-HU" smtClean="0"/>
-              <a:t>2023. 06. 20.</a:t>
+              <a:t>2023. 06. 27.</a:t>
             </a:fld>
             <a:endParaRPr lang="hu-HU"/>
           </a:p>
@@ -3408,6 +3525,11 @@
   <p:clrMapOvr>
     <a:masterClrMapping/>
   </p:clrMapOvr>
+  <p:extLst>
+    <p:ext uri="{6950BFC3-D8DA-4A85-94F7-54DA5524770B}">
+      <p188:commentRel xmlns:p188="http://schemas.microsoft.com/office/powerpoint/2018/8/main" r:id="rId2"/>
+    </p:ext>
+  </p:extLst>
 </p:sld>
 </file>
 
@@ -3430,10 +3552,10 @@
       </p:grpSpPr>
       <p:sp>
         <p:nvSpPr>
-          <p:cNvPr id="10" name="Cím 9">
-            <a:extLst>
-              <a:ext uri="{FF2B5EF4-FFF2-40B4-BE49-F238E27FC236}">
-                <a16:creationId xmlns:a16="http://schemas.microsoft.com/office/drawing/2014/main" id="{026B303C-F00B-C202-DACD-409846B572C8}"/>
+          <p:cNvPr id="2" name="Cím 1">
+            <a:extLst>
+              <a:ext uri="{FF2B5EF4-FFF2-40B4-BE49-F238E27FC236}">
+                <a16:creationId xmlns:a16="http://schemas.microsoft.com/office/drawing/2014/main" id="{67E45071-3E91-3975-958C-43782E39B6B9}"/>
               </a:ext>
             </a:extLst>
           </p:cNvPr>
@@ -3442,6 +3564,46 @@
           </p:cNvSpPr>
           <p:nvPr>
             <p:ph type="title"/>
+          </p:nvPr>
+        </p:nvSpPr>
+        <p:spPr/>
+        <p:txBody>
+          <a:bodyPr/>
+          <a:lstStyle/>
+          <a:p>
+            <a:r>
+              <a:rPr lang="hu-HU" dirty="0" err="1"/>
+              <a:t>if</a:t>
+            </a:r>
+            <a:r>
+              <a:rPr lang="hu-HU" dirty="0"/>
+              <a:t> </a:t>
+            </a:r>
+            <a:r>
+              <a:rPr lang="hu-HU" dirty="0" err="1"/>
+              <a:t>else</a:t>
+            </a:r>
+            <a:r>
+              <a:rPr lang="hu-HU" dirty="0"/>
+              <a:t> vezérlési szerkezet, vezérlési szerkezetek egymásba ágyazása</a:t>
+            </a:r>
+          </a:p>
+        </p:txBody>
+      </p:sp>
+      <p:sp>
+        <p:nvSpPr>
+          <p:cNvPr id="3" name="Tartalom helye 2">
+            <a:extLst>
+              <a:ext uri="{FF2B5EF4-FFF2-40B4-BE49-F238E27FC236}">
+                <a16:creationId xmlns:a16="http://schemas.microsoft.com/office/drawing/2014/main" id="{0F52A367-7627-7B81-0E00-66AB83DC996D}"/>
+              </a:ext>
+            </a:extLst>
+          </p:cNvPr>
+          <p:cNvSpPr>
+            <a:spLocks noGrp="1"/>
+          </p:cNvSpPr>
+          <p:nvPr>
+            <p:ph type="body" idx="1"/>
           </p:nvPr>
         </p:nvSpPr>
         <p:spPr/>
@@ -3451,218 +3613,6 @@
           </a:bodyPr>
           <a:lstStyle/>
           <a:p>
-            <a:r>
-              <a:rPr lang="hu-HU" dirty="0" err="1"/>
-              <a:t>if</a:t>
-            </a:r>
-            <a:r>
-              <a:rPr lang="hu-HU" dirty="0"/>
-              <a:t> </a:t>
-            </a:r>
-            <a:r>
-              <a:rPr lang="hu-HU" dirty="0" err="1"/>
-              <a:t>else</a:t>
-            </a:r>
-            <a:r>
-              <a:rPr lang="hu-HU" dirty="0"/>
-              <a:t> vezérlési szerkezet, vezérlési szerkezetek egymásba ágyazása</a:t>
-            </a:r>
-          </a:p>
-        </p:txBody>
-      </p:sp>
-      <p:sp>
-        <p:nvSpPr>
-          <p:cNvPr id="11" name="Tartalom helye 10">
-            <a:extLst>
-              <a:ext uri="{FF2B5EF4-FFF2-40B4-BE49-F238E27FC236}">
-                <a16:creationId xmlns:a16="http://schemas.microsoft.com/office/drawing/2014/main" id="{1304DAAD-A571-195A-29C9-8BA795B1C660}"/>
-              </a:ext>
-            </a:extLst>
-          </p:cNvPr>
-          <p:cNvSpPr>
-            <a:spLocks noGrp="1"/>
-          </p:cNvSpPr>
-          <p:nvPr>
-            <p:ph idx="1"/>
-          </p:nvPr>
-        </p:nvSpPr>
-        <p:spPr/>
-        <p:txBody>
-          <a:bodyPr>
-            <a:normAutofit fontScale="62500" lnSpcReduction="20000"/>
-          </a:bodyPr>
-          <a:lstStyle/>
-          <a:p>
-            <a:r>
-              <a:rPr lang="hu-HU" dirty="0"/>
-              <a:t>A </a:t>
-            </a:r>
-            <a:r>
-              <a:rPr lang="hu-HU" dirty="0" err="1"/>
-              <a:t>bool</a:t>
-            </a:r>
-            <a:r>
-              <a:rPr lang="hu-HU" dirty="0"/>
-              <a:t>, logikai típus</a:t>
-            </a:r>
-          </a:p>
-          <a:p>
-            <a:r>
-              <a:rPr lang="hu-HU" dirty="0"/>
-              <a:t>Feltételes szerkezet: </a:t>
-            </a:r>
-            <a:r>
-              <a:rPr lang="hu-HU" dirty="0" err="1"/>
-              <a:t>if</a:t>
-            </a:r>
-            <a:r>
-              <a:rPr lang="hu-HU" dirty="0"/>
-              <a:t>, </a:t>
-            </a:r>
-            <a:r>
-              <a:rPr lang="hu-HU" dirty="0" err="1"/>
-              <a:t>else</a:t>
-            </a:r>
-            <a:endParaRPr lang="hu-HU" dirty="0"/>
-          </a:p>
-          <a:p>
-            <a:r>
-              <a:rPr lang="hu-HU" dirty="0"/>
-              <a:t>Az </a:t>
-            </a:r>
-            <a:r>
-              <a:rPr lang="hu-HU" dirty="0" err="1"/>
-              <a:t>elif</a:t>
-            </a:r>
-            <a:r>
-              <a:rPr lang="hu-HU" dirty="0"/>
-              <a:t> ág</a:t>
-            </a:r>
-          </a:p>
-          <a:p>
-            <a:r>
-              <a:rPr lang="hu-HU" dirty="0"/>
-              <a:t>Ciklusok és elágazások együttes használata</a:t>
-            </a:r>
-          </a:p>
-          <a:p>
-            <a:r>
-              <a:rPr lang="hu-HU" dirty="0"/>
-              <a:t>Összetett feltételek, az and </a:t>
-            </a:r>
-            <a:r>
-              <a:rPr lang="hu-HU" dirty="0" err="1"/>
-              <a:t>ooperátor</a:t>
-            </a:r>
-            <a:endParaRPr lang="hu-HU" dirty="0"/>
-          </a:p>
-          <a:p>
-            <a:r>
-              <a:rPr lang="hu-HU" dirty="0"/>
-              <a:t>Összetett feltételek, az </a:t>
-            </a:r>
-            <a:r>
-              <a:rPr lang="hu-HU" dirty="0" err="1"/>
-              <a:t>or</a:t>
-            </a:r>
-            <a:r>
-              <a:rPr lang="hu-HU" dirty="0"/>
-              <a:t> </a:t>
-            </a:r>
-            <a:r>
-              <a:rPr lang="hu-HU" dirty="0" err="1"/>
-              <a:t>ooperátor</a:t>
-            </a:r>
-            <a:endParaRPr lang="hu-HU" dirty="0"/>
-          </a:p>
-          <a:p>
-            <a:r>
-              <a:rPr lang="hu-HU" dirty="0"/>
-              <a:t>Az and és </a:t>
-            </a:r>
-            <a:r>
-              <a:rPr lang="hu-HU" dirty="0" err="1"/>
-              <a:t>or</a:t>
-            </a:r>
-            <a:r>
-              <a:rPr lang="hu-HU" dirty="0"/>
-              <a:t> </a:t>
-            </a:r>
-            <a:r>
-              <a:rPr lang="hu-HU" dirty="0" err="1"/>
-              <a:t>opertorok</a:t>
-            </a:r>
-            <a:r>
-              <a:rPr lang="hu-HU" dirty="0"/>
-              <a:t> együttes használata, </a:t>
-            </a:r>
-            <a:r>
-              <a:rPr lang="hu-HU" dirty="0" err="1"/>
-              <a:t>precedencia</a:t>
-            </a:r>
-            <a:endParaRPr lang="hu-HU" dirty="0"/>
-          </a:p>
-          <a:p>
-            <a:r>
-              <a:rPr lang="hu-HU" dirty="0"/>
-              <a:t>Az is operátor</a:t>
-            </a:r>
-          </a:p>
-          <a:p>
-            <a:r>
-              <a:rPr lang="hu-HU" dirty="0"/>
-              <a:t>A </a:t>
-            </a:r>
-            <a:r>
-              <a:rPr lang="hu-HU" dirty="0" err="1"/>
-              <a:t>break</a:t>
-            </a:r>
-            <a:r>
-              <a:rPr lang="hu-HU" dirty="0"/>
-              <a:t> utasítás</a:t>
-            </a:r>
-          </a:p>
-          <a:p>
-            <a:r>
-              <a:rPr lang="hu-HU" dirty="0"/>
-              <a:t>A </a:t>
-            </a:r>
-            <a:r>
-              <a:rPr lang="hu-HU" dirty="0" err="1"/>
-              <a:t>continue</a:t>
-            </a:r>
-            <a:r>
-              <a:rPr lang="hu-HU" dirty="0"/>
-              <a:t> utasítás</a:t>
-            </a:r>
-          </a:p>
-          <a:p>
-            <a:r>
-              <a:rPr lang="hu-HU" dirty="0"/>
-              <a:t>Mátrixok</a:t>
-            </a:r>
-          </a:p>
-          <a:p>
-            <a:r>
-              <a:rPr lang="hu-HU" dirty="0"/>
-              <a:t>A </a:t>
-            </a:r>
-            <a:r>
-              <a:rPr lang="hu-HU" dirty="0" err="1"/>
-              <a:t>while</a:t>
-            </a:r>
-            <a:r>
-              <a:rPr lang="hu-HU" dirty="0"/>
-              <a:t> ciklus</a:t>
-            </a:r>
-          </a:p>
-          <a:p>
-            <a:r>
-              <a:rPr lang="hu-HU" dirty="0"/>
-              <a:t>Végtelen ciklusok</a:t>
-            </a:r>
-          </a:p>
-          <a:p>
             <a:endParaRPr lang="hu-HU" dirty="0"/>
           </a:p>
         </p:txBody>
@@ -3670,7 +3620,7 @@
     </p:spTree>
     <p:extLst>
       <p:ext uri="{BB962C8B-B14F-4D97-AF65-F5344CB8AC3E}">
-        <p14:creationId xmlns:p14="http://schemas.microsoft.com/office/powerpoint/2010/main" val="1049711745"/>
+        <p14:creationId xmlns:p14="http://schemas.microsoft.com/office/powerpoint/2010/main" val="1626009815"/>
       </p:ext>
     </p:extLst>
   </p:cSld>
@@ -3699,10 +3649,10 @@
       </p:grpSpPr>
       <p:sp>
         <p:nvSpPr>
-          <p:cNvPr id="2" name="Cím 1">
-            <a:extLst>
-              <a:ext uri="{FF2B5EF4-FFF2-40B4-BE49-F238E27FC236}">
-                <a16:creationId xmlns:a16="http://schemas.microsoft.com/office/drawing/2014/main" id="{67E45071-3E91-3975-958C-43782E39B6B9}"/>
+          <p:cNvPr id="10" name="Cím 9">
+            <a:extLst>
+              <a:ext uri="{FF2B5EF4-FFF2-40B4-BE49-F238E27FC236}">
+                <a16:creationId xmlns:a16="http://schemas.microsoft.com/office/drawing/2014/main" id="{026B303C-F00B-C202-DACD-409846B572C8}"/>
               </a:ext>
             </a:extLst>
           </p:cNvPr>
@@ -3711,34 +3661,6 @@
           </p:cNvSpPr>
           <p:nvPr>
             <p:ph type="title"/>
-          </p:nvPr>
-        </p:nvSpPr>
-        <p:spPr/>
-        <p:txBody>
-          <a:bodyPr/>
-          <a:lstStyle/>
-          <a:p>
-            <a:r>
-              <a:rPr lang="hu-HU" dirty="0"/>
-              <a:t>Listák kezelésének haladó technikái</a:t>
-            </a:r>
-          </a:p>
-        </p:txBody>
-      </p:sp>
-      <p:sp>
-        <p:nvSpPr>
-          <p:cNvPr id="3" name="Tartalom helye 2">
-            <a:extLst>
-              <a:ext uri="{FF2B5EF4-FFF2-40B4-BE49-F238E27FC236}">
-                <a16:creationId xmlns:a16="http://schemas.microsoft.com/office/drawing/2014/main" id="{0F52A367-7627-7B81-0E00-66AB83DC996D}"/>
-              </a:ext>
-            </a:extLst>
-          </p:cNvPr>
-          <p:cNvSpPr>
-            <a:spLocks noGrp="1"/>
-          </p:cNvSpPr>
-          <p:nvPr>
-            <p:ph type="body" idx="1"/>
           </p:nvPr>
         </p:nvSpPr>
         <p:spPr/>
@@ -3748,6 +3670,218 @@
           </a:bodyPr>
           <a:lstStyle/>
           <a:p>
+            <a:r>
+              <a:rPr lang="hu-HU" dirty="0" err="1"/>
+              <a:t>if</a:t>
+            </a:r>
+            <a:r>
+              <a:rPr lang="hu-HU" dirty="0"/>
+              <a:t> </a:t>
+            </a:r>
+            <a:r>
+              <a:rPr lang="hu-HU" dirty="0" err="1"/>
+              <a:t>else</a:t>
+            </a:r>
+            <a:r>
+              <a:rPr lang="hu-HU" dirty="0"/>
+              <a:t> vezérlési szerkezet, vezérlési szerkezetek egymásba ágyazása</a:t>
+            </a:r>
+          </a:p>
+        </p:txBody>
+      </p:sp>
+      <p:sp>
+        <p:nvSpPr>
+          <p:cNvPr id="11" name="Tartalom helye 10">
+            <a:extLst>
+              <a:ext uri="{FF2B5EF4-FFF2-40B4-BE49-F238E27FC236}">
+                <a16:creationId xmlns:a16="http://schemas.microsoft.com/office/drawing/2014/main" id="{1304DAAD-A571-195A-29C9-8BA795B1C660}"/>
+              </a:ext>
+            </a:extLst>
+          </p:cNvPr>
+          <p:cNvSpPr>
+            <a:spLocks noGrp="1"/>
+          </p:cNvSpPr>
+          <p:nvPr>
+            <p:ph idx="1"/>
+          </p:nvPr>
+        </p:nvSpPr>
+        <p:spPr/>
+        <p:txBody>
+          <a:bodyPr>
+            <a:normAutofit fontScale="62500" lnSpcReduction="20000"/>
+          </a:bodyPr>
+          <a:lstStyle/>
+          <a:p>
+            <a:r>
+              <a:rPr lang="hu-HU" dirty="0"/>
+              <a:t>A </a:t>
+            </a:r>
+            <a:r>
+              <a:rPr lang="hu-HU" dirty="0" err="1"/>
+              <a:t>bool</a:t>
+            </a:r>
+            <a:r>
+              <a:rPr lang="hu-HU" dirty="0"/>
+              <a:t>, logikai típus</a:t>
+            </a:r>
+          </a:p>
+          <a:p>
+            <a:r>
+              <a:rPr lang="hu-HU" dirty="0"/>
+              <a:t>Feltételes szerkezet: </a:t>
+            </a:r>
+            <a:r>
+              <a:rPr lang="hu-HU" dirty="0" err="1"/>
+              <a:t>if</a:t>
+            </a:r>
+            <a:r>
+              <a:rPr lang="hu-HU" dirty="0"/>
+              <a:t>, </a:t>
+            </a:r>
+            <a:r>
+              <a:rPr lang="hu-HU" dirty="0" err="1"/>
+              <a:t>else</a:t>
+            </a:r>
+            <a:endParaRPr lang="hu-HU" dirty="0"/>
+          </a:p>
+          <a:p>
+            <a:r>
+              <a:rPr lang="hu-HU" dirty="0"/>
+              <a:t>Az </a:t>
+            </a:r>
+            <a:r>
+              <a:rPr lang="hu-HU" dirty="0" err="1"/>
+              <a:t>elif</a:t>
+            </a:r>
+            <a:r>
+              <a:rPr lang="hu-HU" dirty="0"/>
+              <a:t> ág</a:t>
+            </a:r>
+          </a:p>
+          <a:p>
+            <a:r>
+              <a:rPr lang="hu-HU" dirty="0"/>
+              <a:t>Ciklusok és elágazások együttes használata</a:t>
+            </a:r>
+          </a:p>
+          <a:p>
+            <a:r>
+              <a:rPr lang="hu-HU" dirty="0"/>
+              <a:t>Összetett feltételek, az and </a:t>
+            </a:r>
+            <a:r>
+              <a:rPr lang="hu-HU" dirty="0" err="1"/>
+              <a:t>ooperátor</a:t>
+            </a:r>
+            <a:endParaRPr lang="hu-HU" dirty="0"/>
+          </a:p>
+          <a:p>
+            <a:r>
+              <a:rPr lang="hu-HU" dirty="0"/>
+              <a:t>Összetett feltételek, az </a:t>
+            </a:r>
+            <a:r>
+              <a:rPr lang="hu-HU" dirty="0" err="1"/>
+              <a:t>or</a:t>
+            </a:r>
+            <a:r>
+              <a:rPr lang="hu-HU" dirty="0"/>
+              <a:t> </a:t>
+            </a:r>
+            <a:r>
+              <a:rPr lang="hu-HU" dirty="0" err="1"/>
+              <a:t>ooperátor</a:t>
+            </a:r>
+            <a:endParaRPr lang="hu-HU" dirty="0"/>
+          </a:p>
+          <a:p>
+            <a:r>
+              <a:rPr lang="hu-HU" dirty="0"/>
+              <a:t>Az and és </a:t>
+            </a:r>
+            <a:r>
+              <a:rPr lang="hu-HU" dirty="0" err="1"/>
+              <a:t>or</a:t>
+            </a:r>
+            <a:r>
+              <a:rPr lang="hu-HU" dirty="0"/>
+              <a:t> </a:t>
+            </a:r>
+            <a:r>
+              <a:rPr lang="hu-HU" dirty="0" err="1"/>
+              <a:t>opertorok</a:t>
+            </a:r>
+            <a:r>
+              <a:rPr lang="hu-HU" dirty="0"/>
+              <a:t> együttes használata, </a:t>
+            </a:r>
+            <a:r>
+              <a:rPr lang="hu-HU" dirty="0" err="1"/>
+              <a:t>precedencia</a:t>
+            </a:r>
+            <a:endParaRPr lang="hu-HU" dirty="0"/>
+          </a:p>
+          <a:p>
+            <a:r>
+              <a:rPr lang="hu-HU" dirty="0"/>
+              <a:t>Az is operátor</a:t>
+            </a:r>
+          </a:p>
+          <a:p>
+            <a:r>
+              <a:rPr lang="hu-HU" dirty="0"/>
+              <a:t>A </a:t>
+            </a:r>
+            <a:r>
+              <a:rPr lang="hu-HU" dirty="0" err="1"/>
+              <a:t>break</a:t>
+            </a:r>
+            <a:r>
+              <a:rPr lang="hu-HU" dirty="0"/>
+              <a:t> utasítás</a:t>
+            </a:r>
+          </a:p>
+          <a:p>
+            <a:r>
+              <a:rPr lang="hu-HU" dirty="0"/>
+              <a:t>A </a:t>
+            </a:r>
+            <a:r>
+              <a:rPr lang="hu-HU" dirty="0" err="1"/>
+              <a:t>continue</a:t>
+            </a:r>
+            <a:r>
+              <a:rPr lang="hu-HU" dirty="0"/>
+              <a:t> utasítás</a:t>
+            </a:r>
+          </a:p>
+          <a:p>
+            <a:r>
+              <a:rPr lang="hu-HU" dirty="0"/>
+              <a:t>Mátrixok</a:t>
+            </a:r>
+          </a:p>
+          <a:p>
+            <a:r>
+              <a:rPr lang="hu-HU" dirty="0"/>
+              <a:t>A </a:t>
+            </a:r>
+            <a:r>
+              <a:rPr lang="hu-HU" dirty="0" err="1"/>
+              <a:t>while</a:t>
+            </a:r>
+            <a:r>
+              <a:rPr lang="hu-HU" dirty="0"/>
+              <a:t> ciklus</a:t>
+            </a:r>
+          </a:p>
+          <a:p>
+            <a:r>
+              <a:rPr lang="hu-HU" dirty="0"/>
+              <a:t>Végtelen ciklusok</a:t>
+            </a:r>
+          </a:p>
+          <a:p>
             <a:endParaRPr lang="hu-HU" dirty="0"/>
           </a:p>
         </p:txBody>
@@ -3755,7 +3889,7 @@
     </p:spTree>
     <p:extLst>
       <p:ext uri="{BB962C8B-B14F-4D97-AF65-F5344CB8AC3E}">
-        <p14:creationId xmlns:p14="http://schemas.microsoft.com/office/powerpoint/2010/main" val="520139568"/>
+        <p14:creationId xmlns:p14="http://schemas.microsoft.com/office/powerpoint/2010/main" val="1049711745"/>
       </p:ext>
     </p:extLst>
   </p:cSld>
@@ -3784,10 +3918,10 @@
       </p:grpSpPr>
       <p:sp>
         <p:nvSpPr>
-          <p:cNvPr id="10" name="Cím 9">
-            <a:extLst>
-              <a:ext uri="{FF2B5EF4-FFF2-40B4-BE49-F238E27FC236}">
-                <a16:creationId xmlns:a16="http://schemas.microsoft.com/office/drawing/2014/main" id="{026B303C-F00B-C202-DACD-409846B572C8}"/>
+          <p:cNvPr id="2" name="Cím 1">
+            <a:extLst>
+              <a:ext uri="{FF2B5EF4-FFF2-40B4-BE49-F238E27FC236}">
+                <a16:creationId xmlns:a16="http://schemas.microsoft.com/office/drawing/2014/main" id="{67E45071-3E91-3975-958C-43782E39B6B9}"/>
               </a:ext>
             </a:extLst>
           </p:cNvPr>
@@ -3796,6 +3930,34 @@
           </p:cNvSpPr>
           <p:nvPr>
             <p:ph type="title"/>
+          </p:nvPr>
+        </p:nvSpPr>
+        <p:spPr/>
+        <p:txBody>
+          <a:bodyPr/>
+          <a:lstStyle/>
+          <a:p>
+            <a:r>
+              <a:rPr lang="hu-HU" dirty="0"/>
+              <a:t>Listák kezelésének haladó technikái</a:t>
+            </a:r>
+          </a:p>
+        </p:txBody>
+      </p:sp>
+      <p:sp>
+        <p:nvSpPr>
+          <p:cNvPr id="3" name="Tartalom helye 2">
+            <a:extLst>
+              <a:ext uri="{FF2B5EF4-FFF2-40B4-BE49-F238E27FC236}">
+                <a16:creationId xmlns:a16="http://schemas.microsoft.com/office/drawing/2014/main" id="{0F52A367-7627-7B81-0E00-66AB83DC996D}"/>
+              </a:ext>
+            </a:extLst>
+          </p:cNvPr>
+          <p:cNvSpPr>
+            <a:spLocks noGrp="1"/>
+          </p:cNvSpPr>
+          <p:nvPr>
+            <p:ph type="body" idx="1"/>
           </p:nvPr>
         </p:nvSpPr>
         <p:spPr/>
@@ -3805,154 +3967,6 @@
           </a:bodyPr>
           <a:lstStyle/>
           <a:p>
-            <a:r>
-              <a:rPr lang="hu-HU" dirty="0"/>
-              <a:t>Listák kezelésének haladó technikái</a:t>
-            </a:r>
-          </a:p>
-        </p:txBody>
-      </p:sp>
-      <p:sp>
-        <p:nvSpPr>
-          <p:cNvPr id="11" name="Tartalom helye 10">
-            <a:extLst>
-              <a:ext uri="{FF2B5EF4-FFF2-40B4-BE49-F238E27FC236}">
-                <a16:creationId xmlns:a16="http://schemas.microsoft.com/office/drawing/2014/main" id="{1304DAAD-A571-195A-29C9-8BA795B1C660}"/>
-              </a:ext>
-            </a:extLst>
-          </p:cNvPr>
-          <p:cNvSpPr>
-            <a:spLocks noGrp="1"/>
-          </p:cNvSpPr>
-          <p:nvPr>
-            <p:ph idx="1"/>
-          </p:nvPr>
-        </p:nvSpPr>
-        <p:spPr/>
-        <p:txBody>
-          <a:bodyPr>
-            <a:normAutofit lnSpcReduction="10000"/>
-          </a:bodyPr>
-          <a:lstStyle/>
-          <a:p>
-            <a:r>
-              <a:rPr lang="hu-HU" dirty="0"/>
-              <a:t>Lista részhalmazának lekérdezése: </a:t>
-            </a:r>
-            <a:r>
-              <a:rPr lang="hu-HU" dirty="0" err="1"/>
-              <a:t>slicing</a:t>
-            </a:r>
-            <a:endParaRPr lang="hu-HU" dirty="0"/>
-          </a:p>
-          <a:p>
-            <a:r>
-              <a:rPr lang="hu-HU" dirty="0"/>
-              <a:t>Lista másolása </a:t>
-            </a:r>
-            <a:r>
-              <a:rPr lang="hu-HU" dirty="0" err="1"/>
-              <a:t>slicinggal</a:t>
-            </a:r>
-            <a:endParaRPr lang="hu-HU" dirty="0"/>
-          </a:p>
-          <a:p>
-            <a:r>
-              <a:rPr lang="hu-HU" dirty="0" err="1"/>
-              <a:t>Comprehension</a:t>
-            </a:r>
-            <a:endParaRPr lang="hu-HU" dirty="0"/>
-          </a:p>
-          <a:p>
-            <a:r>
-              <a:rPr lang="hu-HU" dirty="0" err="1"/>
-              <a:t>Comprehension</a:t>
-            </a:r>
-            <a:r>
-              <a:rPr lang="hu-HU" dirty="0"/>
-              <a:t> </a:t>
-            </a:r>
-            <a:r>
-              <a:rPr lang="hu-HU" dirty="0" err="1"/>
-              <a:t>if</a:t>
-            </a:r>
-            <a:endParaRPr lang="hu-HU" dirty="0"/>
-          </a:p>
-          <a:p>
-            <a:r>
-              <a:rPr lang="hu-HU" dirty="0" err="1"/>
-              <a:t>Comprehension</a:t>
-            </a:r>
-            <a:r>
-              <a:rPr lang="hu-HU" dirty="0"/>
-              <a:t> </a:t>
-            </a:r>
-            <a:r>
-              <a:rPr lang="hu-HU" dirty="0" err="1"/>
-              <a:t>nested</a:t>
-            </a:r>
-            <a:r>
-              <a:rPr lang="hu-HU" dirty="0"/>
-              <a:t> </a:t>
-            </a:r>
-            <a:r>
-              <a:rPr lang="hu-HU" dirty="0" err="1"/>
-              <a:t>list</a:t>
-            </a:r>
-            <a:endParaRPr lang="hu-HU" dirty="0"/>
-          </a:p>
-          <a:p>
-            <a:r>
-              <a:rPr lang="hu-HU" dirty="0" err="1"/>
-              <a:t>Mutiple</a:t>
-            </a:r>
-            <a:r>
-              <a:rPr lang="hu-HU" dirty="0"/>
-              <a:t> </a:t>
-            </a:r>
-            <a:r>
-              <a:rPr lang="hu-HU" dirty="0" err="1"/>
-              <a:t>assignement</a:t>
-            </a:r>
-            <a:endParaRPr lang="hu-HU" dirty="0"/>
-          </a:p>
-          <a:p>
-            <a:r>
-              <a:rPr lang="hu-HU" dirty="0" err="1"/>
-              <a:t>unpacking</a:t>
-            </a:r>
-            <a:r>
-              <a:rPr lang="hu-HU" dirty="0"/>
-              <a:t>, adatok elcserélése</a:t>
-            </a:r>
-          </a:p>
-          <a:p>
-            <a:r>
-              <a:rPr lang="hu-HU" dirty="0" err="1"/>
-              <a:t>string</a:t>
-            </a:r>
-            <a:r>
-              <a:rPr lang="hu-HU" dirty="0"/>
-              <a:t> </a:t>
-            </a:r>
-            <a:r>
-              <a:rPr lang="hu-HU" dirty="0" err="1"/>
-              <a:t>unpacking</a:t>
-            </a:r>
-            <a:endParaRPr lang="hu-HU" dirty="0"/>
-          </a:p>
-          <a:p>
-            <a:r>
-              <a:rPr lang="hu-HU" dirty="0"/>
-              <a:t>List </a:t>
-            </a:r>
-            <a:r>
-              <a:rPr lang="hu-HU" dirty="0" err="1"/>
-              <a:t>unpacking</a:t>
-            </a:r>
-            <a:endParaRPr lang="hu-HU" dirty="0"/>
-          </a:p>
-          <a:p>
             <a:endParaRPr lang="hu-HU" dirty="0"/>
           </a:p>
         </p:txBody>
@@ -3960,7 +3974,7 @@
     </p:spTree>
     <p:extLst>
       <p:ext uri="{BB962C8B-B14F-4D97-AF65-F5344CB8AC3E}">
-        <p14:creationId xmlns:p14="http://schemas.microsoft.com/office/powerpoint/2010/main" val="1715569417"/>
+        <p14:creationId xmlns:p14="http://schemas.microsoft.com/office/powerpoint/2010/main" val="520139568"/>
       </p:ext>
     </p:extLst>
   </p:cSld>
@@ -3989,10 +4003,10 @@
       </p:grpSpPr>
       <p:sp>
         <p:nvSpPr>
-          <p:cNvPr id="2" name="Cím 1">
-            <a:extLst>
-              <a:ext uri="{FF2B5EF4-FFF2-40B4-BE49-F238E27FC236}">
-                <a16:creationId xmlns:a16="http://schemas.microsoft.com/office/drawing/2014/main" id="{67E45071-3E91-3975-958C-43782E39B6B9}"/>
+          <p:cNvPr id="10" name="Cím 9">
+            <a:extLst>
+              <a:ext uri="{FF2B5EF4-FFF2-40B4-BE49-F238E27FC236}">
+                <a16:creationId xmlns:a16="http://schemas.microsoft.com/office/drawing/2014/main" id="{026B303C-F00B-C202-DACD-409846B572C8}"/>
               </a:ext>
             </a:extLst>
           </p:cNvPr>
@@ -4001,34 +4015,6 @@
           </p:cNvSpPr>
           <p:nvPr>
             <p:ph type="title"/>
-          </p:nvPr>
-        </p:nvSpPr>
-        <p:spPr/>
-        <p:txBody>
-          <a:bodyPr/>
-          <a:lstStyle/>
-          <a:p>
-            <a:r>
-              <a:rPr lang="hu-HU" dirty="0"/>
-              <a:t>Függvények</a:t>
-            </a:r>
-          </a:p>
-        </p:txBody>
-      </p:sp>
-      <p:sp>
-        <p:nvSpPr>
-          <p:cNvPr id="3" name="Tartalom helye 2">
-            <a:extLst>
-              <a:ext uri="{FF2B5EF4-FFF2-40B4-BE49-F238E27FC236}">
-                <a16:creationId xmlns:a16="http://schemas.microsoft.com/office/drawing/2014/main" id="{0F52A367-7627-7B81-0E00-66AB83DC996D}"/>
-              </a:ext>
-            </a:extLst>
-          </p:cNvPr>
-          <p:cNvSpPr>
-            <a:spLocks noGrp="1"/>
-          </p:cNvSpPr>
-          <p:nvPr>
-            <p:ph type="body" idx="1"/>
           </p:nvPr>
         </p:nvSpPr>
         <p:spPr/>
@@ -4038,6 +4024,154 @@
           </a:bodyPr>
           <a:lstStyle/>
           <a:p>
+            <a:r>
+              <a:rPr lang="hu-HU" dirty="0"/>
+              <a:t>Listák kezelésének haladó technikái</a:t>
+            </a:r>
+          </a:p>
+        </p:txBody>
+      </p:sp>
+      <p:sp>
+        <p:nvSpPr>
+          <p:cNvPr id="11" name="Tartalom helye 10">
+            <a:extLst>
+              <a:ext uri="{FF2B5EF4-FFF2-40B4-BE49-F238E27FC236}">
+                <a16:creationId xmlns:a16="http://schemas.microsoft.com/office/drawing/2014/main" id="{1304DAAD-A571-195A-29C9-8BA795B1C660}"/>
+              </a:ext>
+            </a:extLst>
+          </p:cNvPr>
+          <p:cNvSpPr>
+            <a:spLocks noGrp="1"/>
+          </p:cNvSpPr>
+          <p:nvPr>
+            <p:ph idx="1"/>
+          </p:nvPr>
+        </p:nvSpPr>
+        <p:spPr/>
+        <p:txBody>
+          <a:bodyPr>
+            <a:normAutofit lnSpcReduction="10000"/>
+          </a:bodyPr>
+          <a:lstStyle/>
+          <a:p>
+            <a:r>
+              <a:rPr lang="hu-HU" dirty="0"/>
+              <a:t>Lista részhalmazának lekérdezése: </a:t>
+            </a:r>
+            <a:r>
+              <a:rPr lang="hu-HU" dirty="0" err="1"/>
+              <a:t>slicing</a:t>
+            </a:r>
+            <a:endParaRPr lang="hu-HU" dirty="0"/>
+          </a:p>
+          <a:p>
+            <a:r>
+              <a:rPr lang="hu-HU" dirty="0"/>
+              <a:t>Lista másolása </a:t>
+            </a:r>
+            <a:r>
+              <a:rPr lang="hu-HU" dirty="0" err="1"/>
+              <a:t>slicinggal</a:t>
+            </a:r>
+            <a:endParaRPr lang="hu-HU" dirty="0"/>
+          </a:p>
+          <a:p>
+            <a:r>
+              <a:rPr lang="hu-HU" dirty="0" err="1"/>
+              <a:t>Comprehension</a:t>
+            </a:r>
+            <a:endParaRPr lang="hu-HU" dirty="0"/>
+          </a:p>
+          <a:p>
+            <a:r>
+              <a:rPr lang="hu-HU" dirty="0" err="1"/>
+              <a:t>Comprehension</a:t>
+            </a:r>
+            <a:r>
+              <a:rPr lang="hu-HU" dirty="0"/>
+              <a:t> </a:t>
+            </a:r>
+            <a:r>
+              <a:rPr lang="hu-HU" dirty="0" err="1"/>
+              <a:t>if</a:t>
+            </a:r>
+            <a:endParaRPr lang="hu-HU" dirty="0"/>
+          </a:p>
+          <a:p>
+            <a:r>
+              <a:rPr lang="hu-HU" dirty="0" err="1"/>
+              <a:t>Comprehension</a:t>
+            </a:r>
+            <a:r>
+              <a:rPr lang="hu-HU" dirty="0"/>
+              <a:t> </a:t>
+            </a:r>
+            <a:r>
+              <a:rPr lang="hu-HU" dirty="0" err="1"/>
+              <a:t>nested</a:t>
+            </a:r>
+            <a:r>
+              <a:rPr lang="hu-HU" dirty="0"/>
+              <a:t> </a:t>
+            </a:r>
+            <a:r>
+              <a:rPr lang="hu-HU" dirty="0" err="1"/>
+              <a:t>list</a:t>
+            </a:r>
+            <a:endParaRPr lang="hu-HU" dirty="0"/>
+          </a:p>
+          <a:p>
+            <a:r>
+              <a:rPr lang="hu-HU" dirty="0" err="1"/>
+              <a:t>Mutiple</a:t>
+            </a:r>
+            <a:r>
+              <a:rPr lang="hu-HU" dirty="0"/>
+              <a:t> </a:t>
+            </a:r>
+            <a:r>
+              <a:rPr lang="hu-HU" dirty="0" err="1"/>
+              <a:t>assignement</a:t>
+            </a:r>
+            <a:endParaRPr lang="hu-HU" dirty="0"/>
+          </a:p>
+          <a:p>
+            <a:r>
+              <a:rPr lang="hu-HU" dirty="0" err="1"/>
+              <a:t>unpacking</a:t>
+            </a:r>
+            <a:r>
+              <a:rPr lang="hu-HU" dirty="0"/>
+              <a:t>, adatok elcserélése</a:t>
+            </a:r>
+          </a:p>
+          <a:p>
+            <a:r>
+              <a:rPr lang="hu-HU" dirty="0" err="1"/>
+              <a:t>string</a:t>
+            </a:r>
+            <a:r>
+              <a:rPr lang="hu-HU" dirty="0"/>
+              <a:t> </a:t>
+            </a:r>
+            <a:r>
+              <a:rPr lang="hu-HU" dirty="0" err="1"/>
+              <a:t>unpacking</a:t>
+            </a:r>
+            <a:endParaRPr lang="hu-HU" dirty="0"/>
+          </a:p>
+          <a:p>
+            <a:r>
+              <a:rPr lang="hu-HU" dirty="0"/>
+              <a:t>List </a:t>
+            </a:r>
+            <a:r>
+              <a:rPr lang="hu-HU" dirty="0" err="1"/>
+              <a:t>unpacking</a:t>
+            </a:r>
+            <a:endParaRPr lang="hu-HU" dirty="0"/>
+          </a:p>
+          <a:p>
             <a:endParaRPr lang="hu-HU" dirty="0"/>
           </a:p>
         </p:txBody>
@@ -4045,7 +4179,7 @@
     </p:spTree>
     <p:extLst>
       <p:ext uri="{BB962C8B-B14F-4D97-AF65-F5344CB8AC3E}">
-        <p14:creationId xmlns:p14="http://schemas.microsoft.com/office/powerpoint/2010/main" val="1183259147"/>
+        <p14:creationId xmlns:p14="http://schemas.microsoft.com/office/powerpoint/2010/main" val="1715569417"/>
       </p:ext>
     </p:extLst>
   </p:cSld>
@@ -4074,10 +4208,10 @@
       </p:grpSpPr>
       <p:sp>
         <p:nvSpPr>
-          <p:cNvPr id="10" name="Cím 9">
-            <a:extLst>
-              <a:ext uri="{FF2B5EF4-FFF2-40B4-BE49-F238E27FC236}">
-                <a16:creationId xmlns:a16="http://schemas.microsoft.com/office/drawing/2014/main" id="{026B303C-F00B-C202-DACD-409846B572C8}"/>
+          <p:cNvPr id="2" name="Cím 1">
+            <a:extLst>
+              <a:ext uri="{FF2B5EF4-FFF2-40B4-BE49-F238E27FC236}">
+                <a16:creationId xmlns:a16="http://schemas.microsoft.com/office/drawing/2014/main" id="{67E45071-3E91-3975-958C-43782E39B6B9}"/>
               </a:ext>
             </a:extLst>
           </p:cNvPr>
@@ -4086,6 +4220,34 @@
           </p:cNvSpPr>
           <p:nvPr>
             <p:ph type="title"/>
+          </p:nvPr>
+        </p:nvSpPr>
+        <p:spPr/>
+        <p:txBody>
+          <a:bodyPr/>
+          <a:lstStyle/>
+          <a:p>
+            <a:r>
+              <a:rPr lang="hu-HU" dirty="0"/>
+              <a:t>Függvények</a:t>
+            </a:r>
+          </a:p>
+        </p:txBody>
+      </p:sp>
+      <p:sp>
+        <p:nvSpPr>
+          <p:cNvPr id="3" name="Tartalom helye 2">
+            <a:extLst>
+              <a:ext uri="{FF2B5EF4-FFF2-40B4-BE49-F238E27FC236}">
+                <a16:creationId xmlns:a16="http://schemas.microsoft.com/office/drawing/2014/main" id="{0F52A367-7627-7B81-0E00-66AB83DC996D}"/>
+              </a:ext>
+            </a:extLst>
+          </p:cNvPr>
+          <p:cNvSpPr>
+            <a:spLocks noGrp="1"/>
+          </p:cNvSpPr>
+          <p:nvPr>
+            <p:ph type="body" idx="1"/>
           </p:nvPr>
         </p:nvSpPr>
         <p:spPr/>
@@ -4095,187 +4257,14 @@
           </a:bodyPr>
           <a:lstStyle/>
           <a:p>
-            <a:r>
-              <a:rPr lang="hu-HU" dirty="0"/>
-              <a:t>Függvények</a:t>
-            </a:r>
-          </a:p>
-        </p:txBody>
-      </p:sp>
-      <p:sp>
-        <p:nvSpPr>
-          <p:cNvPr id="11" name="Tartalom helye 10">
-            <a:extLst>
-              <a:ext uri="{FF2B5EF4-FFF2-40B4-BE49-F238E27FC236}">
-                <a16:creationId xmlns:a16="http://schemas.microsoft.com/office/drawing/2014/main" id="{1304DAAD-A571-195A-29C9-8BA795B1C660}"/>
-              </a:ext>
-            </a:extLst>
-          </p:cNvPr>
-          <p:cNvSpPr>
-            <a:spLocks noGrp="1"/>
-          </p:cNvSpPr>
-          <p:nvPr>
-            <p:ph idx="1"/>
-          </p:nvPr>
-        </p:nvSpPr>
-        <p:spPr/>
-        <p:txBody>
-          <a:bodyPr>
-            <a:normAutofit fontScale="55000" lnSpcReduction="20000"/>
-          </a:bodyPr>
-          <a:lstStyle/>
-          <a:p>
-            <a:r>
-              <a:rPr lang="hu-HU" dirty="0"/>
-              <a:t>Függvények, eddigi függvények, a globálisan elérhető függvények listája</a:t>
-            </a:r>
-          </a:p>
-          <a:p>
-            <a:r>
-              <a:rPr lang="hu-HU" dirty="0"/>
-              <a:t>Függvények létrehozása, </a:t>
-            </a:r>
-          </a:p>
-          <a:p>
-            <a:r>
-              <a:rPr lang="hu-HU" dirty="0"/>
-              <a:t>Függvény paraméterek</a:t>
-            </a:r>
-          </a:p>
-          <a:p>
-            <a:r>
-              <a:rPr lang="hu-HU" dirty="0"/>
-              <a:t>Függvények visszatérési értéke</a:t>
-            </a:r>
-          </a:p>
-          <a:p>
-            <a:r>
-              <a:rPr lang="hu-HU" dirty="0"/>
-              <a:t>Több paraméter használata, sorrendiség</a:t>
-            </a:r>
-          </a:p>
-          <a:p>
-            <a:r>
-              <a:rPr lang="hu-HU" dirty="0"/>
-              <a:t>Nevesített paraméterek</a:t>
-            </a:r>
-          </a:p>
-          <a:p>
-            <a:r>
-              <a:rPr lang="hu-HU" dirty="0"/>
-              <a:t>A </a:t>
-            </a:r>
-            <a:r>
-              <a:rPr lang="hu-HU" dirty="0" err="1"/>
-              <a:t>None</a:t>
-            </a:r>
-            <a:r>
-              <a:rPr lang="hu-HU" dirty="0"/>
-              <a:t> típus</a:t>
-            </a:r>
-          </a:p>
-          <a:p>
-            <a:r>
-              <a:rPr lang="hu-HU" dirty="0"/>
-              <a:t>Paraméterek alapértelmezett értéke</a:t>
-            </a:r>
-          </a:p>
-          <a:p>
-            <a:r>
-              <a:rPr lang="hu-HU" dirty="0"/>
-              <a:t>Globális változók módosítása függvényből</a:t>
-            </a:r>
-          </a:p>
-          <a:p>
-            <a:r>
-              <a:rPr lang="hu-HU" dirty="0"/>
-              <a:t>A </a:t>
-            </a:r>
-            <a:r>
-              <a:rPr lang="hu-HU" dirty="0" err="1"/>
-              <a:t>global</a:t>
-            </a:r>
-            <a:r>
-              <a:rPr lang="hu-HU" dirty="0"/>
-              <a:t> kulcsszó</a:t>
-            </a:r>
-          </a:p>
-          <a:p>
-            <a:r>
-              <a:rPr lang="hu-HU" dirty="0"/>
-              <a:t>A </a:t>
-            </a:r>
-            <a:r>
-              <a:rPr lang="hu-HU" dirty="0" err="1"/>
-              <a:t>pass</a:t>
-            </a:r>
-            <a:r>
-              <a:rPr lang="hu-HU" dirty="0"/>
-              <a:t> utasítás</a:t>
-            </a:r>
-          </a:p>
-          <a:p>
-            <a:r>
-              <a:rPr lang="hu-HU" dirty="0"/>
-              <a:t>Lokális változók hatóköre, élettartama</a:t>
-            </a:r>
-          </a:p>
-          <a:p>
-            <a:r>
-              <a:rPr lang="hu-HU" dirty="0" err="1"/>
-              <a:t>Garbage</a:t>
-            </a:r>
-            <a:r>
-              <a:rPr lang="hu-HU" dirty="0"/>
-              <a:t> </a:t>
-            </a:r>
-            <a:r>
-              <a:rPr lang="hu-HU" dirty="0" err="1"/>
-              <a:t>collector</a:t>
-            </a:r>
-            <a:r>
-              <a:rPr lang="hu-HU" dirty="0"/>
-              <a:t>, körkörös hivatkozások</a:t>
-            </a:r>
-          </a:p>
-          <a:p>
-            <a:r>
-              <a:rPr lang="hu-HU" dirty="0" err="1"/>
-              <a:t>Reference</a:t>
-            </a:r>
-            <a:r>
-              <a:rPr lang="hu-HU" dirty="0"/>
-              <a:t> </a:t>
-            </a:r>
-            <a:r>
-              <a:rPr lang="hu-HU" dirty="0" err="1"/>
-              <a:t>counter</a:t>
-            </a:r>
-            <a:r>
-              <a:rPr lang="hu-HU" dirty="0"/>
-              <a:t> – referencia számlálás</a:t>
-            </a:r>
-          </a:p>
-          <a:p>
-            <a:r>
-              <a:rPr lang="hu-HU" dirty="0"/>
-              <a:t>Hibakeresés (</a:t>
-            </a:r>
-            <a:r>
-              <a:rPr lang="hu-HU" dirty="0" err="1"/>
-              <a:t>debuggolás</a:t>
-            </a:r>
-            <a:r>
-              <a:rPr lang="hu-HU" dirty="0"/>
-              <a:t>), szintaktikai és szemantikai hibák</a:t>
-            </a:r>
+            <a:endParaRPr lang="hu-HU" dirty="0"/>
           </a:p>
         </p:txBody>
       </p:sp>
     </p:spTree>
     <p:extLst>
       <p:ext uri="{BB962C8B-B14F-4D97-AF65-F5344CB8AC3E}">
-        <p14:creationId xmlns:p14="http://schemas.microsoft.com/office/powerpoint/2010/main" val="4012319093"/>
+        <p14:creationId xmlns:p14="http://schemas.microsoft.com/office/powerpoint/2010/main" val="1183259147"/>
       </p:ext>
     </p:extLst>
   </p:cSld>
@@ -4304,10 +4293,10 @@
       </p:grpSpPr>
       <p:sp>
         <p:nvSpPr>
-          <p:cNvPr id="2" name="Cím 1">
-            <a:extLst>
-              <a:ext uri="{FF2B5EF4-FFF2-40B4-BE49-F238E27FC236}">
-                <a16:creationId xmlns:a16="http://schemas.microsoft.com/office/drawing/2014/main" id="{67E45071-3E91-3975-958C-43782E39B6B9}"/>
+          <p:cNvPr id="10" name="Cím 9">
+            <a:extLst>
+              <a:ext uri="{FF2B5EF4-FFF2-40B4-BE49-F238E27FC236}">
+                <a16:creationId xmlns:a16="http://schemas.microsoft.com/office/drawing/2014/main" id="{026B303C-F00B-C202-DACD-409846B572C8}"/>
               </a:ext>
             </a:extLst>
           </p:cNvPr>
@@ -4316,34 +4305,6 @@
           </p:cNvSpPr>
           <p:nvPr>
             <p:ph type="title"/>
-          </p:nvPr>
-        </p:nvSpPr>
-        <p:spPr/>
-        <p:txBody>
-          <a:bodyPr/>
-          <a:lstStyle/>
-          <a:p>
-            <a:r>
-              <a:rPr lang="hu-HU" dirty="0"/>
-              <a:t>Nevezetes algoritmusok</a:t>
-            </a:r>
-          </a:p>
-        </p:txBody>
-      </p:sp>
-      <p:sp>
-        <p:nvSpPr>
-          <p:cNvPr id="3" name="Tartalom helye 2">
-            <a:extLst>
-              <a:ext uri="{FF2B5EF4-FFF2-40B4-BE49-F238E27FC236}">
-                <a16:creationId xmlns:a16="http://schemas.microsoft.com/office/drawing/2014/main" id="{0F52A367-7627-7B81-0E00-66AB83DC996D}"/>
-              </a:ext>
-            </a:extLst>
-          </p:cNvPr>
-          <p:cNvSpPr>
-            <a:spLocks noGrp="1"/>
-          </p:cNvSpPr>
-          <p:nvPr>
-            <p:ph type="body" idx="1"/>
           </p:nvPr>
         </p:nvSpPr>
         <p:spPr/>
@@ -4353,14 +4314,187 @@
           </a:bodyPr>
           <a:lstStyle/>
           <a:p>
-            <a:endParaRPr lang="hu-HU" dirty="0"/>
+            <a:r>
+              <a:rPr lang="hu-HU" dirty="0"/>
+              <a:t>Függvények</a:t>
+            </a:r>
+          </a:p>
+        </p:txBody>
+      </p:sp>
+      <p:sp>
+        <p:nvSpPr>
+          <p:cNvPr id="11" name="Tartalom helye 10">
+            <a:extLst>
+              <a:ext uri="{FF2B5EF4-FFF2-40B4-BE49-F238E27FC236}">
+                <a16:creationId xmlns:a16="http://schemas.microsoft.com/office/drawing/2014/main" id="{1304DAAD-A571-195A-29C9-8BA795B1C660}"/>
+              </a:ext>
+            </a:extLst>
+          </p:cNvPr>
+          <p:cNvSpPr>
+            <a:spLocks noGrp="1"/>
+          </p:cNvSpPr>
+          <p:nvPr>
+            <p:ph idx="1"/>
+          </p:nvPr>
+        </p:nvSpPr>
+        <p:spPr/>
+        <p:txBody>
+          <a:bodyPr>
+            <a:normAutofit fontScale="55000" lnSpcReduction="20000"/>
+          </a:bodyPr>
+          <a:lstStyle/>
+          <a:p>
+            <a:r>
+              <a:rPr lang="hu-HU" dirty="0"/>
+              <a:t>Függvények, eddigi függvények, a globálisan elérhető függvények listája</a:t>
+            </a:r>
+          </a:p>
+          <a:p>
+            <a:r>
+              <a:rPr lang="hu-HU" dirty="0"/>
+              <a:t>Függvények létrehozása, </a:t>
+            </a:r>
+          </a:p>
+          <a:p>
+            <a:r>
+              <a:rPr lang="hu-HU" dirty="0"/>
+              <a:t>Függvény paraméterek</a:t>
+            </a:r>
+          </a:p>
+          <a:p>
+            <a:r>
+              <a:rPr lang="hu-HU" dirty="0"/>
+              <a:t>Függvények visszatérési értéke</a:t>
+            </a:r>
+          </a:p>
+          <a:p>
+            <a:r>
+              <a:rPr lang="hu-HU" dirty="0"/>
+              <a:t>Több paraméter használata, sorrendiség</a:t>
+            </a:r>
+          </a:p>
+          <a:p>
+            <a:r>
+              <a:rPr lang="hu-HU" dirty="0"/>
+              <a:t>Nevesített paraméterek</a:t>
+            </a:r>
+          </a:p>
+          <a:p>
+            <a:r>
+              <a:rPr lang="hu-HU" dirty="0"/>
+              <a:t>A </a:t>
+            </a:r>
+            <a:r>
+              <a:rPr lang="hu-HU" dirty="0" err="1"/>
+              <a:t>None</a:t>
+            </a:r>
+            <a:r>
+              <a:rPr lang="hu-HU" dirty="0"/>
+              <a:t> típus</a:t>
+            </a:r>
+          </a:p>
+          <a:p>
+            <a:r>
+              <a:rPr lang="hu-HU" dirty="0"/>
+              <a:t>Paraméterek alapértelmezett értéke</a:t>
+            </a:r>
+          </a:p>
+          <a:p>
+            <a:r>
+              <a:rPr lang="hu-HU" dirty="0"/>
+              <a:t>Globális változók módosítása függvényből</a:t>
+            </a:r>
+          </a:p>
+          <a:p>
+            <a:r>
+              <a:rPr lang="hu-HU" dirty="0"/>
+              <a:t>A </a:t>
+            </a:r>
+            <a:r>
+              <a:rPr lang="hu-HU" dirty="0" err="1"/>
+              <a:t>global</a:t>
+            </a:r>
+            <a:r>
+              <a:rPr lang="hu-HU" dirty="0"/>
+              <a:t> kulcsszó</a:t>
+            </a:r>
+          </a:p>
+          <a:p>
+            <a:r>
+              <a:rPr lang="hu-HU" dirty="0"/>
+              <a:t>A </a:t>
+            </a:r>
+            <a:r>
+              <a:rPr lang="hu-HU" dirty="0" err="1"/>
+              <a:t>pass</a:t>
+            </a:r>
+            <a:r>
+              <a:rPr lang="hu-HU" dirty="0"/>
+              <a:t> utasítás</a:t>
+            </a:r>
+          </a:p>
+          <a:p>
+            <a:r>
+              <a:rPr lang="hu-HU" dirty="0"/>
+              <a:t>Lokális változók hatóköre, élettartama</a:t>
+            </a:r>
+          </a:p>
+          <a:p>
+            <a:r>
+              <a:rPr lang="hu-HU" dirty="0" err="1"/>
+              <a:t>Garbage</a:t>
+            </a:r>
+            <a:r>
+              <a:rPr lang="hu-HU" dirty="0"/>
+              <a:t> </a:t>
+            </a:r>
+            <a:r>
+              <a:rPr lang="hu-HU" dirty="0" err="1"/>
+              <a:t>collector</a:t>
+            </a:r>
+            <a:r>
+              <a:rPr lang="hu-HU" dirty="0"/>
+              <a:t>, körkörös hivatkozások</a:t>
+            </a:r>
+          </a:p>
+          <a:p>
+            <a:r>
+              <a:rPr lang="hu-HU" dirty="0" err="1"/>
+              <a:t>Reference</a:t>
+            </a:r>
+            <a:r>
+              <a:rPr lang="hu-HU" dirty="0"/>
+              <a:t> </a:t>
+            </a:r>
+            <a:r>
+              <a:rPr lang="hu-HU" dirty="0" err="1"/>
+              <a:t>counter</a:t>
+            </a:r>
+            <a:r>
+              <a:rPr lang="hu-HU" dirty="0"/>
+              <a:t> – referencia számlálás</a:t>
+            </a:r>
+          </a:p>
+          <a:p>
+            <a:r>
+              <a:rPr lang="hu-HU" dirty="0"/>
+              <a:t>Hibakeresés (</a:t>
+            </a:r>
+            <a:r>
+              <a:rPr lang="hu-HU" dirty="0" err="1"/>
+              <a:t>debuggolás</a:t>
+            </a:r>
+            <a:r>
+              <a:rPr lang="hu-HU" dirty="0"/>
+              <a:t>), szintaktikai és szemantikai hibák</a:t>
+            </a:r>
           </a:p>
         </p:txBody>
       </p:sp>
     </p:spTree>
     <p:extLst>
       <p:ext uri="{BB962C8B-B14F-4D97-AF65-F5344CB8AC3E}">
-        <p14:creationId xmlns:p14="http://schemas.microsoft.com/office/powerpoint/2010/main" val="2902561149"/>
+        <p14:creationId xmlns:p14="http://schemas.microsoft.com/office/powerpoint/2010/main" val="4012319093"/>
       </p:ext>
     </p:extLst>
   </p:cSld>
@@ -4389,10 +4523,10 @@
       </p:grpSpPr>
       <p:sp>
         <p:nvSpPr>
-          <p:cNvPr id="10" name="Cím 9">
-            <a:extLst>
-              <a:ext uri="{FF2B5EF4-FFF2-40B4-BE49-F238E27FC236}">
-                <a16:creationId xmlns:a16="http://schemas.microsoft.com/office/drawing/2014/main" id="{026B303C-F00B-C202-DACD-409846B572C8}"/>
+          <p:cNvPr id="2" name="Cím 1">
+            <a:extLst>
+              <a:ext uri="{FF2B5EF4-FFF2-40B4-BE49-F238E27FC236}">
+                <a16:creationId xmlns:a16="http://schemas.microsoft.com/office/drawing/2014/main" id="{67E45071-3E91-3975-958C-43782E39B6B9}"/>
               </a:ext>
             </a:extLst>
           </p:cNvPr>
@@ -4401,6 +4535,34 @@
           </p:cNvSpPr>
           <p:nvPr>
             <p:ph type="title"/>
+          </p:nvPr>
+        </p:nvSpPr>
+        <p:spPr/>
+        <p:txBody>
+          <a:bodyPr/>
+          <a:lstStyle/>
+          <a:p>
+            <a:r>
+              <a:rPr lang="hu-HU" dirty="0"/>
+              <a:t>Nevezetes algoritmusok</a:t>
+            </a:r>
+          </a:p>
+        </p:txBody>
+      </p:sp>
+      <p:sp>
+        <p:nvSpPr>
+          <p:cNvPr id="3" name="Tartalom helye 2">
+            <a:extLst>
+              <a:ext uri="{FF2B5EF4-FFF2-40B4-BE49-F238E27FC236}">
+                <a16:creationId xmlns:a16="http://schemas.microsoft.com/office/drawing/2014/main" id="{0F52A367-7627-7B81-0E00-66AB83DC996D}"/>
+              </a:ext>
+            </a:extLst>
+          </p:cNvPr>
+          <p:cNvSpPr>
+            <a:spLocks noGrp="1"/>
+          </p:cNvSpPr>
+          <p:nvPr>
+            <p:ph type="body" idx="1"/>
           </p:nvPr>
         </p:nvSpPr>
         <p:spPr/>
@@ -4410,95 +4572,14 @@
           </a:bodyPr>
           <a:lstStyle/>
           <a:p>
-            <a:r>
-              <a:rPr lang="hu-HU" dirty="0"/>
-              <a:t>Nevezetes algoritmusok</a:t>
-            </a:r>
-          </a:p>
-        </p:txBody>
-      </p:sp>
-      <p:sp>
-        <p:nvSpPr>
-          <p:cNvPr id="11" name="Tartalom helye 10">
-            <a:extLst>
-              <a:ext uri="{FF2B5EF4-FFF2-40B4-BE49-F238E27FC236}">
-                <a16:creationId xmlns:a16="http://schemas.microsoft.com/office/drawing/2014/main" id="{1304DAAD-A571-195A-29C9-8BA795B1C660}"/>
-              </a:ext>
-            </a:extLst>
-          </p:cNvPr>
-          <p:cNvSpPr>
-            <a:spLocks noGrp="1"/>
-          </p:cNvSpPr>
-          <p:nvPr>
-            <p:ph idx="1"/>
-          </p:nvPr>
-        </p:nvSpPr>
-        <p:spPr/>
-        <p:txBody>
-          <a:bodyPr>
-            <a:normAutofit lnSpcReduction="10000"/>
-          </a:bodyPr>
-          <a:lstStyle/>
-          <a:p>
-            <a:r>
-              <a:rPr lang="hu-HU" dirty="0"/>
-              <a:t>minimum kiválasztás</a:t>
-            </a:r>
-          </a:p>
-          <a:p>
-            <a:r>
-              <a:rPr lang="hu-HU" dirty="0"/>
-              <a:t>maximum kiválasztás</a:t>
-            </a:r>
-          </a:p>
-          <a:p>
-            <a:r>
-              <a:rPr lang="hu-HU" dirty="0"/>
-              <a:t>összegzés</a:t>
-            </a:r>
-          </a:p>
-          <a:p>
-            <a:r>
-              <a:rPr lang="hu-HU" dirty="0"/>
-              <a:t>átlag</a:t>
-            </a:r>
-          </a:p>
-          <a:p>
-            <a:r>
-              <a:rPr lang="hu-HU" dirty="0"/>
-              <a:t>számlálás</a:t>
-            </a:r>
-          </a:p>
-          <a:p>
-            <a:r>
-              <a:rPr lang="hu-HU" dirty="0"/>
-              <a:t>kiválasztás</a:t>
-            </a:r>
-          </a:p>
-          <a:p>
-            <a:r>
-              <a:rPr lang="hu-HU" dirty="0"/>
-              <a:t>eldöntés</a:t>
-            </a:r>
-          </a:p>
-          <a:p>
-            <a:r>
-              <a:rPr lang="hu-HU" dirty="0"/>
-              <a:t>lineáris keresés</a:t>
-            </a:r>
-          </a:p>
-          <a:p>
-            <a:r>
-              <a:rPr lang="hu-HU" dirty="0"/>
-              <a:t>buborékos rendezés</a:t>
-            </a:r>
+            <a:endParaRPr lang="hu-HU" dirty="0"/>
           </a:p>
         </p:txBody>
       </p:sp>
     </p:spTree>
     <p:extLst>
       <p:ext uri="{BB962C8B-B14F-4D97-AF65-F5344CB8AC3E}">
-        <p14:creationId xmlns:p14="http://schemas.microsoft.com/office/powerpoint/2010/main" val="1829991547"/>
+        <p14:creationId xmlns:p14="http://schemas.microsoft.com/office/powerpoint/2010/main" val="2902561149"/>
       </p:ext>
     </p:extLst>
   </p:cSld>
@@ -4527,10 +4608,10 @@
       </p:grpSpPr>
       <p:sp>
         <p:nvSpPr>
-          <p:cNvPr id="2" name="Cím 1">
-            <a:extLst>
-              <a:ext uri="{FF2B5EF4-FFF2-40B4-BE49-F238E27FC236}">
-                <a16:creationId xmlns:a16="http://schemas.microsoft.com/office/drawing/2014/main" id="{67E45071-3E91-3975-958C-43782E39B6B9}"/>
+          <p:cNvPr id="10" name="Cím 9">
+            <a:extLst>
+              <a:ext uri="{FF2B5EF4-FFF2-40B4-BE49-F238E27FC236}">
+                <a16:creationId xmlns:a16="http://schemas.microsoft.com/office/drawing/2014/main" id="{026B303C-F00B-C202-DACD-409846B572C8}"/>
               </a:ext>
             </a:extLst>
           </p:cNvPr>
@@ -4539,50 +4620,6 @@
           </p:cNvSpPr>
           <p:nvPr>
             <p:ph type="title"/>
-          </p:nvPr>
-        </p:nvSpPr>
-        <p:spPr/>
-        <p:txBody>
-          <a:bodyPr/>
-          <a:lstStyle/>
-          <a:p>
-            <a:r>
-              <a:rPr lang="hu-HU" dirty="0"/>
-              <a:t>A </a:t>
-            </a:r>
-            <a:r>
-              <a:rPr lang="hu-HU" dirty="0" err="1"/>
-              <a:t>tuple</a:t>
-            </a:r>
-            <a:r>
-              <a:rPr lang="hu-HU" dirty="0"/>
-              <a:t> és a </a:t>
-            </a:r>
-            <a:r>
-              <a:rPr lang="hu-HU" dirty="0" err="1"/>
-              <a:t>set</a:t>
-            </a:r>
-            <a:r>
-              <a:rPr lang="hu-HU" dirty="0"/>
-              <a:t> konténer típusok</a:t>
-            </a:r>
-          </a:p>
-        </p:txBody>
-      </p:sp>
-      <p:sp>
-        <p:nvSpPr>
-          <p:cNvPr id="3" name="Tartalom helye 2">
-            <a:extLst>
-              <a:ext uri="{FF2B5EF4-FFF2-40B4-BE49-F238E27FC236}">
-                <a16:creationId xmlns:a16="http://schemas.microsoft.com/office/drawing/2014/main" id="{0F52A367-7627-7B81-0E00-66AB83DC996D}"/>
-              </a:ext>
-            </a:extLst>
-          </p:cNvPr>
-          <p:cNvSpPr>
-            <a:spLocks noGrp="1"/>
-          </p:cNvSpPr>
-          <p:nvPr>
-            <p:ph type="body" idx="1"/>
           </p:nvPr>
         </p:nvSpPr>
         <p:spPr/>
@@ -4592,14 +4629,95 @@
           </a:bodyPr>
           <a:lstStyle/>
           <a:p>
-            <a:endParaRPr lang="hu-HU" dirty="0"/>
+            <a:r>
+              <a:rPr lang="hu-HU" dirty="0"/>
+              <a:t>Nevezetes algoritmusok</a:t>
+            </a:r>
+          </a:p>
+        </p:txBody>
+      </p:sp>
+      <p:sp>
+        <p:nvSpPr>
+          <p:cNvPr id="11" name="Tartalom helye 10">
+            <a:extLst>
+              <a:ext uri="{FF2B5EF4-FFF2-40B4-BE49-F238E27FC236}">
+                <a16:creationId xmlns:a16="http://schemas.microsoft.com/office/drawing/2014/main" id="{1304DAAD-A571-195A-29C9-8BA795B1C660}"/>
+              </a:ext>
+            </a:extLst>
+          </p:cNvPr>
+          <p:cNvSpPr>
+            <a:spLocks noGrp="1"/>
+          </p:cNvSpPr>
+          <p:nvPr>
+            <p:ph idx="1"/>
+          </p:nvPr>
+        </p:nvSpPr>
+        <p:spPr/>
+        <p:txBody>
+          <a:bodyPr>
+            <a:normAutofit lnSpcReduction="10000"/>
+          </a:bodyPr>
+          <a:lstStyle/>
+          <a:p>
+            <a:r>
+              <a:rPr lang="hu-HU" dirty="0"/>
+              <a:t>minimum kiválasztás</a:t>
+            </a:r>
+          </a:p>
+          <a:p>
+            <a:r>
+              <a:rPr lang="hu-HU" dirty="0"/>
+              <a:t>maximum kiválasztás</a:t>
+            </a:r>
+          </a:p>
+          <a:p>
+            <a:r>
+              <a:rPr lang="hu-HU" dirty="0"/>
+              <a:t>összegzés</a:t>
+            </a:r>
+          </a:p>
+          <a:p>
+            <a:r>
+              <a:rPr lang="hu-HU" dirty="0"/>
+              <a:t>átlag</a:t>
+            </a:r>
+          </a:p>
+          <a:p>
+            <a:r>
+              <a:rPr lang="hu-HU" dirty="0"/>
+              <a:t>számlálás</a:t>
+            </a:r>
+          </a:p>
+          <a:p>
+            <a:r>
+              <a:rPr lang="hu-HU" dirty="0"/>
+              <a:t>kiválasztás</a:t>
+            </a:r>
+          </a:p>
+          <a:p>
+            <a:r>
+              <a:rPr lang="hu-HU" dirty="0"/>
+              <a:t>eldöntés</a:t>
+            </a:r>
+          </a:p>
+          <a:p>
+            <a:r>
+              <a:rPr lang="hu-HU" dirty="0"/>
+              <a:t>lineáris keresés</a:t>
+            </a:r>
+          </a:p>
+          <a:p>
+            <a:r>
+              <a:rPr lang="hu-HU" dirty="0"/>
+              <a:t>buborékos rendezés</a:t>
+            </a:r>
           </a:p>
         </p:txBody>
       </p:sp>
     </p:spTree>
     <p:extLst>
       <p:ext uri="{BB962C8B-B14F-4D97-AF65-F5344CB8AC3E}">
-        <p14:creationId xmlns:p14="http://schemas.microsoft.com/office/powerpoint/2010/main" val="737708845"/>
+        <p14:creationId xmlns:p14="http://schemas.microsoft.com/office/powerpoint/2010/main" val="1829991547"/>
       </p:ext>
     </p:extLst>
   </p:cSld>
@@ -4628,10 +4746,10 @@
       </p:grpSpPr>
       <p:sp>
         <p:nvSpPr>
-          <p:cNvPr id="10" name="Cím 9">
-            <a:extLst>
-              <a:ext uri="{FF2B5EF4-FFF2-40B4-BE49-F238E27FC236}">
-                <a16:creationId xmlns:a16="http://schemas.microsoft.com/office/drawing/2014/main" id="{026B303C-F00B-C202-DACD-409846B572C8}"/>
+          <p:cNvPr id="2" name="Cím 1">
+            <a:extLst>
+              <a:ext uri="{FF2B5EF4-FFF2-40B4-BE49-F238E27FC236}">
+                <a16:creationId xmlns:a16="http://schemas.microsoft.com/office/drawing/2014/main" id="{67E45071-3E91-3975-958C-43782E39B6B9}"/>
               </a:ext>
             </a:extLst>
           </p:cNvPr>
@@ -4640,6 +4758,50 @@
           </p:cNvSpPr>
           <p:nvPr>
             <p:ph type="title"/>
+          </p:nvPr>
+        </p:nvSpPr>
+        <p:spPr/>
+        <p:txBody>
+          <a:bodyPr/>
+          <a:lstStyle/>
+          <a:p>
+            <a:r>
+              <a:rPr lang="hu-HU" dirty="0"/>
+              <a:t>A </a:t>
+            </a:r>
+            <a:r>
+              <a:rPr lang="hu-HU" dirty="0" err="1"/>
+              <a:t>tuple</a:t>
+            </a:r>
+            <a:r>
+              <a:rPr lang="hu-HU" dirty="0"/>
+              <a:t> és a </a:t>
+            </a:r>
+            <a:r>
+              <a:rPr lang="hu-HU" dirty="0" err="1"/>
+              <a:t>set</a:t>
+            </a:r>
+            <a:r>
+              <a:rPr lang="hu-HU" dirty="0"/>
+              <a:t> konténer típusok</a:t>
+            </a:r>
+          </a:p>
+        </p:txBody>
+      </p:sp>
+      <p:sp>
+        <p:nvSpPr>
+          <p:cNvPr id="3" name="Tartalom helye 2">
+            <a:extLst>
+              <a:ext uri="{FF2B5EF4-FFF2-40B4-BE49-F238E27FC236}">
+                <a16:creationId xmlns:a16="http://schemas.microsoft.com/office/drawing/2014/main" id="{0F52A367-7627-7B81-0E00-66AB83DC996D}"/>
+              </a:ext>
+            </a:extLst>
+          </p:cNvPr>
+          <p:cNvSpPr>
+            <a:spLocks noGrp="1"/>
+          </p:cNvSpPr>
+          <p:nvPr>
+            <p:ph type="body" idx="1"/>
           </p:nvPr>
         </p:nvSpPr>
         <p:spPr/>
@@ -4649,204 +4811,6 @@
           </a:bodyPr>
           <a:lstStyle/>
           <a:p>
-            <a:r>
-              <a:rPr lang="hu-HU" dirty="0"/>
-              <a:t>A </a:t>
-            </a:r>
-            <a:r>
-              <a:rPr lang="hu-HU" dirty="0" err="1"/>
-              <a:t>tuple</a:t>
-            </a:r>
-            <a:r>
-              <a:rPr lang="hu-HU" dirty="0"/>
-              <a:t> és a </a:t>
-            </a:r>
-            <a:r>
-              <a:rPr lang="hu-HU" dirty="0" err="1"/>
-              <a:t>set</a:t>
-            </a:r>
-            <a:r>
-              <a:rPr lang="hu-HU" dirty="0"/>
-              <a:t> konténer típusok</a:t>
-            </a:r>
-          </a:p>
-        </p:txBody>
-      </p:sp>
-      <p:sp>
-        <p:nvSpPr>
-          <p:cNvPr id="11" name="Tartalom helye 10">
-            <a:extLst>
-              <a:ext uri="{FF2B5EF4-FFF2-40B4-BE49-F238E27FC236}">
-                <a16:creationId xmlns:a16="http://schemas.microsoft.com/office/drawing/2014/main" id="{1304DAAD-A571-195A-29C9-8BA795B1C660}"/>
-              </a:ext>
-            </a:extLst>
-          </p:cNvPr>
-          <p:cNvSpPr>
-            <a:spLocks noGrp="1"/>
-          </p:cNvSpPr>
-          <p:nvPr>
-            <p:ph idx="1"/>
-          </p:nvPr>
-        </p:nvSpPr>
-        <p:spPr/>
-        <p:txBody>
-          <a:bodyPr>
-            <a:normAutofit fontScale="92500" lnSpcReduction="10000"/>
-          </a:bodyPr>
-          <a:lstStyle/>
-          <a:p>
-            <a:r>
-              <a:rPr lang="hu-HU" dirty="0"/>
-              <a:t>A </a:t>
-            </a:r>
-            <a:r>
-              <a:rPr lang="hu-HU" dirty="0" err="1"/>
-              <a:t>dict</a:t>
-            </a:r>
-            <a:r>
-              <a:rPr lang="hu-HU" dirty="0"/>
-              <a:t> típus, Műveletek </a:t>
-            </a:r>
-            <a:r>
-              <a:rPr lang="hu-HU" dirty="0" err="1"/>
-              <a:t>dict</a:t>
-            </a:r>
-            <a:r>
-              <a:rPr lang="hu-HU" dirty="0"/>
-              <a:t>-tel: módosítás index alapján, pop(), update(), </a:t>
-            </a:r>
-            <a:r>
-              <a:rPr lang="hu-HU" dirty="0" err="1"/>
-              <a:t>copy</a:t>
-            </a:r>
-            <a:r>
-              <a:rPr lang="hu-HU" dirty="0"/>
-              <a:t>(), </a:t>
-            </a:r>
-            <a:r>
-              <a:rPr lang="hu-HU" dirty="0" err="1"/>
-              <a:t>dict</a:t>
-            </a:r>
-            <a:r>
-              <a:rPr lang="hu-HU" dirty="0"/>
-              <a:t>()</a:t>
-            </a:r>
-          </a:p>
-          <a:p>
-            <a:r>
-              <a:rPr lang="hu-HU" dirty="0"/>
-              <a:t>A </a:t>
-            </a:r>
-            <a:r>
-              <a:rPr lang="hu-HU" dirty="0" err="1"/>
-              <a:t>keys</a:t>
-            </a:r>
-            <a:r>
-              <a:rPr lang="hu-HU" dirty="0"/>
-              <a:t>(), </a:t>
-            </a:r>
-            <a:r>
-              <a:rPr lang="hu-HU" dirty="0" err="1"/>
-              <a:t>values</a:t>
-            </a:r>
-            <a:r>
-              <a:rPr lang="hu-HU" dirty="0"/>
-              <a:t>(), </a:t>
-            </a:r>
-            <a:r>
-              <a:rPr lang="hu-HU" dirty="0" err="1"/>
-              <a:t>items</a:t>
-            </a:r>
-            <a:r>
-              <a:rPr lang="hu-HU" dirty="0"/>
-              <a:t>() metódusok és az </a:t>
-            </a:r>
-            <a:r>
-              <a:rPr lang="hu-HU" dirty="0" err="1"/>
-              <a:t>enumerate</a:t>
-            </a:r>
-            <a:r>
-              <a:rPr lang="hu-HU" dirty="0"/>
-              <a:t>() függvény</a:t>
-            </a:r>
-          </a:p>
-          <a:p>
-            <a:r>
-              <a:rPr lang="hu-HU" dirty="0" err="1"/>
-              <a:t>Dict</a:t>
-            </a:r>
-            <a:r>
-              <a:rPr lang="hu-HU" dirty="0"/>
-              <a:t> bejárása ciklussal</a:t>
-            </a:r>
-          </a:p>
-          <a:p>
-            <a:r>
-              <a:rPr lang="hu-HU" dirty="0" err="1"/>
-              <a:t>Dict</a:t>
-            </a:r>
-            <a:r>
-              <a:rPr lang="hu-HU" dirty="0"/>
-              <a:t> </a:t>
-            </a:r>
-            <a:r>
-              <a:rPr lang="hu-HU" dirty="0" err="1"/>
-              <a:t>unpacking</a:t>
-            </a:r>
-            <a:endParaRPr lang="hu-HU" dirty="0"/>
-          </a:p>
-          <a:p>
-            <a:r>
-              <a:rPr lang="hu-HU" dirty="0"/>
-              <a:t>CRUD műveletek: </a:t>
-            </a:r>
-            <a:r>
-              <a:rPr lang="hu-HU" dirty="0" err="1"/>
-              <a:t>read</a:t>
-            </a:r>
-            <a:endParaRPr lang="hu-HU" dirty="0"/>
-          </a:p>
-          <a:p>
-            <a:r>
-              <a:rPr lang="hu-HU" dirty="0"/>
-              <a:t>CRUD műveletek: update</a:t>
-            </a:r>
-          </a:p>
-          <a:p>
-            <a:r>
-              <a:rPr lang="hu-HU" dirty="0"/>
-              <a:t>CRUD műveletek: </a:t>
-            </a:r>
-            <a:r>
-              <a:rPr lang="hu-HU" dirty="0" err="1"/>
-              <a:t>create</a:t>
-            </a:r>
-            <a:endParaRPr lang="hu-HU" dirty="0"/>
-          </a:p>
-          <a:p>
-            <a:r>
-              <a:rPr lang="hu-HU" dirty="0"/>
-              <a:t>CRUD műveletek: </a:t>
-            </a:r>
-            <a:r>
-              <a:rPr lang="hu-HU" dirty="0" err="1"/>
-              <a:t>delete</a:t>
-            </a:r>
-            <a:endParaRPr lang="hu-HU" dirty="0"/>
-          </a:p>
-          <a:p>
-            <a:r>
-              <a:rPr lang="hu-HU" dirty="0"/>
-              <a:t>CRUD: </a:t>
-            </a:r>
-            <a:r>
-              <a:rPr lang="hu-HU" dirty="0" err="1"/>
-              <a:t>újrafelhasználhatóvá</a:t>
-            </a:r>
-            <a:r>
-              <a:rPr lang="hu-HU"/>
-              <a:t> tétel</a:t>
-            </a:r>
             <a:endParaRPr lang="hu-HU" dirty="0"/>
           </a:p>
         </p:txBody>
@@ -4854,7 +4818,7 @@
     </p:spTree>
     <p:extLst>
       <p:ext uri="{BB962C8B-B14F-4D97-AF65-F5344CB8AC3E}">
-        <p14:creationId xmlns:p14="http://schemas.microsoft.com/office/powerpoint/2010/main" val="3829063260"/>
+        <p14:creationId xmlns:p14="http://schemas.microsoft.com/office/powerpoint/2010/main" val="737708845"/>
       </p:ext>
     </p:extLst>
   </p:cSld>
@@ -4883,10 +4847,10 @@
       </p:grpSpPr>
       <p:sp>
         <p:nvSpPr>
-          <p:cNvPr id="2" name="Cím 1">
-            <a:extLst>
-              <a:ext uri="{FF2B5EF4-FFF2-40B4-BE49-F238E27FC236}">
-                <a16:creationId xmlns:a16="http://schemas.microsoft.com/office/drawing/2014/main" id="{67E45071-3E91-3975-958C-43782E39B6B9}"/>
+          <p:cNvPr id="10" name="Cím 9">
+            <a:extLst>
+              <a:ext uri="{FF2B5EF4-FFF2-40B4-BE49-F238E27FC236}">
+                <a16:creationId xmlns:a16="http://schemas.microsoft.com/office/drawing/2014/main" id="{026B303C-F00B-C202-DACD-409846B572C8}"/>
               </a:ext>
             </a:extLst>
           </p:cNvPr>
@@ -4895,42 +4859,6 @@
           </p:cNvSpPr>
           <p:nvPr>
             <p:ph type="title"/>
-          </p:nvPr>
-        </p:nvSpPr>
-        <p:spPr/>
-        <p:txBody>
-          <a:bodyPr/>
-          <a:lstStyle/>
-          <a:p>
-            <a:r>
-              <a:rPr lang="hu-HU" dirty="0"/>
-              <a:t>A </a:t>
-            </a:r>
-            <a:r>
-              <a:rPr lang="hu-HU" dirty="0" err="1"/>
-              <a:t>dict</a:t>
-            </a:r>
-            <a:r>
-              <a:rPr lang="hu-HU" dirty="0"/>
-              <a:t> konténer típus, CRUD műveletek</a:t>
-            </a:r>
-          </a:p>
-        </p:txBody>
-      </p:sp>
-      <p:sp>
-        <p:nvSpPr>
-          <p:cNvPr id="3" name="Tartalom helye 2">
-            <a:extLst>
-              <a:ext uri="{FF2B5EF4-FFF2-40B4-BE49-F238E27FC236}">
-                <a16:creationId xmlns:a16="http://schemas.microsoft.com/office/drawing/2014/main" id="{0F52A367-7627-7B81-0E00-66AB83DC996D}"/>
-              </a:ext>
-            </a:extLst>
-          </p:cNvPr>
-          <p:cNvSpPr>
-            <a:spLocks noGrp="1"/>
-          </p:cNvSpPr>
-          <p:nvPr>
-            <p:ph type="body" idx="1"/>
           </p:nvPr>
         </p:nvSpPr>
         <p:spPr/>
@@ -4940,6 +4868,204 @@
           </a:bodyPr>
           <a:lstStyle/>
           <a:p>
+            <a:r>
+              <a:rPr lang="hu-HU" dirty="0"/>
+              <a:t>A </a:t>
+            </a:r>
+            <a:r>
+              <a:rPr lang="hu-HU" dirty="0" err="1"/>
+              <a:t>tuple</a:t>
+            </a:r>
+            <a:r>
+              <a:rPr lang="hu-HU" dirty="0"/>
+              <a:t> és a </a:t>
+            </a:r>
+            <a:r>
+              <a:rPr lang="hu-HU" dirty="0" err="1"/>
+              <a:t>set</a:t>
+            </a:r>
+            <a:r>
+              <a:rPr lang="hu-HU" dirty="0"/>
+              <a:t> konténer típusok</a:t>
+            </a:r>
+          </a:p>
+        </p:txBody>
+      </p:sp>
+      <p:sp>
+        <p:nvSpPr>
+          <p:cNvPr id="11" name="Tartalom helye 10">
+            <a:extLst>
+              <a:ext uri="{FF2B5EF4-FFF2-40B4-BE49-F238E27FC236}">
+                <a16:creationId xmlns:a16="http://schemas.microsoft.com/office/drawing/2014/main" id="{1304DAAD-A571-195A-29C9-8BA795B1C660}"/>
+              </a:ext>
+            </a:extLst>
+          </p:cNvPr>
+          <p:cNvSpPr>
+            <a:spLocks noGrp="1"/>
+          </p:cNvSpPr>
+          <p:nvPr>
+            <p:ph idx="1"/>
+          </p:nvPr>
+        </p:nvSpPr>
+        <p:spPr/>
+        <p:txBody>
+          <a:bodyPr>
+            <a:normAutofit fontScale="92500" lnSpcReduction="10000"/>
+          </a:bodyPr>
+          <a:lstStyle/>
+          <a:p>
+            <a:r>
+              <a:rPr lang="hu-HU" dirty="0"/>
+              <a:t>A </a:t>
+            </a:r>
+            <a:r>
+              <a:rPr lang="hu-HU" dirty="0" err="1"/>
+              <a:t>dict</a:t>
+            </a:r>
+            <a:r>
+              <a:rPr lang="hu-HU" dirty="0"/>
+              <a:t> típus, Műveletek </a:t>
+            </a:r>
+            <a:r>
+              <a:rPr lang="hu-HU" dirty="0" err="1"/>
+              <a:t>dict</a:t>
+            </a:r>
+            <a:r>
+              <a:rPr lang="hu-HU" dirty="0"/>
+              <a:t>-tel: módosítás index alapján, pop(), update(), </a:t>
+            </a:r>
+            <a:r>
+              <a:rPr lang="hu-HU" dirty="0" err="1"/>
+              <a:t>copy</a:t>
+            </a:r>
+            <a:r>
+              <a:rPr lang="hu-HU" dirty="0"/>
+              <a:t>(), </a:t>
+            </a:r>
+            <a:r>
+              <a:rPr lang="hu-HU" dirty="0" err="1"/>
+              <a:t>dict</a:t>
+            </a:r>
+            <a:r>
+              <a:rPr lang="hu-HU" dirty="0"/>
+              <a:t>()</a:t>
+            </a:r>
+          </a:p>
+          <a:p>
+            <a:r>
+              <a:rPr lang="hu-HU" dirty="0"/>
+              <a:t>A </a:t>
+            </a:r>
+            <a:r>
+              <a:rPr lang="hu-HU" dirty="0" err="1"/>
+              <a:t>keys</a:t>
+            </a:r>
+            <a:r>
+              <a:rPr lang="hu-HU" dirty="0"/>
+              <a:t>(), </a:t>
+            </a:r>
+            <a:r>
+              <a:rPr lang="hu-HU" dirty="0" err="1"/>
+              <a:t>values</a:t>
+            </a:r>
+            <a:r>
+              <a:rPr lang="hu-HU" dirty="0"/>
+              <a:t>(), </a:t>
+            </a:r>
+            <a:r>
+              <a:rPr lang="hu-HU" dirty="0" err="1"/>
+              <a:t>items</a:t>
+            </a:r>
+            <a:r>
+              <a:rPr lang="hu-HU" dirty="0"/>
+              <a:t>() metódusok és az </a:t>
+            </a:r>
+            <a:r>
+              <a:rPr lang="hu-HU" dirty="0" err="1"/>
+              <a:t>enumerate</a:t>
+            </a:r>
+            <a:r>
+              <a:rPr lang="hu-HU" dirty="0"/>
+              <a:t>() függvény</a:t>
+            </a:r>
+          </a:p>
+          <a:p>
+            <a:r>
+              <a:rPr lang="hu-HU" dirty="0" err="1"/>
+              <a:t>Dict</a:t>
+            </a:r>
+            <a:r>
+              <a:rPr lang="hu-HU" dirty="0"/>
+              <a:t> bejárása ciklussal</a:t>
+            </a:r>
+          </a:p>
+          <a:p>
+            <a:r>
+              <a:rPr lang="hu-HU" dirty="0" err="1"/>
+              <a:t>Dict</a:t>
+            </a:r>
+            <a:r>
+              <a:rPr lang="hu-HU" dirty="0"/>
+              <a:t> </a:t>
+            </a:r>
+            <a:r>
+              <a:rPr lang="hu-HU" dirty="0" err="1"/>
+              <a:t>unpacking</a:t>
+            </a:r>
+            <a:endParaRPr lang="hu-HU" dirty="0"/>
+          </a:p>
+          <a:p>
+            <a:r>
+              <a:rPr lang="hu-HU" dirty="0"/>
+              <a:t>CRUD műveletek: </a:t>
+            </a:r>
+            <a:r>
+              <a:rPr lang="hu-HU" dirty="0" err="1"/>
+              <a:t>read</a:t>
+            </a:r>
+            <a:endParaRPr lang="hu-HU" dirty="0"/>
+          </a:p>
+          <a:p>
+            <a:r>
+              <a:rPr lang="hu-HU" dirty="0"/>
+              <a:t>CRUD műveletek: update</a:t>
+            </a:r>
+          </a:p>
+          <a:p>
+            <a:r>
+              <a:rPr lang="hu-HU" dirty="0"/>
+              <a:t>CRUD műveletek: </a:t>
+            </a:r>
+            <a:r>
+              <a:rPr lang="hu-HU" dirty="0" err="1"/>
+              <a:t>create</a:t>
+            </a:r>
+            <a:endParaRPr lang="hu-HU" dirty="0"/>
+          </a:p>
+          <a:p>
+            <a:r>
+              <a:rPr lang="hu-HU" dirty="0"/>
+              <a:t>CRUD műveletek: </a:t>
+            </a:r>
+            <a:r>
+              <a:rPr lang="hu-HU" dirty="0" err="1"/>
+              <a:t>delete</a:t>
+            </a:r>
+            <a:endParaRPr lang="hu-HU" dirty="0"/>
+          </a:p>
+          <a:p>
+            <a:r>
+              <a:rPr lang="hu-HU" dirty="0"/>
+              <a:t>CRUD: </a:t>
+            </a:r>
+            <a:r>
+              <a:rPr lang="hu-HU" dirty="0" err="1"/>
+              <a:t>újrafelhasználhatóvá</a:t>
+            </a:r>
+            <a:r>
+              <a:rPr lang="hu-HU"/>
+              <a:t> tétel</a:t>
+            </a:r>
             <a:endParaRPr lang="hu-HU" dirty="0"/>
           </a:p>
         </p:txBody>
@@ -4947,7 +5073,7 @@
     </p:spTree>
     <p:extLst>
       <p:ext uri="{BB962C8B-B14F-4D97-AF65-F5344CB8AC3E}">
-        <p14:creationId xmlns:p14="http://schemas.microsoft.com/office/powerpoint/2010/main" val="2577954397"/>
+        <p14:creationId xmlns:p14="http://schemas.microsoft.com/office/powerpoint/2010/main" val="3829063260"/>
       </p:ext>
     </p:extLst>
   </p:cSld>
@@ -4997,7 +5123,7 @@
           <a:p>
             <a:r>
               <a:rPr lang="hu-HU" dirty="0"/>
-              <a:t>Miről lesz szó?</a:t>
+              <a:t>Miről lesz szó? </a:t>
             </a:r>
           </a:p>
         </p:txBody>
@@ -5160,6 +5286,11 @@
   <p:clrMapOvr>
     <a:masterClrMapping/>
   </p:clrMapOvr>
+  <p:extLst>
+    <p:ext uri="{6950BFC3-D8DA-4A85-94F7-54DA5524770B}">
+      <p188:commentRel xmlns:p188="http://schemas.microsoft.com/office/powerpoint/2018/8/main" r:id="rId2"/>
+    </p:ext>
+  </p:extLst>
 </p:sld>
 </file>
 
@@ -5182,10 +5313,10 @@
       </p:grpSpPr>
       <p:sp>
         <p:nvSpPr>
-          <p:cNvPr id="10" name="Cím 9">
-            <a:extLst>
-              <a:ext uri="{FF2B5EF4-FFF2-40B4-BE49-F238E27FC236}">
-                <a16:creationId xmlns:a16="http://schemas.microsoft.com/office/drawing/2014/main" id="{026B303C-F00B-C202-DACD-409846B572C8}"/>
+          <p:cNvPr id="2" name="Cím 1">
+            <a:extLst>
+              <a:ext uri="{FF2B5EF4-FFF2-40B4-BE49-F238E27FC236}">
+                <a16:creationId xmlns:a16="http://schemas.microsoft.com/office/drawing/2014/main" id="{67E45071-3E91-3975-958C-43782E39B6B9}"/>
               </a:ext>
             </a:extLst>
           </p:cNvPr>
@@ -5194,6 +5325,42 @@
           </p:cNvSpPr>
           <p:nvPr>
             <p:ph type="title"/>
+          </p:nvPr>
+        </p:nvSpPr>
+        <p:spPr/>
+        <p:txBody>
+          <a:bodyPr/>
+          <a:lstStyle/>
+          <a:p>
+            <a:r>
+              <a:rPr lang="hu-HU" dirty="0"/>
+              <a:t>A </a:t>
+            </a:r>
+            <a:r>
+              <a:rPr lang="hu-HU" dirty="0" err="1"/>
+              <a:t>dict</a:t>
+            </a:r>
+            <a:r>
+              <a:rPr lang="hu-HU" dirty="0"/>
+              <a:t> konténer típus, CRUD műveletek</a:t>
+            </a:r>
+          </a:p>
+        </p:txBody>
+      </p:sp>
+      <p:sp>
+        <p:nvSpPr>
+          <p:cNvPr id="3" name="Tartalom helye 2">
+            <a:extLst>
+              <a:ext uri="{FF2B5EF4-FFF2-40B4-BE49-F238E27FC236}">
+                <a16:creationId xmlns:a16="http://schemas.microsoft.com/office/drawing/2014/main" id="{0F52A367-7627-7B81-0E00-66AB83DC996D}"/>
+              </a:ext>
+            </a:extLst>
+          </p:cNvPr>
+          <p:cNvSpPr>
+            <a:spLocks noGrp="1"/>
+          </p:cNvSpPr>
+          <p:nvPr>
+            <p:ph type="body" idx="1"/>
           </p:nvPr>
         </p:nvSpPr>
         <p:spPr/>
@@ -5203,236 +5370,14 @@
           </a:bodyPr>
           <a:lstStyle/>
           <a:p>
-            <a:r>
-              <a:rPr lang="hu-HU" dirty="0"/>
-              <a:t>A </a:t>
-            </a:r>
-            <a:r>
-              <a:rPr lang="hu-HU" dirty="0" err="1"/>
-              <a:t>dict</a:t>
-            </a:r>
-            <a:r>
-              <a:rPr lang="hu-HU" dirty="0"/>
-              <a:t> konténer típus, CRUD műveletek</a:t>
-            </a:r>
-          </a:p>
-        </p:txBody>
-      </p:sp>
-      <p:sp>
-        <p:nvSpPr>
-          <p:cNvPr id="11" name="Tartalom helye 10">
-            <a:extLst>
-              <a:ext uri="{FF2B5EF4-FFF2-40B4-BE49-F238E27FC236}">
-                <a16:creationId xmlns:a16="http://schemas.microsoft.com/office/drawing/2014/main" id="{1304DAAD-A571-195A-29C9-8BA795B1C660}"/>
-              </a:ext>
-            </a:extLst>
-          </p:cNvPr>
-          <p:cNvSpPr>
-            <a:spLocks noGrp="1"/>
-          </p:cNvSpPr>
-          <p:nvPr>
-            <p:ph idx="1"/>
-          </p:nvPr>
-        </p:nvSpPr>
-        <p:spPr/>
-        <p:txBody>
-          <a:bodyPr>
-            <a:normAutofit fontScale="85000" lnSpcReduction="20000"/>
-          </a:bodyPr>
-          <a:lstStyle/>
-          <a:p>
-            <a:r>
-              <a:rPr lang="hu-HU" dirty="0"/>
-              <a:t>A </a:t>
-            </a:r>
-            <a:r>
-              <a:rPr lang="hu-HU" dirty="0" err="1"/>
-              <a:t>tuple</a:t>
-            </a:r>
-            <a:r>
-              <a:rPr lang="hu-HU" dirty="0"/>
-              <a:t> típus</a:t>
-            </a:r>
-          </a:p>
-          <a:p>
-            <a:r>
-              <a:rPr lang="hu-HU" dirty="0"/>
-              <a:t>A + operátor használata</a:t>
-            </a:r>
-          </a:p>
-          <a:p>
-            <a:r>
-              <a:rPr lang="hu-HU" dirty="0"/>
-              <a:t>Elem beszúrása </a:t>
-            </a:r>
-            <a:r>
-              <a:rPr lang="hu-HU" dirty="0" err="1"/>
-              <a:t>tuple</a:t>
-            </a:r>
-            <a:r>
-              <a:rPr lang="hu-HU" dirty="0"/>
-              <a:t>-be</a:t>
-            </a:r>
-          </a:p>
-          <a:p>
-            <a:r>
-              <a:rPr lang="hu-HU" dirty="0" err="1"/>
-              <a:t>Tuple</a:t>
-            </a:r>
-            <a:r>
-              <a:rPr lang="hu-HU" dirty="0"/>
-              <a:t> módosítása</a:t>
-            </a:r>
-          </a:p>
-          <a:p>
-            <a:r>
-              <a:rPr lang="hu-HU" dirty="0" err="1"/>
-              <a:t>Tuple</a:t>
-            </a:r>
-            <a:r>
-              <a:rPr lang="hu-HU" dirty="0"/>
-              <a:t> bejárása ciklussal</a:t>
-            </a:r>
-          </a:p>
-          <a:p>
-            <a:r>
-              <a:rPr lang="hu-HU" dirty="0"/>
-              <a:t>A </a:t>
-            </a:r>
-            <a:r>
-              <a:rPr lang="hu-HU" dirty="0" err="1"/>
-              <a:t>tuple</a:t>
-            </a:r>
-            <a:r>
-              <a:rPr lang="hu-HU" dirty="0"/>
-              <a:t> felhasználása valós életben</a:t>
-            </a:r>
-          </a:p>
-          <a:p>
-            <a:r>
-              <a:rPr lang="hu-HU" dirty="0" err="1"/>
-              <a:t>Tuple</a:t>
-            </a:r>
-            <a:r>
-              <a:rPr lang="hu-HU" dirty="0"/>
-              <a:t> </a:t>
-            </a:r>
-            <a:r>
-              <a:rPr lang="hu-HU" dirty="0" err="1"/>
-              <a:t>unpacking</a:t>
-            </a:r>
             <a:endParaRPr lang="hu-HU" dirty="0"/>
-          </a:p>
-          <a:p>
-            <a:r>
-              <a:rPr lang="hu-HU" dirty="0"/>
-              <a:t>A </a:t>
-            </a:r>
-            <a:r>
-              <a:rPr lang="hu-HU" dirty="0" err="1"/>
-              <a:t>set</a:t>
-            </a:r>
-            <a:r>
-              <a:rPr lang="hu-HU" dirty="0"/>
-              <a:t> típus</a:t>
-            </a:r>
-          </a:p>
-          <a:p>
-            <a:r>
-              <a:rPr lang="hu-HU" dirty="0" err="1"/>
-              <a:t>Set</a:t>
-            </a:r>
-            <a:r>
-              <a:rPr lang="hu-HU" dirty="0"/>
-              <a:t> metódusok: add(), update(), </a:t>
-            </a:r>
-            <a:r>
-              <a:rPr lang="hu-HU" dirty="0" err="1"/>
-              <a:t>remove</a:t>
-            </a:r>
-            <a:r>
-              <a:rPr lang="hu-HU" dirty="0"/>
-              <a:t>(), </a:t>
-            </a:r>
-            <a:r>
-              <a:rPr lang="hu-HU" dirty="0" err="1"/>
-              <a:t>discard</a:t>
-            </a:r>
-            <a:r>
-              <a:rPr lang="hu-HU" dirty="0"/>
-              <a:t>()</a:t>
-            </a:r>
-          </a:p>
-          <a:p>
-            <a:r>
-              <a:rPr lang="hu-HU" dirty="0"/>
-              <a:t>Halmazműveletek: </a:t>
-            </a:r>
-            <a:r>
-              <a:rPr lang="hu-HU" dirty="0" err="1"/>
-              <a:t>union</a:t>
-            </a:r>
-            <a:r>
-              <a:rPr lang="hu-HU" dirty="0"/>
-              <a:t>(), </a:t>
-            </a:r>
-            <a:r>
-              <a:rPr lang="hu-HU" dirty="0" err="1"/>
-              <a:t>intersection</a:t>
-            </a:r>
-            <a:r>
-              <a:rPr lang="hu-HU" dirty="0"/>
-              <a:t>(), </a:t>
-            </a:r>
-            <a:r>
-              <a:rPr lang="hu-HU" dirty="0" err="1"/>
-              <a:t>difference</a:t>
-            </a:r>
-            <a:r>
-              <a:rPr lang="hu-HU" dirty="0"/>
-              <a:t>(), </a:t>
-            </a:r>
-            <a:r>
-              <a:rPr lang="hu-HU" dirty="0" err="1"/>
-              <a:t>issuperset</a:t>
-            </a:r>
-            <a:r>
-              <a:rPr lang="hu-HU" dirty="0"/>
-              <a:t>(), </a:t>
-            </a:r>
-            <a:r>
-              <a:rPr lang="hu-HU" dirty="0" err="1"/>
-              <a:t>issubset</a:t>
-            </a:r>
-            <a:r>
-              <a:rPr lang="hu-HU" dirty="0"/>
-              <a:t>()</a:t>
-            </a:r>
-          </a:p>
-          <a:p>
-            <a:r>
-              <a:rPr lang="hu-HU" dirty="0" err="1"/>
-              <a:t>Set</a:t>
-            </a:r>
-            <a:r>
-              <a:rPr lang="hu-HU" dirty="0"/>
-              <a:t> bejárása </a:t>
-            </a:r>
-            <a:r>
-              <a:rPr lang="hu-HU" dirty="0" err="1"/>
-              <a:t>for</a:t>
-            </a:r>
-            <a:r>
-              <a:rPr lang="hu-HU" dirty="0"/>
-              <a:t> ciklussal</a:t>
-            </a:r>
           </a:p>
         </p:txBody>
       </p:sp>
     </p:spTree>
     <p:extLst>
       <p:ext uri="{BB962C8B-B14F-4D97-AF65-F5344CB8AC3E}">
-        <p14:creationId xmlns:p14="http://schemas.microsoft.com/office/powerpoint/2010/main" val="3762969098"/>
+        <p14:creationId xmlns:p14="http://schemas.microsoft.com/office/powerpoint/2010/main" val="2577954397"/>
       </p:ext>
     </p:extLst>
   </p:cSld>
@@ -5461,10 +5406,10 @@
       </p:grpSpPr>
       <p:sp>
         <p:nvSpPr>
-          <p:cNvPr id="2" name="Cím 1">
-            <a:extLst>
-              <a:ext uri="{FF2B5EF4-FFF2-40B4-BE49-F238E27FC236}">
-                <a16:creationId xmlns:a16="http://schemas.microsoft.com/office/drawing/2014/main" id="{67E45071-3E91-3975-958C-43782E39B6B9}"/>
+          <p:cNvPr id="10" name="Cím 9">
+            <a:extLst>
+              <a:ext uri="{FF2B5EF4-FFF2-40B4-BE49-F238E27FC236}">
+                <a16:creationId xmlns:a16="http://schemas.microsoft.com/office/drawing/2014/main" id="{026B303C-F00B-C202-DACD-409846B572C8}"/>
               </a:ext>
             </a:extLst>
           </p:cNvPr>
@@ -5473,39 +5418,6 @@
           </p:cNvSpPr>
           <p:nvPr>
             <p:ph type="title"/>
-          </p:nvPr>
-        </p:nvSpPr>
-        <p:spPr/>
-        <p:txBody>
-          <a:bodyPr/>
-          <a:lstStyle/>
-          <a:p>
-            <a:r>
-              <a:rPr lang="hu-HU" dirty="0"/>
-              <a:t>A Python modulrendszere, standard </a:t>
-            </a:r>
-            <a:r>
-              <a:rPr lang="hu-HU" dirty="0" err="1"/>
-              <a:t>library</a:t>
-            </a:r>
-            <a:endParaRPr lang="hu-HU" dirty="0"/>
-          </a:p>
-        </p:txBody>
-      </p:sp>
-      <p:sp>
-        <p:nvSpPr>
-          <p:cNvPr id="3" name="Tartalom helye 2">
-            <a:extLst>
-              <a:ext uri="{FF2B5EF4-FFF2-40B4-BE49-F238E27FC236}">
-                <a16:creationId xmlns:a16="http://schemas.microsoft.com/office/drawing/2014/main" id="{0F52A367-7627-7B81-0E00-66AB83DC996D}"/>
-              </a:ext>
-            </a:extLst>
-          </p:cNvPr>
-          <p:cNvSpPr>
-            <a:spLocks noGrp="1"/>
-          </p:cNvSpPr>
-          <p:nvPr>
-            <p:ph type="body" idx="1"/>
           </p:nvPr>
         </p:nvSpPr>
         <p:spPr/>
@@ -5515,14 +5427,236 @@
           </a:bodyPr>
           <a:lstStyle/>
           <a:p>
+            <a:r>
+              <a:rPr lang="hu-HU" dirty="0"/>
+              <a:t>A </a:t>
+            </a:r>
+            <a:r>
+              <a:rPr lang="hu-HU" dirty="0" err="1"/>
+              <a:t>dict</a:t>
+            </a:r>
+            <a:r>
+              <a:rPr lang="hu-HU" dirty="0"/>
+              <a:t> konténer típus, CRUD műveletek</a:t>
+            </a:r>
+          </a:p>
+        </p:txBody>
+      </p:sp>
+      <p:sp>
+        <p:nvSpPr>
+          <p:cNvPr id="11" name="Tartalom helye 10">
+            <a:extLst>
+              <a:ext uri="{FF2B5EF4-FFF2-40B4-BE49-F238E27FC236}">
+                <a16:creationId xmlns:a16="http://schemas.microsoft.com/office/drawing/2014/main" id="{1304DAAD-A571-195A-29C9-8BA795B1C660}"/>
+              </a:ext>
+            </a:extLst>
+          </p:cNvPr>
+          <p:cNvSpPr>
+            <a:spLocks noGrp="1"/>
+          </p:cNvSpPr>
+          <p:nvPr>
+            <p:ph idx="1"/>
+          </p:nvPr>
+        </p:nvSpPr>
+        <p:spPr/>
+        <p:txBody>
+          <a:bodyPr>
+            <a:normAutofit fontScale="85000" lnSpcReduction="20000"/>
+          </a:bodyPr>
+          <a:lstStyle/>
+          <a:p>
+            <a:r>
+              <a:rPr lang="hu-HU" dirty="0"/>
+              <a:t>A </a:t>
+            </a:r>
+            <a:r>
+              <a:rPr lang="hu-HU" dirty="0" err="1"/>
+              <a:t>tuple</a:t>
+            </a:r>
+            <a:r>
+              <a:rPr lang="hu-HU" dirty="0"/>
+              <a:t> típus</a:t>
+            </a:r>
+          </a:p>
+          <a:p>
+            <a:r>
+              <a:rPr lang="hu-HU" dirty="0"/>
+              <a:t>A + operátor használata</a:t>
+            </a:r>
+          </a:p>
+          <a:p>
+            <a:r>
+              <a:rPr lang="hu-HU" dirty="0"/>
+              <a:t>Elem beszúrása </a:t>
+            </a:r>
+            <a:r>
+              <a:rPr lang="hu-HU" dirty="0" err="1"/>
+              <a:t>tuple</a:t>
+            </a:r>
+            <a:r>
+              <a:rPr lang="hu-HU" dirty="0"/>
+              <a:t>-be</a:t>
+            </a:r>
+          </a:p>
+          <a:p>
+            <a:r>
+              <a:rPr lang="hu-HU" dirty="0" err="1"/>
+              <a:t>Tuple</a:t>
+            </a:r>
+            <a:r>
+              <a:rPr lang="hu-HU" dirty="0"/>
+              <a:t> módosítása</a:t>
+            </a:r>
+          </a:p>
+          <a:p>
+            <a:r>
+              <a:rPr lang="hu-HU" dirty="0" err="1"/>
+              <a:t>Tuple</a:t>
+            </a:r>
+            <a:r>
+              <a:rPr lang="hu-HU" dirty="0"/>
+              <a:t> bejárása ciklussal</a:t>
+            </a:r>
+          </a:p>
+          <a:p>
+            <a:r>
+              <a:rPr lang="hu-HU" dirty="0"/>
+              <a:t>A </a:t>
+            </a:r>
+            <a:r>
+              <a:rPr lang="hu-HU" dirty="0" err="1"/>
+              <a:t>tuple</a:t>
+            </a:r>
+            <a:r>
+              <a:rPr lang="hu-HU" dirty="0"/>
+              <a:t> felhasználása valós életben</a:t>
+            </a:r>
+          </a:p>
+          <a:p>
+            <a:r>
+              <a:rPr lang="hu-HU" dirty="0" err="1"/>
+              <a:t>Tuple</a:t>
+            </a:r>
+            <a:r>
+              <a:rPr lang="hu-HU" dirty="0"/>
+              <a:t> </a:t>
+            </a:r>
+            <a:r>
+              <a:rPr lang="hu-HU" dirty="0" err="1"/>
+              <a:t>unpacking</a:t>
+            </a:r>
             <a:endParaRPr lang="hu-HU" dirty="0"/>
+          </a:p>
+          <a:p>
+            <a:r>
+              <a:rPr lang="hu-HU" dirty="0"/>
+              <a:t>A </a:t>
+            </a:r>
+            <a:r>
+              <a:rPr lang="hu-HU" dirty="0" err="1"/>
+              <a:t>set</a:t>
+            </a:r>
+            <a:r>
+              <a:rPr lang="hu-HU" dirty="0"/>
+              <a:t> típus</a:t>
+            </a:r>
+          </a:p>
+          <a:p>
+            <a:r>
+              <a:rPr lang="hu-HU" dirty="0" err="1"/>
+              <a:t>Set</a:t>
+            </a:r>
+            <a:r>
+              <a:rPr lang="hu-HU" dirty="0"/>
+              <a:t> metódusok: add(), update(), </a:t>
+            </a:r>
+            <a:r>
+              <a:rPr lang="hu-HU" dirty="0" err="1"/>
+              <a:t>remove</a:t>
+            </a:r>
+            <a:r>
+              <a:rPr lang="hu-HU" dirty="0"/>
+              <a:t>(), </a:t>
+            </a:r>
+            <a:r>
+              <a:rPr lang="hu-HU" dirty="0" err="1"/>
+              <a:t>discard</a:t>
+            </a:r>
+            <a:r>
+              <a:rPr lang="hu-HU" dirty="0"/>
+              <a:t>()</a:t>
+            </a:r>
+          </a:p>
+          <a:p>
+            <a:r>
+              <a:rPr lang="hu-HU" dirty="0"/>
+              <a:t>Halmazműveletek: </a:t>
+            </a:r>
+            <a:r>
+              <a:rPr lang="hu-HU" dirty="0" err="1"/>
+              <a:t>union</a:t>
+            </a:r>
+            <a:r>
+              <a:rPr lang="hu-HU" dirty="0"/>
+              <a:t>(), </a:t>
+            </a:r>
+            <a:r>
+              <a:rPr lang="hu-HU" dirty="0" err="1"/>
+              <a:t>intersection</a:t>
+            </a:r>
+            <a:r>
+              <a:rPr lang="hu-HU" dirty="0"/>
+              <a:t>(), </a:t>
+            </a:r>
+            <a:r>
+              <a:rPr lang="hu-HU" dirty="0" err="1"/>
+              <a:t>difference</a:t>
+            </a:r>
+            <a:r>
+              <a:rPr lang="hu-HU" dirty="0"/>
+              <a:t>(), </a:t>
+            </a:r>
+            <a:r>
+              <a:rPr lang="hu-HU" dirty="0" err="1"/>
+              <a:t>issuperset</a:t>
+            </a:r>
+            <a:r>
+              <a:rPr lang="hu-HU" dirty="0"/>
+              <a:t>(), </a:t>
+            </a:r>
+            <a:r>
+              <a:rPr lang="hu-HU" dirty="0" err="1"/>
+              <a:t>issubset</a:t>
+            </a:r>
+            <a:r>
+              <a:rPr lang="hu-HU" dirty="0"/>
+              <a:t>()</a:t>
+            </a:r>
+          </a:p>
+          <a:p>
+            <a:r>
+              <a:rPr lang="hu-HU" dirty="0" err="1"/>
+              <a:t>Set</a:t>
+            </a:r>
+            <a:r>
+              <a:rPr lang="hu-HU" dirty="0"/>
+              <a:t> bejárása </a:t>
+            </a:r>
+            <a:r>
+              <a:rPr lang="hu-HU" dirty="0" err="1"/>
+              <a:t>for</a:t>
+            </a:r>
+            <a:r>
+              <a:rPr lang="hu-HU" dirty="0"/>
+              <a:t> ciklussal</a:t>
+            </a:r>
           </a:p>
         </p:txBody>
       </p:sp>
     </p:spTree>
     <p:extLst>
       <p:ext uri="{BB962C8B-B14F-4D97-AF65-F5344CB8AC3E}">
-        <p14:creationId xmlns:p14="http://schemas.microsoft.com/office/powerpoint/2010/main" val="2665335602"/>
+        <p14:creationId xmlns:p14="http://schemas.microsoft.com/office/powerpoint/2010/main" val="3762969098"/>
       </p:ext>
     </p:extLst>
   </p:cSld>
@@ -5551,10 +5685,10 @@
       </p:grpSpPr>
       <p:sp>
         <p:nvSpPr>
-          <p:cNvPr id="10" name="Cím 9">
-            <a:extLst>
-              <a:ext uri="{FF2B5EF4-FFF2-40B4-BE49-F238E27FC236}">
-                <a16:creationId xmlns:a16="http://schemas.microsoft.com/office/drawing/2014/main" id="{026B303C-F00B-C202-DACD-409846B572C8}"/>
+          <p:cNvPr id="2" name="Cím 1">
+            <a:extLst>
+              <a:ext uri="{FF2B5EF4-FFF2-40B4-BE49-F238E27FC236}">
+                <a16:creationId xmlns:a16="http://schemas.microsoft.com/office/drawing/2014/main" id="{67E45071-3E91-3975-958C-43782E39B6B9}"/>
               </a:ext>
             </a:extLst>
           </p:cNvPr>
@@ -5563,6 +5697,39 @@
           </p:cNvSpPr>
           <p:nvPr>
             <p:ph type="title"/>
+          </p:nvPr>
+        </p:nvSpPr>
+        <p:spPr/>
+        <p:txBody>
+          <a:bodyPr/>
+          <a:lstStyle/>
+          <a:p>
+            <a:r>
+              <a:rPr lang="hu-HU" dirty="0"/>
+              <a:t>A Python modulrendszere, standard </a:t>
+            </a:r>
+            <a:r>
+              <a:rPr lang="hu-HU" dirty="0" err="1"/>
+              <a:t>library</a:t>
+            </a:r>
+            <a:endParaRPr lang="hu-HU" dirty="0"/>
+          </a:p>
+        </p:txBody>
+      </p:sp>
+      <p:sp>
+        <p:nvSpPr>
+          <p:cNvPr id="3" name="Tartalom helye 2">
+            <a:extLst>
+              <a:ext uri="{FF2B5EF4-FFF2-40B4-BE49-F238E27FC236}">
+                <a16:creationId xmlns:a16="http://schemas.microsoft.com/office/drawing/2014/main" id="{0F52A367-7627-7B81-0E00-66AB83DC996D}"/>
+              </a:ext>
+            </a:extLst>
+          </p:cNvPr>
+          <p:cNvSpPr>
+            <a:spLocks noGrp="1"/>
+          </p:cNvSpPr>
+          <p:nvPr>
+            <p:ph type="body" idx="1"/>
           </p:nvPr>
         </p:nvSpPr>
         <p:spPr/>
@@ -5572,162 +5739,14 @@
           </a:bodyPr>
           <a:lstStyle/>
           <a:p>
-            <a:r>
-              <a:rPr lang="hu-HU" dirty="0"/>
-              <a:t>A Python modulrendszere, standard </a:t>
-            </a:r>
-            <a:r>
-              <a:rPr lang="hu-HU" dirty="0" err="1"/>
-              <a:t>library</a:t>
-            </a:r>
             <a:endParaRPr lang="hu-HU" dirty="0"/>
-          </a:p>
-        </p:txBody>
-      </p:sp>
-      <p:sp>
-        <p:nvSpPr>
-          <p:cNvPr id="11" name="Tartalom helye 10">
-            <a:extLst>
-              <a:ext uri="{FF2B5EF4-FFF2-40B4-BE49-F238E27FC236}">
-                <a16:creationId xmlns:a16="http://schemas.microsoft.com/office/drawing/2014/main" id="{1304DAAD-A571-195A-29C9-8BA795B1C660}"/>
-              </a:ext>
-            </a:extLst>
-          </p:cNvPr>
-          <p:cNvSpPr>
-            <a:spLocks noGrp="1"/>
-          </p:cNvSpPr>
-          <p:nvPr>
-            <p:ph idx="1"/>
-          </p:nvPr>
-        </p:nvSpPr>
-        <p:spPr/>
-        <p:txBody>
-          <a:bodyPr>
-            <a:normAutofit fontScale="55000" lnSpcReduction="20000"/>
-          </a:bodyPr>
-          <a:lstStyle/>
-          <a:p>
-            <a:r>
-              <a:rPr lang="hu-HU" dirty="0"/>
-              <a:t>A fájl, mint modul, Modulban attribútumai: változók, függvények és osztályok</a:t>
-            </a:r>
-          </a:p>
-          <a:p>
-            <a:r>
-              <a:rPr lang="hu-HU" dirty="0"/>
-              <a:t>Csomagok és névterek</a:t>
-            </a:r>
-          </a:p>
-          <a:p>
-            <a:r>
-              <a:rPr lang="hu-HU" dirty="0"/>
-              <a:t>Teljes modul importálása</a:t>
-            </a:r>
-          </a:p>
-          <a:p>
-            <a:r>
-              <a:rPr lang="hu-HU" dirty="0"/>
-              <a:t>Modul egy attribútumainak importálása</a:t>
-            </a:r>
-          </a:p>
-          <a:p>
-            <a:r>
-              <a:rPr lang="hu-HU" dirty="0"/>
-              <a:t>Modul minden attribútumainak importálása</a:t>
-            </a:r>
-          </a:p>
-          <a:p>
-            <a:r>
-              <a:rPr lang="hu-HU" dirty="0"/>
-              <a:t>A main modul</a:t>
-            </a:r>
-          </a:p>
-          <a:p>
-            <a:r>
-              <a:rPr lang="hu-HU" dirty="0"/>
-              <a:t>A </a:t>
-            </a:r>
-            <a:r>
-              <a:rPr lang="hu-HU" dirty="0" err="1"/>
-              <a:t>date</a:t>
-            </a:r>
-            <a:r>
-              <a:rPr lang="hu-HU" dirty="0"/>
-              <a:t> modul</a:t>
-            </a:r>
-          </a:p>
-          <a:p>
-            <a:r>
-              <a:rPr lang="hu-HU" dirty="0"/>
-              <a:t>A random modul</a:t>
-            </a:r>
-          </a:p>
-          <a:p>
-            <a:r>
-              <a:rPr lang="hu-HU" dirty="0"/>
-              <a:t>Az </a:t>
-            </a:r>
-            <a:r>
-              <a:rPr lang="hu-HU" dirty="0" err="1"/>
-              <a:t>os</a:t>
-            </a:r>
-            <a:r>
-              <a:rPr lang="hu-HU" dirty="0"/>
-              <a:t> modul</a:t>
-            </a:r>
-          </a:p>
-          <a:p>
-            <a:r>
-              <a:rPr lang="hu-HU" dirty="0"/>
-              <a:t>Modulok névütközése</a:t>
-            </a:r>
-          </a:p>
-          <a:p>
-            <a:r>
-              <a:rPr lang="hu-HU" dirty="0"/>
-              <a:t>Importálása más néven</a:t>
-            </a:r>
-          </a:p>
-          <a:p>
-            <a:r>
-              <a:rPr lang="hu-HU" dirty="0"/>
-              <a:t>Importálás csomagból</a:t>
-            </a:r>
-          </a:p>
-          <a:p>
-            <a:r>
-              <a:rPr lang="hu-HU" dirty="0"/>
-              <a:t>A </a:t>
-            </a:r>
-            <a:r>
-              <a:rPr lang="hu-HU" dirty="0" err="1"/>
-              <a:t>pip</a:t>
-            </a:r>
-            <a:r>
-              <a:rPr lang="hu-HU" dirty="0"/>
-              <a:t> csomagkezelő</a:t>
-            </a:r>
-          </a:p>
-          <a:p>
-            <a:r>
-              <a:rPr lang="hu-HU" dirty="0"/>
-              <a:t>A </a:t>
-            </a:r>
-            <a:r>
-              <a:rPr lang="hu-HU" dirty="0" err="1"/>
-              <a:t>pypi</a:t>
-            </a:r>
-            <a:r>
-              <a:rPr lang="hu-HU" dirty="0"/>
-              <a:t> oldal</a:t>
-            </a:r>
           </a:p>
         </p:txBody>
       </p:sp>
     </p:spTree>
     <p:extLst>
       <p:ext uri="{BB962C8B-B14F-4D97-AF65-F5344CB8AC3E}">
-        <p14:creationId xmlns:p14="http://schemas.microsoft.com/office/powerpoint/2010/main" val="1563335149"/>
+        <p14:creationId xmlns:p14="http://schemas.microsoft.com/office/powerpoint/2010/main" val="2665335602"/>
       </p:ext>
     </p:extLst>
   </p:cSld>
@@ -5756,10 +5775,10 @@
       </p:grpSpPr>
       <p:sp>
         <p:nvSpPr>
-          <p:cNvPr id="2" name="Cím 1">
-            <a:extLst>
-              <a:ext uri="{FF2B5EF4-FFF2-40B4-BE49-F238E27FC236}">
-                <a16:creationId xmlns:a16="http://schemas.microsoft.com/office/drawing/2014/main" id="{67E45071-3E91-3975-958C-43782E39B6B9}"/>
+          <p:cNvPr id="10" name="Cím 9">
+            <a:extLst>
+              <a:ext uri="{FF2B5EF4-FFF2-40B4-BE49-F238E27FC236}">
+                <a16:creationId xmlns:a16="http://schemas.microsoft.com/office/drawing/2014/main" id="{026B303C-F00B-C202-DACD-409846B572C8}"/>
               </a:ext>
             </a:extLst>
           </p:cNvPr>
@@ -5768,34 +5787,6 @@
           </p:cNvSpPr>
           <p:nvPr>
             <p:ph type="title"/>
-          </p:nvPr>
-        </p:nvSpPr>
-        <p:spPr/>
-        <p:txBody>
-          <a:bodyPr/>
-          <a:lstStyle/>
-          <a:p>
-            <a:r>
-              <a:rPr lang="hu-HU" dirty="0"/>
-              <a:t>Fájlkezelés</a:t>
-            </a:r>
-          </a:p>
-        </p:txBody>
-      </p:sp>
-      <p:sp>
-        <p:nvSpPr>
-          <p:cNvPr id="3" name="Tartalom helye 2">
-            <a:extLst>
-              <a:ext uri="{FF2B5EF4-FFF2-40B4-BE49-F238E27FC236}">
-                <a16:creationId xmlns:a16="http://schemas.microsoft.com/office/drawing/2014/main" id="{0F52A367-7627-7B81-0E00-66AB83DC996D}"/>
-              </a:ext>
-            </a:extLst>
-          </p:cNvPr>
-          <p:cNvSpPr>
-            <a:spLocks noGrp="1"/>
-          </p:cNvSpPr>
-          <p:nvPr>
-            <p:ph type="body" idx="1"/>
           </p:nvPr>
         </p:nvSpPr>
         <p:spPr/>
@@ -5805,14 +5796,162 @@
           </a:bodyPr>
           <a:lstStyle/>
           <a:p>
+            <a:r>
+              <a:rPr lang="hu-HU" dirty="0"/>
+              <a:t>A Python modulrendszere, standard </a:t>
+            </a:r>
+            <a:r>
+              <a:rPr lang="hu-HU" dirty="0" err="1"/>
+              <a:t>library</a:t>
+            </a:r>
             <a:endParaRPr lang="hu-HU" dirty="0"/>
+          </a:p>
+        </p:txBody>
+      </p:sp>
+      <p:sp>
+        <p:nvSpPr>
+          <p:cNvPr id="11" name="Tartalom helye 10">
+            <a:extLst>
+              <a:ext uri="{FF2B5EF4-FFF2-40B4-BE49-F238E27FC236}">
+                <a16:creationId xmlns:a16="http://schemas.microsoft.com/office/drawing/2014/main" id="{1304DAAD-A571-195A-29C9-8BA795B1C660}"/>
+              </a:ext>
+            </a:extLst>
+          </p:cNvPr>
+          <p:cNvSpPr>
+            <a:spLocks noGrp="1"/>
+          </p:cNvSpPr>
+          <p:nvPr>
+            <p:ph idx="1"/>
+          </p:nvPr>
+        </p:nvSpPr>
+        <p:spPr/>
+        <p:txBody>
+          <a:bodyPr>
+            <a:normAutofit fontScale="55000" lnSpcReduction="20000"/>
+          </a:bodyPr>
+          <a:lstStyle/>
+          <a:p>
+            <a:r>
+              <a:rPr lang="hu-HU" dirty="0"/>
+              <a:t>A fájl, mint modul, Modulban attribútumai: változók, függvények és osztályok</a:t>
+            </a:r>
+          </a:p>
+          <a:p>
+            <a:r>
+              <a:rPr lang="hu-HU" dirty="0"/>
+              <a:t>Csomagok és névterek</a:t>
+            </a:r>
+          </a:p>
+          <a:p>
+            <a:r>
+              <a:rPr lang="hu-HU" dirty="0"/>
+              <a:t>Teljes modul importálása</a:t>
+            </a:r>
+          </a:p>
+          <a:p>
+            <a:r>
+              <a:rPr lang="hu-HU" dirty="0"/>
+              <a:t>Modul egy attribútumainak importálása</a:t>
+            </a:r>
+          </a:p>
+          <a:p>
+            <a:r>
+              <a:rPr lang="hu-HU" dirty="0"/>
+              <a:t>Modul minden attribútumainak importálása</a:t>
+            </a:r>
+          </a:p>
+          <a:p>
+            <a:r>
+              <a:rPr lang="hu-HU" dirty="0"/>
+              <a:t>A main modul</a:t>
+            </a:r>
+          </a:p>
+          <a:p>
+            <a:r>
+              <a:rPr lang="hu-HU" dirty="0"/>
+              <a:t>A </a:t>
+            </a:r>
+            <a:r>
+              <a:rPr lang="hu-HU" dirty="0" err="1"/>
+              <a:t>date</a:t>
+            </a:r>
+            <a:r>
+              <a:rPr lang="hu-HU" dirty="0"/>
+              <a:t> modul</a:t>
+            </a:r>
+          </a:p>
+          <a:p>
+            <a:r>
+              <a:rPr lang="hu-HU" dirty="0"/>
+              <a:t>A random modul</a:t>
+            </a:r>
+          </a:p>
+          <a:p>
+            <a:r>
+              <a:rPr lang="hu-HU" dirty="0"/>
+              <a:t>Az </a:t>
+            </a:r>
+            <a:r>
+              <a:rPr lang="hu-HU" dirty="0" err="1"/>
+              <a:t>os</a:t>
+            </a:r>
+            <a:r>
+              <a:rPr lang="hu-HU" dirty="0"/>
+              <a:t> modul</a:t>
+            </a:r>
+          </a:p>
+          <a:p>
+            <a:r>
+              <a:rPr lang="hu-HU" dirty="0"/>
+              <a:t>Modulok névütközése</a:t>
+            </a:r>
+          </a:p>
+          <a:p>
+            <a:r>
+              <a:rPr lang="hu-HU" dirty="0"/>
+              <a:t>Importálása más néven</a:t>
+            </a:r>
+          </a:p>
+          <a:p>
+            <a:r>
+              <a:rPr lang="hu-HU" dirty="0"/>
+              <a:t>Importálás csomagból</a:t>
+            </a:r>
+          </a:p>
+          <a:p>
+            <a:r>
+              <a:rPr lang="hu-HU" dirty="0"/>
+              <a:t>A </a:t>
+            </a:r>
+            <a:r>
+              <a:rPr lang="hu-HU" dirty="0" err="1"/>
+              <a:t>pip</a:t>
+            </a:r>
+            <a:r>
+              <a:rPr lang="hu-HU" dirty="0"/>
+              <a:t> csomagkezelő</a:t>
+            </a:r>
+          </a:p>
+          <a:p>
+            <a:r>
+              <a:rPr lang="hu-HU" dirty="0"/>
+              <a:t>A </a:t>
+            </a:r>
+            <a:r>
+              <a:rPr lang="hu-HU" dirty="0" err="1"/>
+              <a:t>pypi</a:t>
+            </a:r>
+            <a:r>
+              <a:rPr lang="hu-HU" dirty="0"/>
+              <a:t> oldal</a:t>
+            </a:r>
           </a:p>
         </p:txBody>
       </p:sp>
     </p:spTree>
     <p:extLst>
       <p:ext uri="{BB962C8B-B14F-4D97-AF65-F5344CB8AC3E}">
-        <p14:creationId xmlns:p14="http://schemas.microsoft.com/office/powerpoint/2010/main" val="797157590"/>
+        <p14:creationId xmlns:p14="http://schemas.microsoft.com/office/powerpoint/2010/main" val="1563335149"/>
       </p:ext>
     </p:extLst>
   </p:cSld>
@@ -5841,6 +5980,91 @@
       </p:grpSpPr>
       <p:sp>
         <p:nvSpPr>
+          <p:cNvPr id="2" name="Cím 1">
+            <a:extLst>
+              <a:ext uri="{FF2B5EF4-FFF2-40B4-BE49-F238E27FC236}">
+                <a16:creationId xmlns:a16="http://schemas.microsoft.com/office/drawing/2014/main" id="{67E45071-3E91-3975-958C-43782E39B6B9}"/>
+              </a:ext>
+            </a:extLst>
+          </p:cNvPr>
+          <p:cNvSpPr>
+            <a:spLocks noGrp="1"/>
+          </p:cNvSpPr>
+          <p:nvPr>
+            <p:ph type="title"/>
+          </p:nvPr>
+        </p:nvSpPr>
+        <p:spPr/>
+        <p:txBody>
+          <a:bodyPr/>
+          <a:lstStyle/>
+          <a:p>
+            <a:r>
+              <a:rPr lang="hu-HU" dirty="0"/>
+              <a:t>Fájlkezelés</a:t>
+            </a:r>
+          </a:p>
+        </p:txBody>
+      </p:sp>
+      <p:sp>
+        <p:nvSpPr>
+          <p:cNvPr id="3" name="Tartalom helye 2">
+            <a:extLst>
+              <a:ext uri="{FF2B5EF4-FFF2-40B4-BE49-F238E27FC236}">
+                <a16:creationId xmlns:a16="http://schemas.microsoft.com/office/drawing/2014/main" id="{0F52A367-7627-7B81-0E00-66AB83DC996D}"/>
+              </a:ext>
+            </a:extLst>
+          </p:cNvPr>
+          <p:cNvSpPr>
+            <a:spLocks noGrp="1"/>
+          </p:cNvSpPr>
+          <p:nvPr>
+            <p:ph type="body" idx="1"/>
+          </p:nvPr>
+        </p:nvSpPr>
+        <p:spPr/>
+        <p:txBody>
+          <a:bodyPr>
+            <a:normAutofit/>
+          </a:bodyPr>
+          <a:lstStyle/>
+          <a:p>
+            <a:endParaRPr lang="hu-HU" dirty="0"/>
+          </a:p>
+        </p:txBody>
+      </p:sp>
+    </p:spTree>
+    <p:extLst>
+      <p:ext uri="{BB962C8B-B14F-4D97-AF65-F5344CB8AC3E}">
+        <p14:creationId xmlns:p14="http://schemas.microsoft.com/office/powerpoint/2010/main" val="797157590"/>
+      </p:ext>
+    </p:extLst>
+  </p:cSld>
+  <p:clrMapOvr>
+    <a:masterClrMapping/>
+  </p:clrMapOvr>
+</p:sld>
+</file>
+
+<file path=ppt/slides/slide25.xml><?xml version="1.0" encoding="utf-8"?>
+<p:sld xmlns:a="http://schemas.openxmlformats.org/drawingml/2006/main" xmlns:r="http://schemas.openxmlformats.org/officeDocument/2006/relationships" xmlns:p="http://schemas.openxmlformats.org/presentationml/2006/main">
+  <p:cSld>
+    <p:spTree>
+      <p:nvGrpSpPr>
+        <p:cNvPr id="1" name=""/>
+        <p:cNvGrpSpPr/>
+        <p:nvPr/>
+      </p:nvGrpSpPr>
+      <p:grpSpPr>
+        <a:xfrm>
+          <a:off x="0" y="0"/>
+          <a:ext cx="0" cy="0"/>
+          <a:chOff x="0" y="0"/>
+          <a:chExt cx="0" cy="0"/>
+        </a:xfrm>
+      </p:grpSpPr>
+      <p:sp>
+        <p:nvSpPr>
           <p:cNvPr id="10" name="Cím 9">
             <a:extLst>
               <a:ext uri="{FF2B5EF4-FFF2-40B4-BE49-F238E27FC236}">
@@ -5984,7 +6208,7 @@
 </p:sld>
 </file>
 
-<file path=ppt/slides/slide25.xml><?xml version="1.0" encoding="utf-8"?>
+<file path=ppt/slides/slide26.xml><?xml version="1.0" encoding="utf-8"?>
 <p:sld xmlns:a="http://schemas.openxmlformats.org/drawingml/2006/main" xmlns:r="http://schemas.openxmlformats.org/officeDocument/2006/relationships" xmlns:p="http://schemas.openxmlformats.org/presentationml/2006/main">
   <p:cSld>
     <p:spTree>
@@ -6155,6 +6379,11 @@
   <p:clrMapOvr>
     <a:masterClrMapping/>
   </p:clrMapOvr>
+  <p:extLst>
+    <p:ext uri="{6950BFC3-D8DA-4A85-94F7-54DA5524770B}">
+      <p188:commentRel xmlns:p188="http://schemas.microsoft.com/office/powerpoint/2018/8/main" r:id="rId2"/>
+    </p:ext>
+  </p:extLst>
 </p:sld>
 </file>
 
@@ -6426,6 +6655,11 @@
   <p:clrMapOvr>
     <a:masterClrMapping/>
   </p:clrMapOvr>
+  <p:extLst>
+    <p:ext uri="{6950BFC3-D8DA-4A85-94F7-54DA5524770B}">
+      <p188:commentRel xmlns:p188="http://schemas.microsoft.com/office/powerpoint/2018/8/main" r:id="rId2"/>
+    </p:ext>
+  </p:extLst>
 </p:sld>
 </file>
 
@@ -6448,10 +6682,10 @@
       </p:grpSpPr>
       <p:sp>
         <p:nvSpPr>
-          <p:cNvPr id="2" name="Cím 1">
-            <a:extLst>
-              <a:ext uri="{FF2B5EF4-FFF2-40B4-BE49-F238E27FC236}">
-                <a16:creationId xmlns:a16="http://schemas.microsoft.com/office/drawing/2014/main" id="{67E45071-3E91-3975-958C-43782E39B6B9}"/>
+          <p:cNvPr id="4" name="Cím 3">
+            <a:extLst>
+              <a:ext uri="{FF2B5EF4-FFF2-40B4-BE49-F238E27FC236}">
+                <a16:creationId xmlns:a16="http://schemas.microsoft.com/office/drawing/2014/main" id="{8D8D5F6B-E238-4F7E-BF6C-6981024AAF68}"/>
               </a:ext>
             </a:extLst>
           </p:cNvPr>
@@ -6469,17 +6703,17 @@
           <a:p>
             <a:r>
               <a:rPr lang="hu-HU" dirty="0"/>
-              <a:t>Alap adattípusok, operátorok</a:t>
-            </a:r>
-          </a:p>
-        </p:txBody>
-      </p:sp>
-      <p:sp>
-        <p:nvSpPr>
-          <p:cNvPr id="3" name="Tartalom helye 2">
-            <a:extLst>
-              <a:ext uri="{FF2B5EF4-FFF2-40B4-BE49-F238E27FC236}">
-                <a16:creationId xmlns:a16="http://schemas.microsoft.com/office/drawing/2014/main" id="{0F52A367-7627-7B81-0E00-66AB83DC996D}"/>
+              <a:t>A Python nyelv, fejlesztő környezet, számok és operátorok</a:t>
+            </a:r>
+          </a:p>
+        </p:txBody>
+      </p:sp>
+      <p:sp>
+        <p:nvSpPr>
+          <p:cNvPr id="5" name="Szöveg helye 4">
+            <a:extLst>
+              <a:ext uri="{FF2B5EF4-FFF2-40B4-BE49-F238E27FC236}">
+                <a16:creationId xmlns:a16="http://schemas.microsoft.com/office/drawing/2014/main" id="{99147CC0-FF23-BD9B-F789-85501253DEFE}"/>
               </a:ext>
             </a:extLst>
           </p:cNvPr>
@@ -6492,25 +6726,31 @@
         </p:nvSpPr>
         <p:spPr/>
         <p:txBody>
-          <a:bodyPr>
-            <a:normAutofit/>
-          </a:bodyPr>
-          <a:lstStyle/>
-          <a:p>
-            <a:endParaRPr lang="hu-HU" dirty="0"/>
+          <a:bodyPr/>
+          <a:lstStyle/>
+          <a:p>
+            <a:r>
+              <a:rPr lang="hu-HU" dirty="0"/>
+              <a:t>A programozási nyelvekről</a:t>
+            </a:r>
           </a:p>
         </p:txBody>
       </p:sp>
     </p:spTree>
     <p:extLst>
       <p:ext uri="{BB962C8B-B14F-4D97-AF65-F5344CB8AC3E}">
-        <p14:creationId xmlns:p14="http://schemas.microsoft.com/office/powerpoint/2010/main" val="505069116"/>
+        <p14:creationId xmlns:p14="http://schemas.microsoft.com/office/powerpoint/2010/main" val="1122101112"/>
       </p:ext>
     </p:extLst>
   </p:cSld>
   <p:clrMapOvr>
     <a:masterClrMapping/>
   </p:clrMapOvr>
+  <p:extLst>
+    <p:ext uri="{6950BFC3-D8DA-4A85-94F7-54DA5524770B}">
+      <p188:commentRel xmlns:p188="http://schemas.microsoft.com/office/powerpoint/2018/8/main" r:id="rId2"/>
+    </p:ext>
+  </p:extLst>
 </p:sld>
 </file>
 
@@ -6533,10 +6773,10 @@
       </p:grpSpPr>
       <p:sp>
         <p:nvSpPr>
-          <p:cNvPr id="10" name="Cím 9">
-            <a:extLst>
-              <a:ext uri="{FF2B5EF4-FFF2-40B4-BE49-F238E27FC236}">
-                <a16:creationId xmlns:a16="http://schemas.microsoft.com/office/drawing/2014/main" id="{026B303C-F00B-C202-DACD-409846B572C8}"/>
+          <p:cNvPr id="2" name="Cím 1">
+            <a:extLst>
+              <a:ext uri="{FF2B5EF4-FFF2-40B4-BE49-F238E27FC236}">
+                <a16:creationId xmlns:a16="http://schemas.microsoft.com/office/drawing/2014/main" id="{67E45071-3E91-3975-958C-43782E39B6B9}"/>
               </a:ext>
             </a:extLst>
           </p:cNvPr>
@@ -6545,6 +6785,34 @@
           </p:cNvSpPr>
           <p:nvPr>
             <p:ph type="title"/>
+          </p:nvPr>
+        </p:nvSpPr>
+        <p:spPr/>
+        <p:txBody>
+          <a:bodyPr/>
+          <a:lstStyle/>
+          <a:p>
+            <a:r>
+              <a:rPr lang="hu-HU" dirty="0"/>
+              <a:t>Alap adattípusok, operátorok</a:t>
+            </a:r>
+          </a:p>
+        </p:txBody>
+      </p:sp>
+      <p:sp>
+        <p:nvSpPr>
+          <p:cNvPr id="3" name="Tartalom helye 2">
+            <a:extLst>
+              <a:ext uri="{FF2B5EF4-FFF2-40B4-BE49-F238E27FC236}">
+                <a16:creationId xmlns:a16="http://schemas.microsoft.com/office/drawing/2014/main" id="{0F52A367-7627-7B81-0E00-66AB83DC996D}"/>
+              </a:ext>
+            </a:extLst>
+          </p:cNvPr>
+          <p:cNvSpPr>
+            <a:spLocks noGrp="1"/>
+          </p:cNvSpPr>
+          <p:nvPr>
+            <p:ph type="body" idx="1"/>
           </p:nvPr>
         </p:nvSpPr>
         <p:spPr/>
@@ -6554,187 +6822,14 @@
           </a:bodyPr>
           <a:lstStyle/>
           <a:p>
-            <a:r>
-              <a:rPr lang="hu-HU" dirty="0"/>
-              <a:t>Alap adattípusok, operátorok</a:t>
-            </a:r>
-          </a:p>
-        </p:txBody>
-      </p:sp>
-      <p:sp>
-        <p:nvSpPr>
-          <p:cNvPr id="11" name="Tartalom helye 10">
-            <a:extLst>
-              <a:ext uri="{FF2B5EF4-FFF2-40B4-BE49-F238E27FC236}">
-                <a16:creationId xmlns:a16="http://schemas.microsoft.com/office/drawing/2014/main" id="{1304DAAD-A571-195A-29C9-8BA795B1C660}"/>
-              </a:ext>
-            </a:extLst>
-          </p:cNvPr>
-          <p:cNvSpPr>
-            <a:spLocks noGrp="1"/>
-          </p:cNvSpPr>
-          <p:nvPr>
-            <p:ph idx="1"/>
-          </p:nvPr>
-        </p:nvSpPr>
-        <p:spPr/>
-        <p:txBody>
-          <a:bodyPr>
-            <a:normAutofit fontScale="47500" lnSpcReduction="20000"/>
-          </a:bodyPr>
-          <a:lstStyle/>
-          <a:p>
-            <a:r>
-              <a:rPr lang="hu-HU" dirty="0"/>
-              <a:t>Változók létrehozása, az értékadó operátor</a:t>
-            </a:r>
-          </a:p>
-          <a:p>
-            <a:r>
-              <a:rPr lang="hu-HU" dirty="0"/>
-              <a:t>A nyelv foglalt szavai, foglalt szavak listája</a:t>
-            </a:r>
-          </a:p>
-          <a:p>
-            <a:r>
-              <a:rPr lang="hu-HU" dirty="0"/>
-              <a:t>Névadási konvenciók</a:t>
-            </a:r>
-          </a:p>
-          <a:p>
-            <a:r>
-              <a:rPr lang="hu-HU" dirty="0" err="1"/>
-              <a:t>Módosíthatatlanság</a:t>
-            </a:r>
-            <a:r>
-              <a:rPr lang="hu-HU" dirty="0"/>
-              <a:t>  (</a:t>
-            </a:r>
-            <a:r>
-              <a:rPr lang="hu-HU" dirty="0" err="1"/>
-              <a:t>immutability</a:t>
-            </a:r>
-            <a:r>
-              <a:rPr lang="hu-HU" dirty="0"/>
-              <a:t>)</a:t>
-            </a:r>
-          </a:p>
-          <a:p>
-            <a:r>
-              <a:rPr lang="hu-HU" dirty="0"/>
-              <a:t>Operátorok, operandus, kifejezés, utasítás</a:t>
-            </a:r>
-          </a:p>
-          <a:p>
-            <a:r>
-              <a:rPr lang="hu-HU" dirty="0"/>
-              <a:t>statikus és dinamikus típusosság</a:t>
-            </a:r>
-          </a:p>
-          <a:p>
-            <a:r>
-              <a:rPr lang="hu-HU" dirty="0"/>
-              <a:t>explicit és implicit típusmegadás</a:t>
-            </a:r>
-          </a:p>
-          <a:p>
-            <a:r>
-              <a:rPr lang="hu-HU" dirty="0"/>
-              <a:t>statikus, dinamikus, explicit, implicit variációk</a:t>
-            </a:r>
-          </a:p>
-          <a:p>
-            <a:r>
-              <a:rPr lang="hu-HU" dirty="0"/>
-              <a:t>Összevont operátor</a:t>
-            </a:r>
-          </a:p>
-          <a:p>
-            <a:r>
-              <a:rPr lang="hu-HU" dirty="0"/>
-              <a:t>Típus konverzió</a:t>
-            </a:r>
-          </a:p>
-          <a:p>
-            <a:r>
-              <a:rPr lang="hu-HU" dirty="0"/>
-              <a:t>Adatok bekérése a felhasználótól</a:t>
-            </a:r>
-          </a:p>
-          <a:p>
-            <a:r>
-              <a:rPr lang="hu-HU" dirty="0"/>
-              <a:t>Az </a:t>
-            </a:r>
-            <a:r>
-              <a:rPr lang="hu-HU" dirty="0" err="1"/>
-              <a:t>str</a:t>
-            </a:r>
-            <a:r>
-              <a:rPr lang="hu-HU" dirty="0"/>
-              <a:t> (szöveges) típus, Aposztróf, időzőjel, </a:t>
-            </a:r>
-            <a:r>
-              <a:rPr lang="hu-HU" dirty="0" err="1"/>
-              <a:t>escape-elés</a:t>
-            </a:r>
             <a:endParaRPr lang="hu-HU" dirty="0"/>
-          </a:p>
-          <a:p>
-            <a:r>
-              <a:rPr lang="hu-HU" dirty="0"/>
-              <a:t>Többsoros </a:t>
-            </a:r>
-            <a:r>
-              <a:rPr lang="hu-HU" dirty="0" err="1"/>
-              <a:t>string</a:t>
-            </a:r>
-            <a:endParaRPr lang="hu-HU" dirty="0"/>
-          </a:p>
-          <a:p>
-            <a:r>
-              <a:rPr lang="hu-HU" dirty="0"/>
-              <a:t>Formázott szövegek</a:t>
-            </a:r>
-          </a:p>
-          <a:p>
-            <a:r>
-              <a:rPr lang="hu-HU" dirty="0"/>
-              <a:t>Formázott szövegek (f </a:t>
-            </a:r>
-            <a:r>
-              <a:rPr lang="hu-HU" dirty="0" err="1"/>
-              <a:t>string</a:t>
-            </a:r>
-            <a:r>
-              <a:rPr lang="hu-HU" dirty="0"/>
-              <a:t>, r </a:t>
-            </a:r>
-            <a:r>
-              <a:rPr lang="hu-HU" dirty="0" err="1"/>
-              <a:t>string</a:t>
-            </a:r>
-            <a:r>
-              <a:rPr lang="hu-HU" dirty="0"/>
-              <a:t>)</a:t>
-            </a:r>
-          </a:p>
-          <a:p>
-            <a:r>
-              <a:rPr lang="hu-HU" dirty="0" err="1"/>
-              <a:t>String</a:t>
-            </a:r>
-            <a:r>
-              <a:rPr lang="hu-HU" dirty="0"/>
-              <a:t> tulajdonságok és metódusok</a:t>
-            </a:r>
           </a:p>
         </p:txBody>
       </p:sp>
     </p:spTree>
     <p:extLst>
       <p:ext uri="{BB962C8B-B14F-4D97-AF65-F5344CB8AC3E}">
-        <p14:creationId xmlns:p14="http://schemas.microsoft.com/office/powerpoint/2010/main" val="1675522082"/>
+        <p14:creationId xmlns:p14="http://schemas.microsoft.com/office/powerpoint/2010/main" val="505069116"/>
       </p:ext>
     </p:extLst>
   </p:cSld>
@@ -6763,10 +6858,10 @@
       </p:grpSpPr>
       <p:sp>
         <p:nvSpPr>
-          <p:cNvPr id="2" name="Cím 1">
-            <a:extLst>
-              <a:ext uri="{FF2B5EF4-FFF2-40B4-BE49-F238E27FC236}">
-                <a16:creationId xmlns:a16="http://schemas.microsoft.com/office/drawing/2014/main" id="{67E45071-3E91-3975-958C-43782E39B6B9}"/>
+          <p:cNvPr id="10" name="Cím 9">
+            <a:extLst>
+              <a:ext uri="{FF2B5EF4-FFF2-40B4-BE49-F238E27FC236}">
+                <a16:creationId xmlns:a16="http://schemas.microsoft.com/office/drawing/2014/main" id="{026B303C-F00B-C202-DACD-409846B572C8}"/>
               </a:ext>
             </a:extLst>
           </p:cNvPr>
@@ -6775,42 +6870,6 @@
           </p:cNvSpPr>
           <p:nvPr>
             <p:ph type="title"/>
-          </p:nvPr>
-        </p:nvSpPr>
-        <p:spPr/>
-        <p:txBody>
-          <a:bodyPr/>
-          <a:lstStyle/>
-          <a:p>
-            <a:r>
-              <a:rPr lang="hu-HU" dirty="0"/>
-              <a:t>A </a:t>
-            </a:r>
-            <a:r>
-              <a:rPr lang="hu-HU" dirty="0" err="1"/>
-              <a:t>list</a:t>
-            </a:r>
-            <a:r>
-              <a:rPr lang="hu-HU" dirty="0"/>
-              <a:t> konténer típus, ciklusok</a:t>
-            </a:r>
-          </a:p>
-        </p:txBody>
-      </p:sp>
-      <p:sp>
-        <p:nvSpPr>
-          <p:cNvPr id="3" name="Tartalom helye 2">
-            <a:extLst>
-              <a:ext uri="{FF2B5EF4-FFF2-40B4-BE49-F238E27FC236}">
-                <a16:creationId xmlns:a16="http://schemas.microsoft.com/office/drawing/2014/main" id="{0F52A367-7627-7B81-0E00-66AB83DC996D}"/>
-              </a:ext>
-            </a:extLst>
-          </p:cNvPr>
-          <p:cNvSpPr>
-            <a:spLocks noGrp="1"/>
-          </p:cNvSpPr>
-          <p:nvPr>
-            <p:ph type="body" idx="1"/>
           </p:nvPr>
         </p:nvSpPr>
         <p:spPr/>
@@ -6820,14 +6879,187 @@
           </a:bodyPr>
           <a:lstStyle/>
           <a:p>
+            <a:r>
+              <a:rPr lang="hu-HU" dirty="0"/>
+              <a:t>Alap adattípusok, operátorok</a:t>
+            </a:r>
+          </a:p>
+        </p:txBody>
+      </p:sp>
+      <p:sp>
+        <p:nvSpPr>
+          <p:cNvPr id="11" name="Tartalom helye 10">
+            <a:extLst>
+              <a:ext uri="{FF2B5EF4-FFF2-40B4-BE49-F238E27FC236}">
+                <a16:creationId xmlns:a16="http://schemas.microsoft.com/office/drawing/2014/main" id="{1304DAAD-A571-195A-29C9-8BA795B1C660}"/>
+              </a:ext>
+            </a:extLst>
+          </p:cNvPr>
+          <p:cNvSpPr>
+            <a:spLocks noGrp="1"/>
+          </p:cNvSpPr>
+          <p:nvPr>
+            <p:ph idx="1"/>
+          </p:nvPr>
+        </p:nvSpPr>
+        <p:spPr/>
+        <p:txBody>
+          <a:bodyPr>
+            <a:normAutofit fontScale="47500" lnSpcReduction="20000"/>
+          </a:bodyPr>
+          <a:lstStyle/>
+          <a:p>
+            <a:r>
+              <a:rPr lang="hu-HU" dirty="0"/>
+              <a:t>Változók létrehozása, az értékadó operátor</a:t>
+            </a:r>
+          </a:p>
+          <a:p>
+            <a:r>
+              <a:rPr lang="hu-HU" dirty="0"/>
+              <a:t>A nyelv foglalt szavai, foglalt szavak listája</a:t>
+            </a:r>
+          </a:p>
+          <a:p>
+            <a:r>
+              <a:rPr lang="hu-HU" dirty="0"/>
+              <a:t>Névadási konvenciók</a:t>
+            </a:r>
+          </a:p>
+          <a:p>
+            <a:r>
+              <a:rPr lang="hu-HU" dirty="0" err="1"/>
+              <a:t>Módosíthatatlanság</a:t>
+            </a:r>
+            <a:r>
+              <a:rPr lang="hu-HU" dirty="0"/>
+              <a:t>  (</a:t>
+            </a:r>
+            <a:r>
+              <a:rPr lang="hu-HU" dirty="0" err="1"/>
+              <a:t>immutability</a:t>
+            </a:r>
+            <a:r>
+              <a:rPr lang="hu-HU" dirty="0"/>
+              <a:t>)</a:t>
+            </a:r>
+          </a:p>
+          <a:p>
+            <a:r>
+              <a:rPr lang="hu-HU" dirty="0"/>
+              <a:t>Operátorok, operandus, kifejezés, utasítás</a:t>
+            </a:r>
+          </a:p>
+          <a:p>
+            <a:r>
+              <a:rPr lang="hu-HU" dirty="0"/>
+              <a:t>statikus és dinamikus típusosság</a:t>
+            </a:r>
+          </a:p>
+          <a:p>
+            <a:r>
+              <a:rPr lang="hu-HU" dirty="0"/>
+              <a:t>explicit és implicit típusmegadás</a:t>
+            </a:r>
+          </a:p>
+          <a:p>
+            <a:r>
+              <a:rPr lang="hu-HU" dirty="0"/>
+              <a:t>statikus, dinamikus, explicit, implicit variációk</a:t>
+            </a:r>
+          </a:p>
+          <a:p>
+            <a:r>
+              <a:rPr lang="hu-HU" dirty="0"/>
+              <a:t>Összevont operátor</a:t>
+            </a:r>
+          </a:p>
+          <a:p>
+            <a:r>
+              <a:rPr lang="hu-HU" dirty="0"/>
+              <a:t>Típus konverzió</a:t>
+            </a:r>
+          </a:p>
+          <a:p>
+            <a:r>
+              <a:rPr lang="hu-HU" dirty="0"/>
+              <a:t>Adatok bekérése a felhasználótól</a:t>
+            </a:r>
+          </a:p>
+          <a:p>
+            <a:r>
+              <a:rPr lang="hu-HU" dirty="0"/>
+              <a:t>Az </a:t>
+            </a:r>
+            <a:r>
+              <a:rPr lang="hu-HU" dirty="0" err="1"/>
+              <a:t>str</a:t>
+            </a:r>
+            <a:r>
+              <a:rPr lang="hu-HU" dirty="0"/>
+              <a:t> (szöveges) típus, Aposztróf, időzőjel, </a:t>
+            </a:r>
+            <a:r>
+              <a:rPr lang="hu-HU" dirty="0" err="1"/>
+              <a:t>escape-elés</a:t>
+            </a:r>
             <a:endParaRPr lang="hu-HU" dirty="0"/>
+          </a:p>
+          <a:p>
+            <a:r>
+              <a:rPr lang="hu-HU" dirty="0"/>
+              <a:t>Többsoros </a:t>
+            </a:r>
+            <a:r>
+              <a:rPr lang="hu-HU" dirty="0" err="1"/>
+              <a:t>string</a:t>
+            </a:r>
+            <a:endParaRPr lang="hu-HU" dirty="0"/>
+          </a:p>
+          <a:p>
+            <a:r>
+              <a:rPr lang="hu-HU" dirty="0"/>
+              <a:t>Formázott szövegek</a:t>
+            </a:r>
+          </a:p>
+          <a:p>
+            <a:r>
+              <a:rPr lang="hu-HU" dirty="0"/>
+              <a:t>Formázott szövegek (f </a:t>
+            </a:r>
+            <a:r>
+              <a:rPr lang="hu-HU" dirty="0" err="1"/>
+              <a:t>string</a:t>
+            </a:r>
+            <a:r>
+              <a:rPr lang="hu-HU" dirty="0"/>
+              <a:t>, r </a:t>
+            </a:r>
+            <a:r>
+              <a:rPr lang="hu-HU" dirty="0" err="1"/>
+              <a:t>string</a:t>
+            </a:r>
+            <a:r>
+              <a:rPr lang="hu-HU" dirty="0"/>
+              <a:t>)</a:t>
+            </a:r>
+          </a:p>
+          <a:p>
+            <a:r>
+              <a:rPr lang="hu-HU" dirty="0" err="1"/>
+              <a:t>String</a:t>
+            </a:r>
+            <a:r>
+              <a:rPr lang="hu-HU" dirty="0"/>
+              <a:t> tulajdonságok és metódusok</a:t>
+            </a:r>
           </a:p>
         </p:txBody>
       </p:sp>
     </p:spTree>
     <p:extLst>
       <p:ext uri="{BB962C8B-B14F-4D97-AF65-F5344CB8AC3E}">
-        <p14:creationId xmlns:p14="http://schemas.microsoft.com/office/powerpoint/2010/main" val="147733182"/>
+        <p14:creationId xmlns:p14="http://schemas.microsoft.com/office/powerpoint/2010/main" val="1675522082"/>
       </p:ext>
     </p:extLst>
   </p:cSld>
@@ -6856,10 +7088,10 @@
       </p:grpSpPr>
       <p:sp>
         <p:nvSpPr>
-          <p:cNvPr id="10" name="Cím 9">
-            <a:extLst>
-              <a:ext uri="{FF2B5EF4-FFF2-40B4-BE49-F238E27FC236}">
-                <a16:creationId xmlns:a16="http://schemas.microsoft.com/office/drawing/2014/main" id="{026B303C-F00B-C202-DACD-409846B572C8}"/>
+          <p:cNvPr id="2" name="Cím 1">
+            <a:extLst>
+              <a:ext uri="{FF2B5EF4-FFF2-40B4-BE49-F238E27FC236}">
+                <a16:creationId xmlns:a16="http://schemas.microsoft.com/office/drawing/2014/main" id="{67E45071-3E91-3975-958C-43782E39B6B9}"/>
               </a:ext>
             </a:extLst>
           </p:cNvPr>
@@ -6868,6 +7100,42 @@
           </p:cNvSpPr>
           <p:nvPr>
             <p:ph type="title"/>
+          </p:nvPr>
+        </p:nvSpPr>
+        <p:spPr/>
+        <p:txBody>
+          <a:bodyPr/>
+          <a:lstStyle/>
+          <a:p>
+            <a:r>
+              <a:rPr lang="hu-HU" dirty="0"/>
+              <a:t>A </a:t>
+            </a:r>
+            <a:r>
+              <a:rPr lang="hu-HU" dirty="0" err="1"/>
+              <a:t>list</a:t>
+            </a:r>
+            <a:r>
+              <a:rPr lang="hu-HU" dirty="0"/>
+              <a:t> konténer típus, ciklusok</a:t>
+            </a:r>
+          </a:p>
+        </p:txBody>
+      </p:sp>
+      <p:sp>
+        <p:nvSpPr>
+          <p:cNvPr id="3" name="Tartalom helye 2">
+            <a:extLst>
+              <a:ext uri="{FF2B5EF4-FFF2-40B4-BE49-F238E27FC236}">
+                <a16:creationId xmlns:a16="http://schemas.microsoft.com/office/drawing/2014/main" id="{0F52A367-7627-7B81-0E00-66AB83DC996D}"/>
+              </a:ext>
+            </a:extLst>
+          </p:cNvPr>
+          <p:cNvSpPr>
+            <a:spLocks noGrp="1"/>
+          </p:cNvSpPr>
+          <p:nvPr>
+            <p:ph type="body" idx="1"/>
           </p:nvPr>
         </p:nvSpPr>
         <p:spPr/>
@@ -6877,167 +7145,6 @@
           </a:bodyPr>
           <a:lstStyle/>
           <a:p>
-            <a:r>
-              <a:rPr lang="hu-HU" dirty="0"/>
-              <a:t>A </a:t>
-            </a:r>
-            <a:r>
-              <a:rPr lang="hu-HU" dirty="0" err="1"/>
-              <a:t>list</a:t>
-            </a:r>
-            <a:r>
-              <a:rPr lang="hu-HU" dirty="0"/>
-              <a:t> konténer típus, ciklusok</a:t>
-            </a:r>
-          </a:p>
-        </p:txBody>
-      </p:sp>
-      <p:sp>
-        <p:nvSpPr>
-          <p:cNvPr id="11" name="Tartalom helye 10">
-            <a:extLst>
-              <a:ext uri="{FF2B5EF4-FFF2-40B4-BE49-F238E27FC236}">
-                <a16:creationId xmlns:a16="http://schemas.microsoft.com/office/drawing/2014/main" id="{1304DAAD-A571-195A-29C9-8BA795B1C660}"/>
-              </a:ext>
-            </a:extLst>
-          </p:cNvPr>
-          <p:cNvSpPr>
-            <a:spLocks noGrp="1"/>
-          </p:cNvSpPr>
-          <p:nvPr>
-            <p:ph idx="1"/>
-          </p:nvPr>
-        </p:nvSpPr>
-        <p:spPr/>
-        <p:txBody>
-          <a:bodyPr>
-            <a:normAutofit fontScale="62500" lnSpcReduction="20000"/>
-          </a:bodyPr>
-          <a:lstStyle/>
-          <a:p>
-            <a:r>
-              <a:rPr lang="hu-HU" dirty="0"/>
-              <a:t>Listák létrehozása</a:t>
-            </a:r>
-          </a:p>
-          <a:p>
-            <a:r>
-              <a:rPr lang="hu-HU" dirty="0"/>
-              <a:t>Listák: elérés index alapján</a:t>
-            </a:r>
-          </a:p>
-          <a:p>
-            <a:r>
-              <a:rPr lang="hu-HU" dirty="0"/>
-              <a:t>Listák: aritmetikai operátorok</a:t>
-            </a:r>
-          </a:p>
-          <a:p>
-            <a:r>
-              <a:rPr lang="hu-HU" dirty="0"/>
-              <a:t>Listák </a:t>
-            </a:r>
-            <a:r>
-              <a:rPr lang="hu-HU" dirty="0" err="1"/>
-              <a:t>firssítése</a:t>
-            </a:r>
-            <a:endParaRPr lang="hu-HU" dirty="0"/>
-          </a:p>
-          <a:p>
-            <a:r>
-              <a:rPr lang="hu-HU" dirty="0"/>
-              <a:t>Listák egyéb metódusai</a:t>
-            </a:r>
-          </a:p>
-          <a:p>
-            <a:r>
-              <a:rPr lang="hu-HU" dirty="0"/>
-              <a:t>Objektum Referencia szerinti átadás módosíthatatlan objektumok esetében</a:t>
-            </a:r>
-          </a:p>
-          <a:p>
-            <a:r>
-              <a:rPr lang="hu-HU" dirty="0"/>
-              <a:t>Objektum Referencia szerinti átadás módosítható objektumok esetében</a:t>
-            </a:r>
-          </a:p>
-          <a:p>
-            <a:r>
-              <a:rPr lang="hu-HU" dirty="0"/>
-              <a:t>Listák másolása: a </a:t>
-            </a:r>
-            <a:r>
-              <a:rPr lang="hu-HU" dirty="0" err="1"/>
-              <a:t>copy</a:t>
-            </a:r>
-            <a:r>
-              <a:rPr lang="hu-HU" dirty="0"/>
-              <a:t>() metódus, memóriacímek</a:t>
-            </a:r>
-          </a:p>
-          <a:p>
-            <a:r>
-              <a:rPr lang="hu-HU" dirty="0"/>
-              <a:t>Az in operátor</a:t>
-            </a:r>
-          </a:p>
-          <a:p>
-            <a:r>
-              <a:rPr lang="hu-HU" dirty="0"/>
-              <a:t>A </a:t>
-            </a:r>
-            <a:r>
-              <a:rPr lang="hu-HU" dirty="0" err="1"/>
-              <a:t>for</a:t>
-            </a:r>
-            <a:r>
-              <a:rPr lang="hu-HU" dirty="0"/>
-              <a:t> ciklus, Behúzás alapú szintaxis</a:t>
-            </a:r>
-          </a:p>
-          <a:p>
-            <a:r>
-              <a:rPr lang="hu-HU" dirty="0"/>
-              <a:t>A </a:t>
-            </a:r>
-            <a:r>
-              <a:rPr lang="hu-HU" dirty="0" err="1"/>
-              <a:t>range</a:t>
-            </a:r>
-            <a:r>
-              <a:rPr lang="hu-HU" dirty="0"/>
-              <a:t>() függvény</a:t>
-            </a:r>
-          </a:p>
-          <a:p>
-            <a:r>
-              <a:rPr lang="hu-HU" dirty="0"/>
-              <a:t>A </a:t>
-            </a:r>
-            <a:r>
-              <a:rPr lang="hu-HU" dirty="0" err="1"/>
-              <a:t>range</a:t>
-            </a:r>
-            <a:r>
-              <a:rPr lang="hu-HU" dirty="0"/>
-              <a:t>() függvény paraméter listája</a:t>
-            </a:r>
-          </a:p>
-          <a:p>
-            <a:r>
-              <a:rPr lang="hu-HU" dirty="0"/>
-              <a:t>Listák bejárása </a:t>
-            </a:r>
-            <a:r>
-              <a:rPr lang="hu-HU" dirty="0" err="1"/>
-              <a:t>for</a:t>
-            </a:r>
-            <a:r>
-              <a:rPr lang="hu-HU" dirty="0"/>
-              <a:t> ciklussal</a:t>
-            </a:r>
-          </a:p>
-          <a:p>
             <a:endParaRPr lang="hu-HU" dirty="0"/>
           </a:p>
         </p:txBody>
@@ -7045,7 +7152,7 @@
     </p:spTree>
     <p:extLst>
       <p:ext uri="{BB962C8B-B14F-4D97-AF65-F5344CB8AC3E}">
-        <p14:creationId xmlns:p14="http://schemas.microsoft.com/office/powerpoint/2010/main" val="3964163544"/>
+        <p14:creationId xmlns:p14="http://schemas.microsoft.com/office/powerpoint/2010/main" val="147733182"/>
       </p:ext>
     </p:extLst>
   </p:cSld>
@@ -7074,10 +7181,10 @@
       </p:grpSpPr>
       <p:sp>
         <p:nvSpPr>
-          <p:cNvPr id="2" name="Cím 1">
-            <a:extLst>
-              <a:ext uri="{FF2B5EF4-FFF2-40B4-BE49-F238E27FC236}">
-                <a16:creationId xmlns:a16="http://schemas.microsoft.com/office/drawing/2014/main" id="{67E45071-3E91-3975-958C-43782E39B6B9}"/>
+          <p:cNvPr id="10" name="Cím 9">
+            <a:extLst>
+              <a:ext uri="{FF2B5EF4-FFF2-40B4-BE49-F238E27FC236}">
+                <a16:creationId xmlns:a16="http://schemas.microsoft.com/office/drawing/2014/main" id="{026B303C-F00B-C202-DACD-409846B572C8}"/>
               </a:ext>
             </a:extLst>
           </p:cNvPr>
@@ -7086,46 +7193,6 @@
           </p:cNvSpPr>
           <p:nvPr>
             <p:ph type="title"/>
-          </p:nvPr>
-        </p:nvSpPr>
-        <p:spPr/>
-        <p:txBody>
-          <a:bodyPr/>
-          <a:lstStyle/>
-          <a:p>
-            <a:r>
-              <a:rPr lang="hu-HU" dirty="0" err="1"/>
-              <a:t>if</a:t>
-            </a:r>
-            <a:r>
-              <a:rPr lang="hu-HU" dirty="0"/>
-              <a:t> </a:t>
-            </a:r>
-            <a:r>
-              <a:rPr lang="hu-HU" dirty="0" err="1"/>
-              <a:t>else</a:t>
-            </a:r>
-            <a:r>
-              <a:rPr lang="hu-HU" dirty="0"/>
-              <a:t> vezérlési szerkezet, vezérlési szerkezetek egymásba ágyazása</a:t>
-            </a:r>
-          </a:p>
-        </p:txBody>
-      </p:sp>
-      <p:sp>
-        <p:nvSpPr>
-          <p:cNvPr id="3" name="Tartalom helye 2">
-            <a:extLst>
-              <a:ext uri="{FF2B5EF4-FFF2-40B4-BE49-F238E27FC236}">
-                <a16:creationId xmlns:a16="http://schemas.microsoft.com/office/drawing/2014/main" id="{0F52A367-7627-7B81-0E00-66AB83DC996D}"/>
-              </a:ext>
-            </a:extLst>
-          </p:cNvPr>
-          <p:cNvSpPr>
-            <a:spLocks noGrp="1"/>
-          </p:cNvSpPr>
-          <p:nvPr>
-            <p:ph type="body" idx="1"/>
           </p:nvPr>
         </p:nvSpPr>
         <p:spPr/>
@@ -7135,6 +7202,167 @@
           </a:bodyPr>
           <a:lstStyle/>
           <a:p>
+            <a:r>
+              <a:rPr lang="hu-HU" dirty="0"/>
+              <a:t>A </a:t>
+            </a:r>
+            <a:r>
+              <a:rPr lang="hu-HU" dirty="0" err="1"/>
+              <a:t>list</a:t>
+            </a:r>
+            <a:r>
+              <a:rPr lang="hu-HU" dirty="0"/>
+              <a:t> konténer típus, ciklusok</a:t>
+            </a:r>
+          </a:p>
+        </p:txBody>
+      </p:sp>
+      <p:sp>
+        <p:nvSpPr>
+          <p:cNvPr id="11" name="Tartalom helye 10">
+            <a:extLst>
+              <a:ext uri="{FF2B5EF4-FFF2-40B4-BE49-F238E27FC236}">
+                <a16:creationId xmlns:a16="http://schemas.microsoft.com/office/drawing/2014/main" id="{1304DAAD-A571-195A-29C9-8BA795B1C660}"/>
+              </a:ext>
+            </a:extLst>
+          </p:cNvPr>
+          <p:cNvSpPr>
+            <a:spLocks noGrp="1"/>
+          </p:cNvSpPr>
+          <p:nvPr>
+            <p:ph idx="1"/>
+          </p:nvPr>
+        </p:nvSpPr>
+        <p:spPr/>
+        <p:txBody>
+          <a:bodyPr>
+            <a:normAutofit fontScale="62500" lnSpcReduction="20000"/>
+          </a:bodyPr>
+          <a:lstStyle/>
+          <a:p>
+            <a:r>
+              <a:rPr lang="hu-HU" dirty="0"/>
+              <a:t>Listák létrehozása</a:t>
+            </a:r>
+          </a:p>
+          <a:p>
+            <a:r>
+              <a:rPr lang="hu-HU" dirty="0"/>
+              <a:t>Listák: elérés index alapján</a:t>
+            </a:r>
+          </a:p>
+          <a:p>
+            <a:r>
+              <a:rPr lang="hu-HU" dirty="0"/>
+              <a:t>Listák: aritmetikai operátorok</a:t>
+            </a:r>
+          </a:p>
+          <a:p>
+            <a:r>
+              <a:rPr lang="hu-HU" dirty="0"/>
+              <a:t>Listák </a:t>
+            </a:r>
+            <a:r>
+              <a:rPr lang="hu-HU" dirty="0" err="1"/>
+              <a:t>firssítése</a:t>
+            </a:r>
+            <a:endParaRPr lang="hu-HU" dirty="0"/>
+          </a:p>
+          <a:p>
+            <a:r>
+              <a:rPr lang="hu-HU" dirty="0"/>
+              <a:t>Listák egyéb metódusai</a:t>
+            </a:r>
+          </a:p>
+          <a:p>
+            <a:r>
+              <a:rPr lang="hu-HU" dirty="0"/>
+              <a:t>Objektum Referencia szerinti átadás módosíthatatlan objektumok esetében</a:t>
+            </a:r>
+          </a:p>
+          <a:p>
+            <a:r>
+              <a:rPr lang="hu-HU" dirty="0"/>
+              <a:t>Objektum Referencia szerinti átadás módosítható objektumok esetében</a:t>
+            </a:r>
+          </a:p>
+          <a:p>
+            <a:r>
+              <a:rPr lang="hu-HU" dirty="0"/>
+              <a:t>Listák másolása: a </a:t>
+            </a:r>
+            <a:r>
+              <a:rPr lang="hu-HU" dirty="0" err="1"/>
+              <a:t>copy</a:t>
+            </a:r>
+            <a:r>
+              <a:rPr lang="hu-HU" dirty="0"/>
+              <a:t>() metódus, memóriacímek</a:t>
+            </a:r>
+          </a:p>
+          <a:p>
+            <a:r>
+              <a:rPr lang="hu-HU" dirty="0"/>
+              <a:t>Az in operátor</a:t>
+            </a:r>
+          </a:p>
+          <a:p>
+            <a:r>
+              <a:rPr lang="hu-HU" dirty="0"/>
+              <a:t>A </a:t>
+            </a:r>
+            <a:r>
+              <a:rPr lang="hu-HU" dirty="0" err="1"/>
+              <a:t>for</a:t>
+            </a:r>
+            <a:r>
+              <a:rPr lang="hu-HU" dirty="0"/>
+              <a:t> ciklus, Behúzás alapú szintaxis</a:t>
+            </a:r>
+          </a:p>
+          <a:p>
+            <a:r>
+              <a:rPr lang="hu-HU" dirty="0"/>
+              <a:t>A </a:t>
+            </a:r>
+            <a:r>
+              <a:rPr lang="hu-HU" dirty="0" err="1"/>
+              <a:t>range</a:t>
+            </a:r>
+            <a:r>
+              <a:rPr lang="hu-HU" dirty="0"/>
+              <a:t>() függvény</a:t>
+            </a:r>
+          </a:p>
+          <a:p>
+            <a:r>
+              <a:rPr lang="hu-HU" dirty="0"/>
+              <a:t>A </a:t>
+            </a:r>
+            <a:r>
+              <a:rPr lang="hu-HU" dirty="0" err="1"/>
+              <a:t>range</a:t>
+            </a:r>
+            <a:r>
+              <a:rPr lang="hu-HU" dirty="0"/>
+              <a:t>() függvény paraméter listája</a:t>
+            </a:r>
+          </a:p>
+          <a:p>
+            <a:r>
+              <a:rPr lang="hu-HU" dirty="0"/>
+              <a:t>Listák bejárása </a:t>
+            </a:r>
+            <a:r>
+              <a:rPr lang="hu-HU" dirty="0" err="1"/>
+              <a:t>for</a:t>
+            </a:r>
+            <a:r>
+              <a:rPr lang="hu-HU" dirty="0"/>
+              <a:t> ciklussal</a:t>
+            </a:r>
+          </a:p>
+          <a:p>
             <a:endParaRPr lang="hu-HU" dirty="0"/>
           </a:p>
         </p:txBody>
@@ -7142,7 +7370,7 @@
     </p:spTree>
     <p:extLst>
       <p:ext uri="{BB962C8B-B14F-4D97-AF65-F5344CB8AC3E}">
-        <p14:creationId xmlns:p14="http://schemas.microsoft.com/office/powerpoint/2010/main" val="1626009815"/>
+        <p14:creationId xmlns:p14="http://schemas.microsoft.com/office/powerpoint/2010/main" val="3964163544"/>
       </p:ext>
     </p:extLst>
   </p:cSld>

--- a/Python alapok.pptx
+++ b/Python alapok.pptx
@@ -9,28 +9,27 @@
     <p:sldId id="257" r:id="rId3"/>
     <p:sldId id="258" r:id="rId4"/>
     <p:sldId id="270" r:id="rId5"/>
-    <p:sldId id="281" r:id="rId6"/>
-    <p:sldId id="259" r:id="rId7"/>
-    <p:sldId id="271" r:id="rId8"/>
-    <p:sldId id="260" r:id="rId9"/>
-    <p:sldId id="272" r:id="rId10"/>
-    <p:sldId id="261" r:id="rId11"/>
-    <p:sldId id="273" r:id="rId12"/>
-    <p:sldId id="262" r:id="rId13"/>
-    <p:sldId id="274" r:id="rId14"/>
-    <p:sldId id="263" r:id="rId15"/>
-    <p:sldId id="275" r:id="rId16"/>
-    <p:sldId id="264" r:id="rId17"/>
-    <p:sldId id="276" r:id="rId18"/>
-    <p:sldId id="265" r:id="rId19"/>
-    <p:sldId id="277" r:id="rId20"/>
-    <p:sldId id="266" r:id="rId21"/>
-    <p:sldId id="278" r:id="rId22"/>
-    <p:sldId id="267" r:id="rId23"/>
-    <p:sldId id="279" r:id="rId24"/>
-    <p:sldId id="268" r:id="rId25"/>
-    <p:sldId id="280" r:id="rId26"/>
-    <p:sldId id="269" r:id="rId27"/>
+    <p:sldId id="259" r:id="rId6"/>
+    <p:sldId id="271" r:id="rId7"/>
+    <p:sldId id="260" r:id="rId8"/>
+    <p:sldId id="272" r:id="rId9"/>
+    <p:sldId id="261" r:id="rId10"/>
+    <p:sldId id="273" r:id="rId11"/>
+    <p:sldId id="262" r:id="rId12"/>
+    <p:sldId id="274" r:id="rId13"/>
+    <p:sldId id="263" r:id="rId14"/>
+    <p:sldId id="275" r:id="rId15"/>
+    <p:sldId id="264" r:id="rId16"/>
+    <p:sldId id="276" r:id="rId17"/>
+    <p:sldId id="265" r:id="rId18"/>
+    <p:sldId id="277" r:id="rId19"/>
+    <p:sldId id="266" r:id="rId20"/>
+    <p:sldId id="278" r:id="rId21"/>
+    <p:sldId id="267" r:id="rId22"/>
+    <p:sldId id="279" r:id="rId23"/>
+    <p:sldId id="268" r:id="rId24"/>
+    <p:sldId id="280" r:id="rId25"/>
+    <p:sldId id="269" r:id="rId26"/>
   </p:sldIdLst>
   <p:sldSz cx="12192000" cy="6858000"/>
   <p:notesSz cx="6858000" cy="9144000"/>
@@ -198,7 +197,7 @@
       <a:p>
         <a:r>
           <a:rPr lang="hu-HU"/>
-          <a:t>Minden modulnak lesz  egy külön címdiája</a:t>
+          <a:t>Minden modulnak lesz  egy külön címdiája. Ez lesz a modul bevezetőnél mutatva.</a:t>
         </a:r>
       </a:p>
     </p188:txBody>
@@ -219,28 +218,7 @@
       <a:p>
         <a:r>
           <a:rPr lang="hu-HU"/>
-          <a:t>Ez pedig hogy az adott modul milyen leckéket tartalmaz</a:t>
-        </a:r>
-      </a:p>
-    </p188:txBody>
-  </p188:cm>
-</p188:cmLst>
-</file>
-
-<file path=ppt/comments/modernComment_119_42E1E778.xml><?xml version="1.0" encoding="utf-8"?>
-<p188:cmLst xmlns:a="http://schemas.openxmlformats.org/drawingml/2006/main" xmlns:r="http://schemas.openxmlformats.org/officeDocument/2006/relationships" xmlns:p188="http://schemas.microsoft.com/office/powerpoint/2018/8/main">
-  <p188:cm id="{A950DFC0-03B1-4478-BE72-653665BB09C8}" authorId="{9373AF2F-D106-FDB6-8752-779A83C8F52E}" created="2023-06-27T09:54:33.878">
-    <pc:sldMkLst xmlns:pc="http://schemas.microsoft.com/office/powerpoint/2013/main/command">
-      <pc:docMk/>
-      <pc:sldMk cId="1122101112" sldId="281"/>
-    </pc:sldMkLst>
-    <p188:txBody>
-      <a:bodyPr/>
-      <a:lstStyle/>
-      <a:p>
-        <a:r>
-          <a:rPr lang="hu-HU"/>
-          <a:t>Minden leckének szintén lesz egy diája, ebből cask ez az egyet készítettem el példának</a:t>
+          <a:t>Ez pedig hogy az adott modul milyen leckéket tartalmaz. Ez is a modul bevezetőnél lesz mutatva.</a:t>
         </a:r>
       </a:p>
     </p188:txBody>
@@ -395,7 +373,7 @@
           <a:p>
             <a:fld id="{75E5F654-D2C6-4A32-849D-6BE925CD676B}" type="datetimeFigureOut">
               <a:rPr lang="hu-HU" smtClean="0"/>
-              <a:t>2023. 06. 27.</a:t>
+              <a:t>2023. 08. 15.</a:t>
             </a:fld>
             <a:endParaRPr lang="hu-HU"/>
           </a:p>
@@ -593,7 +571,7 @@
           <a:p>
             <a:fld id="{75E5F654-D2C6-4A32-849D-6BE925CD676B}" type="datetimeFigureOut">
               <a:rPr lang="hu-HU" smtClean="0"/>
-              <a:t>2023. 06. 27.</a:t>
+              <a:t>2023. 08. 15.</a:t>
             </a:fld>
             <a:endParaRPr lang="hu-HU"/>
           </a:p>
@@ -801,7 +779,7 @@
           <a:p>
             <a:fld id="{75E5F654-D2C6-4A32-849D-6BE925CD676B}" type="datetimeFigureOut">
               <a:rPr lang="hu-HU" smtClean="0"/>
-              <a:t>2023. 06. 27.</a:t>
+              <a:t>2023. 08. 15.</a:t>
             </a:fld>
             <a:endParaRPr lang="hu-HU"/>
           </a:p>
@@ -999,7 +977,7 @@
           <a:p>
             <a:fld id="{75E5F654-D2C6-4A32-849D-6BE925CD676B}" type="datetimeFigureOut">
               <a:rPr lang="hu-HU" smtClean="0"/>
-              <a:t>2023. 06. 27.</a:t>
+              <a:t>2023. 08. 15.</a:t>
             </a:fld>
             <a:endParaRPr lang="hu-HU"/>
           </a:p>
@@ -1274,7 +1252,7 @@
           <a:p>
             <a:fld id="{75E5F654-D2C6-4A32-849D-6BE925CD676B}" type="datetimeFigureOut">
               <a:rPr lang="hu-HU" smtClean="0"/>
-              <a:t>2023. 06. 27.</a:t>
+              <a:t>2023. 08. 15.</a:t>
             </a:fld>
             <a:endParaRPr lang="hu-HU"/>
           </a:p>
@@ -1539,7 +1517,7 @@
           <a:p>
             <a:fld id="{75E5F654-D2C6-4A32-849D-6BE925CD676B}" type="datetimeFigureOut">
               <a:rPr lang="hu-HU" smtClean="0"/>
-              <a:t>2023. 06. 27.</a:t>
+              <a:t>2023. 08. 15.</a:t>
             </a:fld>
             <a:endParaRPr lang="hu-HU"/>
           </a:p>
@@ -1951,7 +1929,7 @@
           <a:p>
             <a:fld id="{75E5F654-D2C6-4A32-849D-6BE925CD676B}" type="datetimeFigureOut">
               <a:rPr lang="hu-HU" smtClean="0"/>
-              <a:t>2023. 06. 27.</a:t>
+              <a:t>2023. 08. 15.</a:t>
             </a:fld>
             <a:endParaRPr lang="hu-HU"/>
           </a:p>
@@ -2092,7 +2070,7 @@
           <a:p>
             <a:fld id="{75E5F654-D2C6-4A32-849D-6BE925CD676B}" type="datetimeFigureOut">
               <a:rPr lang="hu-HU" smtClean="0"/>
-              <a:t>2023. 06. 27.</a:t>
+              <a:t>2023. 08. 15.</a:t>
             </a:fld>
             <a:endParaRPr lang="hu-HU"/>
           </a:p>
@@ -2205,7 +2183,7 @@
           <a:p>
             <a:fld id="{75E5F654-D2C6-4A32-849D-6BE925CD676B}" type="datetimeFigureOut">
               <a:rPr lang="hu-HU" smtClean="0"/>
-              <a:t>2023. 06. 27.</a:t>
+              <a:t>2023. 08. 15.</a:t>
             </a:fld>
             <a:endParaRPr lang="hu-HU"/>
           </a:p>
@@ -2516,7 +2494,7 @@
           <a:p>
             <a:fld id="{75E5F654-D2C6-4A32-849D-6BE925CD676B}" type="datetimeFigureOut">
               <a:rPr lang="hu-HU" smtClean="0"/>
-              <a:t>2023. 06. 27.</a:t>
+              <a:t>2023. 08. 15.</a:t>
             </a:fld>
             <a:endParaRPr lang="hu-HU"/>
           </a:p>
@@ -2804,7 +2782,7 @@
           <a:p>
             <a:fld id="{75E5F654-D2C6-4A32-849D-6BE925CD676B}" type="datetimeFigureOut">
               <a:rPr lang="hu-HU" smtClean="0"/>
-              <a:t>2023. 06. 27.</a:t>
+              <a:t>2023. 08. 15.</a:t>
             </a:fld>
             <a:endParaRPr lang="hu-HU"/>
           </a:p>
@@ -3045,7 +3023,7 @@
           <a:p>
             <a:fld id="{75E5F654-D2C6-4A32-849D-6BE925CD676B}" type="datetimeFigureOut">
               <a:rPr lang="hu-HU" smtClean="0"/>
-              <a:t>2023. 06. 27.</a:t>
+              <a:t>2023. 08. 15.</a:t>
             </a:fld>
             <a:endParaRPr lang="hu-HU"/>
           </a:p>
@@ -3552,10 +3530,10 @@
       </p:grpSpPr>
       <p:sp>
         <p:nvSpPr>
-          <p:cNvPr id="2" name="Cím 1">
-            <a:extLst>
-              <a:ext uri="{FF2B5EF4-FFF2-40B4-BE49-F238E27FC236}">
-                <a16:creationId xmlns:a16="http://schemas.microsoft.com/office/drawing/2014/main" id="{67E45071-3E91-3975-958C-43782E39B6B9}"/>
+          <p:cNvPr id="10" name="Cím 9">
+            <a:extLst>
+              <a:ext uri="{FF2B5EF4-FFF2-40B4-BE49-F238E27FC236}">
+                <a16:creationId xmlns:a16="http://schemas.microsoft.com/office/drawing/2014/main" id="{026B303C-F00B-C202-DACD-409846B572C8}"/>
               </a:ext>
             </a:extLst>
           </p:cNvPr>
@@ -3564,46 +3542,6 @@
           </p:cNvSpPr>
           <p:nvPr>
             <p:ph type="title"/>
-          </p:nvPr>
-        </p:nvSpPr>
-        <p:spPr/>
-        <p:txBody>
-          <a:bodyPr/>
-          <a:lstStyle/>
-          <a:p>
-            <a:r>
-              <a:rPr lang="hu-HU" dirty="0" err="1"/>
-              <a:t>if</a:t>
-            </a:r>
-            <a:r>
-              <a:rPr lang="hu-HU" dirty="0"/>
-              <a:t> </a:t>
-            </a:r>
-            <a:r>
-              <a:rPr lang="hu-HU" dirty="0" err="1"/>
-              <a:t>else</a:t>
-            </a:r>
-            <a:r>
-              <a:rPr lang="hu-HU" dirty="0"/>
-              <a:t> vezérlési szerkezet, vezérlési szerkezetek egymásba ágyazása</a:t>
-            </a:r>
-          </a:p>
-        </p:txBody>
-      </p:sp>
-      <p:sp>
-        <p:nvSpPr>
-          <p:cNvPr id="3" name="Tartalom helye 2">
-            <a:extLst>
-              <a:ext uri="{FF2B5EF4-FFF2-40B4-BE49-F238E27FC236}">
-                <a16:creationId xmlns:a16="http://schemas.microsoft.com/office/drawing/2014/main" id="{0F52A367-7627-7B81-0E00-66AB83DC996D}"/>
-              </a:ext>
-            </a:extLst>
-          </p:cNvPr>
-          <p:cNvSpPr>
-            <a:spLocks noGrp="1"/>
-          </p:cNvSpPr>
-          <p:nvPr>
-            <p:ph type="body" idx="1"/>
           </p:nvPr>
         </p:nvSpPr>
         <p:spPr/>
@@ -3613,6 +3551,206 @@
           </a:bodyPr>
           <a:lstStyle/>
           <a:p>
+            <a:r>
+              <a:rPr lang="hu-HU" dirty="0"/>
+              <a:t>További vezérlési szerkezetek</a:t>
+            </a:r>
+          </a:p>
+        </p:txBody>
+      </p:sp>
+      <p:sp>
+        <p:nvSpPr>
+          <p:cNvPr id="11" name="Tartalom helye 10">
+            <a:extLst>
+              <a:ext uri="{FF2B5EF4-FFF2-40B4-BE49-F238E27FC236}">
+                <a16:creationId xmlns:a16="http://schemas.microsoft.com/office/drawing/2014/main" id="{1304DAAD-A571-195A-29C9-8BA795B1C660}"/>
+              </a:ext>
+            </a:extLst>
+          </p:cNvPr>
+          <p:cNvSpPr>
+            <a:spLocks noGrp="1"/>
+          </p:cNvSpPr>
+          <p:nvPr>
+            <p:ph idx="1"/>
+          </p:nvPr>
+        </p:nvSpPr>
+        <p:spPr/>
+        <p:txBody>
+          <a:bodyPr>
+            <a:normAutofit fontScale="62500" lnSpcReduction="20000"/>
+          </a:bodyPr>
+          <a:lstStyle/>
+          <a:p>
+            <a:r>
+              <a:rPr lang="hu-HU" dirty="0"/>
+              <a:t>A </a:t>
+            </a:r>
+            <a:r>
+              <a:rPr lang="hu-HU" dirty="0" err="1"/>
+              <a:t>bool</a:t>
+            </a:r>
+            <a:r>
+              <a:rPr lang="hu-HU" dirty="0"/>
+              <a:t>, logikai típus</a:t>
+            </a:r>
+          </a:p>
+          <a:p>
+            <a:r>
+              <a:rPr lang="hu-HU" dirty="0"/>
+              <a:t>Feltételes szerkezet: </a:t>
+            </a:r>
+            <a:r>
+              <a:rPr lang="hu-HU" dirty="0" err="1"/>
+              <a:t>if</a:t>
+            </a:r>
+            <a:r>
+              <a:rPr lang="hu-HU" dirty="0"/>
+              <a:t>, </a:t>
+            </a:r>
+            <a:r>
+              <a:rPr lang="hu-HU" dirty="0" err="1"/>
+              <a:t>else</a:t>
+            </a:r>
+            <a:endParaRPr lang="hu-HU" dirty="0"/>
+          </a:p>
+          <a:p>
+            <a:r>
+              <a:rPr lang="hu-HU" dirty="0"/>
+              <a:t>Az </a:t>
+            </a:r>
+            <a:r>
+              <a:rPr lang="hu-HU" dirty="0" err="1"/>
+              <a:t>elif</a:t>
+            </a:r>
+            <a:r>
+              <a:rPr lang="hu-HU" dirty="0"/>
+              <a:t> ág</a:t>
+            </a:r>
+          </a:p>
+          <a:p>
+            <a:r>
+              <a:rPr lang="hu-HU" dirty="0"/>
+              <a:t>Ciklusok és elágazások együttes használata</a:t>
+            </a:r>
+          </a:p>
+          <a:p>
+            <a:r>
+              <a:rPr lang="hu-HU" dirty="0"/>
+              <a:t>Összetett feltételek, az and </a:t>
+            </a:r>
+            <a:r>
+              <a:rPr lang="hu-HU" dirty="0" err="1"/>
+              <a:t>ooperátor</a:t>
+            </a:r>
+            <a:endParaRPr lang="hu-HU" dirty="0"/>
+          </a:p>
+          <a:p>
+            <a:r>
+              <a:rPr lang="hu-HU" dirty="0"/>
+              <a:t>Összetett feltételek, az </a:t>
+            </a:r>
+            <a:r>
+              <a:rPr lang="hu-HU" dirty="0" err="1"/>
+              <a:t>or</a:t>
+            </a:r>
+            <a:r>
+              <a:rPr lang="hu-HU" dirty="0"/>
+              <a:t> </a:t>
+            </a:r>
+            <a:r>
+              <a:rPr lang="hu-HU" dirty="0" err="1"/>
+              <a:t>ooperátor</a:t>
+            </a:r>
+            <a:endParaRPr lang="hu-HU" dirty="0"/>
+          </a:p>
+          <a:p>
+            <a:r>
+              <a:rPr lang="hu-HU" dirty="0"/>
+              <a:t>Az and és </a:t>
+            </a:r>
+            <a:r>
+              <a:rPr lang="hu-HU" dirty="0" err="1"/>
+              <a:t>or</a:t>
+            </a:r>
+            <a:r>
+              <a:rPr lang="hu-HU" dirty="0"/>
+              <a:t> </a:t>
+            </a:r>
+            <a:r>
+              <a:rPr lang="hu-HU" dirty="0" err="1"/>
+              <a:t>opertorok</a:t>
+            </a:r>
+            <a:r>
+              <a:rPr lang="hu-HU" dirty="0"/>
+              <a:t> együttes használata, </a:t>
+            </a:r>
+            <a:r>
+              <a:rPr lang="hu-HU" dirty="0" err="1"/>
+              <a:t>precedencia</a:t>
+            </a:r>
+            <a:endParaRPr lang="hu-HU" dirty="0"/>
+          </a:p>
+          <a:p>
+            <a:r>
+              <a:rPr lang="hu-HU" dirty="0"/>
+              <a:t>Az is operátor</a:t>
+            </a:r>
+          </a:p>
+          <a:p>
+            <a:r>
+              <a:rPr lang="hu-HU" dirty="0"/>
+              <a:t>A </a:t>
+            </a:r>
+            <a:r>
+              <a:rPr lang="hu-HU" dirty="0" err="1"/>
+              <a:t>break</a:t>
+            </a:r>
+            <a:r>
+              <a:rPr lang="hu-HU" dirty="0"/>
+              <a:t> utasítás</a:t>
+            </a:r>
+          </a:p>
+          <a:p>
+            <a:r>
+              <a:rPr lang="hu-HU" dirty="0"/>
+              <a:t>A </a:t>
+            </a:r>
+            <a:r>
+              <a:rPr lang="hu-HU" dirty="0" err="1"/>
+              <a:t>continue</a:t>
+            </a:r>
+            <a:r>
+              <a:rPr lang="hu-HU" dirty="0"/>
+              <a:t> utasítás</a:t>
+            </a:r>
+          </a:p>
+          <a:p>
+            <a:r>
+              <a:rPr lang="hu-HU" dirty="0"/>
+              <a:t>Mátrixok</a:t>
+            </a:r>
+          </a:p>
+          <a:p>
+            <a:r>
+              <a:rPr lang="hu-HU" dirty="0"/>
+              <a:t>A </a:t>
+            </a:r>
+            <a:r>
+              <a:rPr lang="hu-HU" dirty="0" err="1"/>
+              <a:t>while</a:t>
+            </a:r>
+            <a:r>
+              <a:rPr lang="hu-HU" dirty="0"/>
+              <a:t> ciklus</a:t>
+            </a:r>
+          </a:p>
+          <a:p>
+            <a:r>
+              <a:rPr lang="hu-HU" dirty="0"/>
+              <a:t>Végtelen ciklusok</a:t>
+            </a:r>
+          </a:p>
+          <a:p>
             <a:endParaRPr lang="hu-HU" dirty="0"/>
           </a:p>
         </p:txBody>
@@ -3620,7 +3758,7 @@
     </p:spTree>
     <p:extLst>
       <p:ext uri="{BB962C8B-B14F-4D97-AF65-F5344CB8AC3E}">
-        <p14:creationId xmlns:p14="http://schemas.microsoft.com/office/powerpoint/2010/main" val="1626009815"/>
+        <p14:creationId xmlns:p14="http://schemas.microsoft.com/office/powerpoint/2010/main" val="1049711745"/>
       </p:ext>
     </p:extLst>
   </p:cSld>
@@ -3649,10 +3787,10 @@
       </p:grpSpPr>
       <p:sp>
         <p:nvSpPr>
-          <p:cNvPr id="10" name="Cím 9">
-            <a:extLst>
-              <a:ext uri="{FF2B5EF4-FFF2-40B4-BE49-F238E27FC236}">
-                <a16:creationId xmlns:a16="http://schemas.microsoft.com/office/drawing/2014/main" id="{026B303C-F00B-C202-DACD-409846B572C8}"/>
+          <p:cNvPr id="2" name="Cím 1">
+            <a:extLst>
+              <a:ext uri="{FF2B5EF4-FFF2-40B4-BE49-F238E27FC236}">
+                <a16:creationId xmlns:a16="http://schemas.microsoft.com/office/drawing/2014/main" id="{67E45071-3E91-3975-958C-43782E39B6B9}"/>
               </a:ext>
             </a:extLst>
           </p:cNvPr>
@@ -3661,6 +3799,34 @@
           </p:cNvSpPr>
           <p:nvPr>
             <p:ph type="title"/>
+          </p:nvPr>
+        </p:nvSpPr>
+        <p:spPr/>
+        <p:txBody>
+          <a:bodyPr/>
+          <a:lstStyle/>
+          <a:p>
+            <a:r>
+              <a:rPr lang="hu-HU" dirty="0"/>
+              <a:t>Listák kezelésének haladó technikái</a:t>
+            </a:r>
+          </a:p>
+        </p:txBody>
+      </p:sp>
+      <p:sp>
+        <p:nvSpPr>
+          <p:cNvPr id="3" name="Tartalom helye 2">
+            <a:extLst>
+              <a:ext uri="{FF2B5EF4-FFF2-40B4-BE49-F238E27FC236}">
+                <a16:creationId xmlns:a16="http://schemas.microsoft.com/office/drawing/2014/main" id="{0F52A367-7627-7B81-0E00-66AB83DC996D}"/>
+              </a:ext>
+            </a:extLst>
+          </p:cNvPr>
+          <p:cNvSpPr>
+            <a:spLocks noGrp="1"/>
+          </p:cNvSpPr>
+          <p:nvPr>
+            <p:ph type="body" idx="1"/>
           </p:nvPr>
         </p:nvSpPr>
         <p:spPr/>
@@ -3670,218 +3836,6 @@
           </a:bodyPr>
           <a:lstStyle/>
           <a:p>
-            <a:r>
-              <a:rPr lang="hu-HU" dirty="0" err="1"/>
-              <a:t>if</a:t>
-            </a:r>
-            <a:r>
-              <a:rPr lang="hu-HU" dirty="0"/>
-              <a:t> </a:t>
-            </a:r>
-            <a:r>
-              <a:rPr lang="hu-HU" dirty="0" err="1"/>
-              <a:t>else</a:t>
-            </a:r>
-            <a:r>
-              <a:rPr lang="hu-HU" dirty="0"/>
-              <a:t> vezérlési szerkezet, vezérlési szerkezetek egymásba ágyazása</a:t>
-            </a:r>
-          </a:p>
-        </p:txBody>
-      </p:sp>
-      <p:sp>
-        <p:nvSpPr>
-          <p:cNvPr id="11" name="Tartalom helye 10">
-            <a:extLst>
-              <a:ext uri="{FF2B5EF4-FFF2-40B4-BE49-F238E27FC236}">
-                <a16:creationId xmlns:a16="http://schemas.microsoft.com/office/drawing/2014/main" id="{1304DAAD-A571-195A-29C9-8BA795B1C660}"/>
-              </a:ext>
-            </a:extLst>
-          </p:cNvPr>
-          <p:cNvSpPr>
-            <a:spLocks noGrp="1"/>
-          </p:cNvSpPr>
-          <p:nvPr>
-            <p:ph idx="1"/>
-          </p:nvPr>
-        </p:nvSpPr>
-        <p:spPr/>
-        <p:txBody>
-          <a:bodyPr>
-            <a:normAutofit fontScale="62500" lnSpcReduction="20000"/>
-          </a:bodyPr>
-          <a:lstStyle/>
-          <a:p>
-            <a:r>
-              <a:rPr lang="hu-HU" dirty="0"/>
-              <a:t>A </a:t>
-            </a:r>
-            <a:r>
-              <a:rPr lang="hu-HU" dirty="0" err="1"/>
-              <a:t>bool</a:t>
-            </a:r>
-            <a:r>
-              <a:rPr lang="hu-HU" dirty="0"/>
-              <a:t>, logikai típus</a:t>
-            </a:r>
-          </a:p>
-          <a:p>
-            <a:r>
-              <a:rPr lang="hu-HU" dirty="0"/>
-              <a:t>Feltételes szerkezet: </a:t>
-            </a:r>
-            <a:r>
-              <a:rPr lang="hu-HU" dirty="0" err="1"/>
-              <a:t>if</a:t>
-            </a:r>
-            <a:r>
-              <a:rPr lang="hu-HU" dirty="0"/>
-              <a:t>, </a:t>
-            </a:r>
-            <a:r>
-              <a:rPr lang="hu-HU" dirty="0" err="1"/>
-              <a:t>else</a:t>
-            </a:r>
-            <a:endParaRPr lang="hu-HU" dirty="0"/>
-          </a:p>
-          <a:p>
-            <a:r>
-              <a:rPr lang="hu-HU" dirty="0"/>
-              <a:t>Az </a:t>
-            </a:r>
-            <a:r>
-              <a:rPr lang="hu-HU" dirty="0" err="1"/>
-              <a:t>elif</a:t>
-            </a:r>
-            <a:r>
-              <a:rPr lang="hu-HU" dirty="0"/>
-              <a:t> ág</a:t>
-            </a:r>
-          </a:p>
-          <a:p>
-            <a:r>
-              <a:rPr lang="hu-HU" dirty="0"/>
-              <a:t>Ciklusok és elágazások együttes használata</a:t>
-            </a:r>
-          </a:p>
-          <a:p>
-            <a:r>
-              <a:rPr lang="hu-HU" dirty="0"/>
-              <a:t>Összetett feltételek, az and </a:t>
-            </a:r>
-            <a:r>
-              <a:rPr lang="hu-HU" dirty="0" err="1"/>
-              <a:t>ooperátor</a:t>
-            </a:r>
-            <a:endParaRPr lang="hu-HU" dirty="0"/>
-          </a:p>
-          <a:p>
-            <a:r>
-              <a:rPr lang="hu-HU" dirty="0"/>
-              <a:t>Összetett feltételek, az </a:t>
-            </a:r>
-            <a:r>
-              <a:rPr lang="hu-HU" dirty="0" err="1"/>
-              <a:t>or</a:t>
-            </a:r>
-            <a:r>
-              <a:rPr lang="hu-HU" dirty="0"/>
-              <a:t> </a:t>
-            </a:r>
-            <a:r>
-              <a:rPr lang="hu-HU" dirty="0" err="1"/>
-              <a:t>ooperátor</a:t>
-            </a:r>
-            <a:endParaRPr lang="hu-HU" dirty="0"/>
-          </a:p>
-          <a:p>
-            <a:r>
-              <a:rPr lang="hu-HU" dirty="0"/>
-              <a:t>Az and és </a:t>
-            </a:r>
-            <a:r>
-              <a:rPr lang="hu-HU" dirty="0" err="1"/>
-              <a:t>or</a:t>
-            </a:r>
-            <a:r>
-              <a:rPr lang="hu-HU" dirty="0"/>
-              <a:t> </a:t>
-            </a:r>
-            <a:r>
-              <a:rPr lang="hu-HU" dirty="0" err="1"/>
-              <a:t>opertorok</a:t>
-            </a:r>
-            <a:r>
-              <a:rPr lang="hu-HU" dirty="0"/>
-              <a:t> együttes használata, </a:t>
-            </a:r>
-            <a:r>
-              <a:rPr lang="hu-HU" dirty="0" err="1"/>
-              <a:t>precedencia</a:t>
-            </a:r>
-            <a:endParaRPr lang="hu-HU" dirty="0"/>
-          </a:p>
-          <a:p>
-            <a:r>
-              <a:rPr lang="hu-HU" dirty="0"/>
-              <a:t>Az is operátor</a:t>
-            </a:r>
-          </a:p>
-          <a:p>
-            <a:r>
-              <a:rPr lang="hu-HU" dirty="0"/>
-              <a:t>A </a:t>
-            </a:r>
-            <a:r>
-              <a:rPr lang="hu-HU" dirty="0" err="1"/>
-              <a:t>break</a:t>
-            </a:r>
-            <a:r>
-              <a:rPr lang="hu-HU" dirty="0"/>
-              <a:t> utasítás</a:t>
-            </a:r>
-          </a:p>
-          <a:p>
-            <a:r>
-              <a:rPr lang="hu-HU" dirty="0"/>
-              <a:t>A </a:t>
-            </a:r>
-            <a:r>
-              <a:rPr lang="hu-HU" dirty="0" err="1"/>
-              <a:t>continue</a:t>
-            </a:r>
-            <a:r>
-              <a:rPr lang="hu-HU" dirty="0"/>
-              <a:t> utasítás</a:t>
-            </a:r>
-          </a:p>
-          <a:p>
-            <a:r>
-              <a:rPr lang="hu-HU" dirty="0"/>
-              <a:t>Mátrixok</a:t>
-            </a:r>
-          </a:p>
-          <a:p>
-            <a:r>
-              <a:rPr lang="hu-HU" dirty="0"/>
-              <a:t>A </a:t>
-            </a:r>
-            <a:r>
-              <a:rPr lang="hu-HU" dirty="0" err="1"/>
-              <a:t>while</a:t>
-            </a:r>
-            <a:r>
-              <a:rPr lang="hu-HU" dirty="0"/>
-              <a:t> ciklus</a:t>
-            </a:r>
-          </a:p>
-          <a:p>
-            <a:r>
-              <a:rPr lang="hu-HU" dirty="0"/>
-              <a:t>Végtelen ciklusok</a:t>
-            </a:r>
-          </a:p>
-          <a:p>
             <a:endParaRPr lang="hu-HU" dirty="0"/>
           </a:p>
         </p:txBody>
@@ -3889,7 +3843,7 @@
     </p:spTree>
     <p:extLst>
       <p:ext uri="{BB962C8B-B14F-4D97-AF65-F5344CB8AC3E}">
-        <p14:creationId xmlns:p14="http://schemas.microsoft.com/office/powerpoint/2010/main" val="1049711745"/>
+        <p14:creationId xmlns:p14="http://schemas.microsoft.com/office/powerpoint/2010/main" val="520139568"/>
       </p:ext>
     </p:extLst>
   </p:cSld>
@@ -3918,10 +3872,10 @@
       </p:grpSpPr>
       <p:sp>
         <p:nvSpPr>
-          <p:cNvPr id="2" name="Cím 1">
-            <a:extLst>
-              <a:ext uri="{FF2B5EF4-FFF2-40B4-BE49-F238E27FC236}">
-                <a16:creationId xmlns:a16="http://schemas.microsoft.com/office/drawing/2014/main" id="{67E45071-3E91-3975-958C-43782E39B6B9}"/>
+          <p:cNvPr id="10" name="Cím 9">
+            <a:extLst>
+              <a:ext uri="{FF2B5EF4-FFF2-40B4-BE49-F238E27FC236}">
+                <a16:creationId xmlns:a16="http://schemas.microsoft.com/office/drawing/2014/main" id="{026B303C-F00B-C202-DACD-409846B572C8}"/>
               </a:ext>
             </a:extLst>
           </p:cNvPr>
@@ -3930,34 +3884,6 @@
           </p:cNvSpPr>
           <p:nvPr>
             <p:ph type="title"/>
-          </p:nvPr>
-        </p:nvSpPr>
-        <p:spPr/>
-        <p:txBody>
-          <a:bodyPr/>
-          <a:lstStyle/>
-          <a:p>
-            <a:r>
-              <a:rPr lang="hu-HU" dirty="0"/>
-              <a:t>Listák kezelésének haladó technikái</a:t>
-            </a:r>
-          </a:p>
-        </p:txBody>
-      </p:sp>
-      <p:sp>
-        <p:nvSpPr>
-          <p:cNvPr id="3" name="Tartalom helye 2">
-            <a:extLst>
-              <a:ext uri="{FF2B5EF4-FFF2-40B4-BE49-F238E27FC236}">
-                <a16:creationId xmlns:a16="http://schemas.microsoft.com/office/drawing/2014/main" id="{0F52A367-7627-7B81-0E00-66AB83DC996D}"/>
-              </a:ext>
-            </a:extLst>
-          </p:cNvPr>
-          <p:cNvSpPr>
-            <a:spLocks noGrp="1"/>
-          </p:cNvSpPr>
-          <p:nvPr>
-            <p:ph type="body" idx="1"/>
           </p:nvPr>
         </p:nvSpPr>
         <p:spPr/>
@@ -3967,6 +3893,154 @@
           </a:bodyPr>
           <a:lstStyle/>
           <a:p>
+            <a:r>
+              <a:rPr lang="hu-HU" dirty="0"/>
+              <a:t>Listák kezelésének haladó technikái</a:t>
+            </a:r>
+          </a:p>
+        </p:txBody>
+      </p:sp>
+      <p:sp>
+        <p:nvSpPr>
+          <p:cNvPr id="11" name="Tartalom helye 10">
+            <a:extLst>
+              <a:ext uri="{FF2B5EF4-FFF2-40B4-BE49-F238E27FC236}">
+                <a16:creationId xmlns:a16="http://schemas.microsoft.com/office/drawing/2014/main" id="{1304DAAD-A571-195A-29C9-8BA795B1C660}"/>
+              </a:ext>
+            </a:extLst>
+          </p:cNvPr>
+          <p:cNvSpPr>
+            <a:spLocks noGrp="1"/>
+          </p:cNvSpPr>
+          <p:nvPr>
+            <p:ph idx="1"/>
+          </p:nvPr>
+        </p:nvSpPr>
+        <p:spPr/>
+        <p:txBody>
+          <a:bodyPr>
+            <a:normAutofit lnSpcReduction="10000"/>
+          </a:bodyPr>
+          <a:lstStyle/>
+          <a:p>
+            <a:r>
+              <a:rPr lang="hu-HU" dirty="0"/>
+              <a:t>Lista részhalmazának lekérdezése: </a:t>
+            </a:r>
+            <a:r>
+              <a:rPr lang="hu-HU" dirty="0" err="1"/>
+              <a:t>slicing</a:t>
+            </a:r>
+            <a:endParaRPr lang="hu-HU" dirty="0"/>
+          </a:p>
+          <a:p>
+            <a:r>
+              <a:rPr lang="hu-HU" dirty="0"/>
+              <a:t>Lista másolása </a:t>
+            </a:r>
+            <a:r>
+              <a:rPr lang="hu-HU" dirty="0" err="1"/>
+              <a:t>slicinggal</a:t>
+            </a:r>
+            <a:endParaRPr lang="hu-HU" dirty="0"/>
+          </a:p>
+          <a:p>
+            <a:r>
+              <a:rPr lang="hu-HU" dirty="0" err="1"/>
+              <a:t>Comprehension</a:t>
+            </a:r>
+            <a:endParaRPr lang="hu-HU" dirty="0"/>
+          </a:p>
+          <a:p>
+            <a:r>
+              <a:rPr lang="hu-HU" dirty="0" err="1"/>
+              <a:t>Comprehension</a:t>
+            </a:r>
+            <a:r>
+              <a:rPr lang="hu-HU" dirty="0"/>
+              <a:t> </a:t>
+            </a:r>
+            <a:r>
+              <a:rPr lang="hu-HU" dirty="0" err="1"/>
+              <a:t>if</a:t>
+            </a:r>
+            <a:endParaRPr lang="hu-HU" dirty="0"/>
+          </a:p>
+          <a:p>
+            <a:r>
+              <a:rPr lang="hu-HU" dirty="0" err="1"/>
+              <a:t>Comprehension</a:t>
+            </a:r>
+            <a:r>
+              <a:rPr lang="hu-HU" dirty="0"/>
+              <a:t> </a:t>
+            </a:r>
+            <a:r>
+              <a:rPr lang="hu-HU" dirty="0" err="1"/>
+              <a:t>nested</a:t>
+            </a:r>
+            <a:r>
+              <a:rPr lang="hu-HU" dirty="0"/>
+              <a:t> </a:t>
+            </a:r>
+            <a:r>
+              <a:rPr lang="hu-HU" dirty="0" err="1"/>
+              <a:t>list</a:t>
+            </a:r>
+            <a:endParaRPr lang="hu-HU" dirty="0"/>
+          </a:p>
+          <a:p>
+            <a:r>
+              <a:rPr lang="hu-HU" dirty="0" err="1"/>
+              <a:t>Mutiple</a:t>
+            </a:r>
+            <a:r>
+              <a:rPr lang="hu-HU" dirty="0"/>
+              <a:t> </a:t>
+            </a:r>
+            <a:r>
+              <a:rPr lang="hu-HU" dirty="0" err="1"/>
+              <a:t>assignement</a:t>
+            </a:r>
+            <a:endParaRPr lang="hu-HU" dirty="0"/>
+          </a:p>
+          <a:p>
+            <a:r>
+              <a:rPr lang="hu-HU" dirty="0" err="1"/>
+              <a:t>unpacking</a:t>
+            </a:r>
+            <a:r>
+              <a:rPr lang="hu-HU" dirty="0"/>
+              <a:t>, adatok elcserélése</a:t>
+            </a:r>
+          </a:p>
+          <a:p>
+            <a:r>
+              <a:rPr lang="hu-HU" dirty="0" err="1"/>
+              <a:t>string</a:t>
+            </a:r>
+            <a:r>
+              <a:rPr lang="hu-HU" dirty="0"/>
+              <a:t> </a:t>
+            </a:r>
+            <a:r>
+              <a:rPr lang="hu-HU" dirty="0" err="1"/>
+              <a:t>unpacking</a:t>
+            </a:r>
+            <a:endParaRPr lang="hu-HU" dirty="0"/>
+          </a:p>
+          <a:p>
+            <a:r>
+              <a:rPr lang="hu-HU" dirty="0"/>
+              <a:t>List </a:t>
+            </a:r>
+            <a:r>
+              <a:rPr lang="hu-HU" dirty="0" err="1"/>
+              <a:t>unpacking</a:t>
+            </a:r>
+            <a:endParaRPr lang="hu-HU" dirty="0"/>
+          </a:p>
+          <a:p>
             <a:endParaRPr lang="hu-HU" dirty="0"/>
           </a:p>
         </p:txBody>
@@ -3974,7 +4048,7 @@
     </p:spTree>
     <p:extLst>
       <p:ext uri="{BB962C8B-B14F-4D97-AF65-F5344CB8AC3E}">
-        <p14:creationId xmlns:p14="http://schemas.microsoft.com/office/powerpoint/2010/main" val="520139568"/>
+        <p14:creationId xmlns:p14="http://schemas.microsoft.com/office/powerpoint/2010/main" val="1715569417"/>
       </p:ext>
     </p:extLst>
   </p:cSld>
@@ -4003,10 +4077,10 @@
       </p:grpSpPr>
       <p:sp>
         <p:nvSpPr>
-          <p:cNvPr id="10" name="Cím 9">
-            <a:extLst>
-              <a:ext uri="{FF2B5EF4-FFF2-40B4-BE49-F238E27FC236}">
-                <a16:creationId xmlns:a16="http://schemas.microsoft.com/office/drawing/2014/main" id="{026B303C-F00B-C202-DACD-409846B572C8}"/>
+          <p:cNvPr id="2" name="Cím 1">
+            <a:extLst>
+              <a:ext uri="{FF2B5EF4-FFF2-40B4-BE49-F238E27FC236}">
+                <a16:creationId xmlns:a16="http://schemas.microsoft.com/office/drawing/2014/main" id="{67E45071-3E91-3975-958C-43782E39B6B9}"/>
               </a:ext>
             </a:extLst>
           </p:cNvPr>
@@ -4015,6 +4089,34 @@
           </p:cNvSpPr>
           <p:nvPr>
             <p:ph type="title"/>
+          </p:nvPr>
+        </p:nvSpPr>
+        <p:spPr/>
+        <p:txBody>
+          <a:bodyPr/>
+          <a:lstStyle/>
+          <a:p>
+            <a:r>
+              <a:rPr lang="hu-HU" dirty="0"/>
+              <a:t>Függvények</a:t>
+            </a:r>
+          </a:p>
+        </p:txBody>
+      </p:sp>
+      <p:sp>
+        <p:nvSpPr>
+          <p:cNvPr id="3" name="Tartalom helye 2">
+            <a:extLst>
+              <a:ext uri="{FF2B5EF4-FFF2-40B4-BE49-F238E27FC236}">
+                <a16:creationId xmlns:a16="http://schemas.microsoft.com/office/drawing/2014/main" id="{0F52A367-7627-7B81-0E00-66AB83DC996D}"/>
+              </a:ext>
+            </a:extLst>
+          </p:cNvPr>
+          <p:cNvSpPr>
+            <a:spLocks noGrp="1"/>
+          </p:cNvSpPr>
+          <p:nvPr>
+            <p:ph type="body" idx="1"/>
           </p:nvPr>
         </p:nvSpPr>
         <p:spPr/>
@@ -4024,154 +4126,6 @@
           </a:bodyPr>
           <a:lstStyle/>
           <a:p>
-            <a:r>
-              <a:rPr lang="hu-HU" dirty="0"/>
-              <a:t>Listák kezelésének haladó technikái</a:t>
-            </a:r>
-          </a:p>
-        </p:txBody>
-      </p:sp>
-      <p:sp>
-        <p:nvSpPr>
-          <p:cNvPr id="11" name="Tartalom helye 10">
-            <a:extLst>
-              <a:ext uri="{FF2B5EF4-FFF2-40B4-BE49-F238E27FC236}">
-                <a16:creationId xmlns:a16="http://schemas.microsoft.com/office/drawing/2014/main" id="{1304DAAD-A571-195A-29C9-8BA795B1C660}"/>
-              </a:ext>
-            </a:extLst>
-          </p:cNvPr>
-          <p:cNvSpPr>
-            <a:spLocks noGrp="1"/>
-          </p:cNvSpPr>
-          <p:nvPr>
-            <p:ph idx="1"/>
-          </p:nvPr>
-        </p:nvSpPr>
-        <p:spPr/>
-        <p:txBody>
-          <a:bodyPr>
-            <a:normAutofit lnSpcReduction="10000"/>
-          </a:bodyPr>
-          <a:lstStyle/>
-          <a:p>
-            <a:r>
-              <a:rPr lang="hu-HU" dirty="0"/>
-              <a:t>Lista részhalmazának lekérdezése: </a:t>
-            </a:r>
-            <a:r>
-              <a:rPr lang="hu-HU" dirty="0" err="1"/>
-              <a:t>slicing</a:t>
-            </a:r>
-            <a:endParaRPr lang="hu-HU" dirty="0"/>
-          </a:p>
-          <a:p>
-            <a:r>
-              <a:rPr lang="hu-HU" dirty="0"/>
-              <a:t>Lista másolása </a:t>
-            </a:r>
-            <a:r>
-              <a:rPr lang="hu-HU" dirty="0" err="1"/>
-              <a:t>slicinggal</a:t>
-            </a:r>
-            <a:endParaRPr lang="hu-HU" dirty="0"/>
-          </a:p>
-          <a:p>
-            <a:r>
-              <a:rPr lang="hu-HU" dirty="0" err="1"/>
-              <a:t>Comprehension</a:t>
-            </a:r>
-            <a:endParaRPr lang="hu-HU" dirty="0"/>
-          </a:p>
-          <a:p>
-            <a:r>
-              <a:rPr lang="hu-HU" dirty="0" err="1"/>
-              <a:t>Comprehension</a:t>
-            </a:r>
-            <a:r>
-              <a:rPr lang="hu-HU" dirty="0"/>
-              <a:t> </a:t>
-            </a:r>
-            <a:r>
-              <a:rPr lang="hu-HU" dirty="0" err="1"/>
-              <a:t>if</a:t>
-            </a:r>
-            <a:endParaRPr lang="hu-HU" dirty="0"/>
-          </a:p>
-          <a:p>
-            <a:r>
-              <a:rPr lang="hu-HU" dirty="0" err="1"/>
-              <a:t>Comprehension</a:t>
-            </a:r>
-            <a:r>
-              <a:rPr lang="hu-HU" dirty="0"/>
-              <a:t> </a:t>
-            </a:r>
-            <a:r>
-              <a:rPr lang="hu-HU" dirty="0" err="1"/>
-              <a:t>nested</a:t>
-            </a:r>
-            <a:r>
-              <a:rPr lang="hu-HU" dirty="0"/>
-              <a:t> </a:t>
-            </a:r>
-            <a:r>
-              <a:rPr lang="hu-HU" dirty="0" err="1"/>
-              <a:t>list</a:t>
-            </a:r>
-            <a:endParaRPr lang="hu-HU" dirty="0"/>
-          </a:p>
-          <a:p>
-            <a:r>
-              <a:rPr lang="hu-HU" dirty="0" err="1"/>
-              <a:t>Mutiple</a:t>
-            </a:r>
-            <a:r>
-              <a:rPr lang="hu-HU" dirty="0"/>
-              <a:t> </a:t>
-            </a:r>
-            <a:r>
-              <a:rPr lang="hu-HU" dirty="0" err="1"/>
-              <a:t>assignement</a:t>
-            </a:r>
-            <a:endParaRPr lang="hu-HU" dirty="0"/>
-          </a:p>
-          <a:p>
-            <a:r>
-              <a:rPr lang="hu-HU" dirty="0" err="1"/>
-              <a:t>unpacking</a:t>
-            </a:r>
-            <a:r>
-              <a:rPr lang="hu-HU" dirty="0"/>
-              <a:t>, adatok elcserélése</a:t>
-            </a:r>
-          </a:p>
-          <a:p>
-            <a:r>
-              <a:rPr lang="hu-HU" dirty="0" err="1"/>
-              <a:t>string</a:t>
-            </a:r>
-            <a:r>
-              <a:rPr lang="hu-HU" dirty="0"/>
-              <a:t> </a:t>
-            </a:r>
-            <a:r>
-              <a:rPr lang="hu-HU" dirty="0" err="1"/>
-              <a:t>unpacking</a:t>
-            </a:r>
-            <a:endParaRPr lang="hu-HU" dirty="0"/>
-          </a:p>
-          <a:p>
-            <a:r>
-              <a:rPr lang="hu-HU" dirty="0"/>
-              <a:t>List </a:t>
-            </a:r>
-            <a:r>
-              <a:rPr lang="hu-HU" dirty="0" err="1"/>
-              <a:t>unpacking</a:t>
-            </a:r>
-            <a:endParaRPr lang="hu-HU" dirty="0"/>
-          </a:p>
-          <a:p>
             <a:endParaRPr lang="hu-HU" dirty="0"/>
           </a:p>
         </p:txBody>
@@ -4179,7 +4133,7 @@
     </p:spTree>
     <p:extLst>
       <p:ext uri="{BB962C8B-B14F-4D97-AF65-F5344CB8AC3E}">
-        <p14:creationId xmlns:p14="http://schemas.microsoft.com/office/powerpoint/2010/main" val="1715569417"/>
+        <p14:creationId xmlns:p14="http://schemas.microsoft.com/office/powerpoint/2010/main" val="1183259147"/>
       </p:ext>
     </p:extLst>
   </p:cSld>
@@ -4208,10 +4162,10 @@
       </p:grpSpPr>
       <p:sp>
         <p:nvSpPr>
-          <p:cNvPr id="2" name="Cím 1">
-            <a:extLst>
-              <a:ext uri="{FF2B5EF4-FFF2-40B4-BE49-F238E27FC236}">
-                <a16:creationId xmlns:a16="http://schemas.microsoft.com/office/drawing/2014/main" id="{67E45071-3E91-3975-958C-43782E39B6B9}"/>
+          <p:cNvPr id="10" name="Cím 9">
+            <a:extLst>
+              <a:ext uri="{FF2B5EF4-FFF2-40B4-BE49-F238E27FC236}">
+                <a16:creationId xmlns:a16="http://schemas.microsoft.com/office/drawing/2014/main" id="{026B303C-F00B-C202-DACD-409846B572C8}"/>
               </a:ext>
             </a:extLst>
           </p:cNvPr>
@@ -4220,34 +4174,6 @@
           </p:cNvSpPr>
           <p:nvPr>
             <p:ph type="title"/>
-          </p:nvPr>
-        </p:nvSpPr>
-        <p:spPr/>
-        <p:txBody>
-          <a:bodyPr/>
-          <a:lstStyle/>
-          <a:p>
-            <a:r>
-              <a:rPr lang="hu-HU" dirty="0"/>
-              <a:t>Függvények</a:t>
-            </a:r>
-          </a:p>
-        </p:txBody>
-      </p:sp>
-      <p:sp>
-        <p:nvSpPr>
-          <p:cNvPr id="3" name="Tartalom helye 2">
-            <a:extLst>
-              <a:ext uri="{FF2B5EF4-FFF2-40B4-BE49-F238E27FC236}">
-                <a16:creationId xmlns:a16="http://schemas.microsoft.com/office/drawing/2014/main" id="{0F52A367-7627-7B81-0E00-66AB83DC996D}"/>
-              </a:ext>
-            </a:extLst>
-          </p:cNvPr>
-          <p:cNvSpPr>
-            <a:spLocks noGrp="1"/>
-          </p:cNvSpPr>
-          <p:nvPr>
-            <p:ph type="body" idx="1"/>
           </p:nvPr>
         </p:nvSpPr>
         <p:spPr/>
@@ -4257,14 +4183,187 @@
           </a:bodyPr>
           <a:lstStyle/>
           <a:p>
-            <a:endParaRPr lang="hu-HU" dirty="0"/>
+            <a:r>
+              <a:rPr lang="hu-HU" dirty="0"/>
+              <a:t>Függvények</a:t>
+            </a:r>
+          </a:p>
+        </p:txBody>
+      </p:sp>
+      <p:sp>
+        <p:nvSpPr>
+          <p:cNvPr id="11" name="Tartalom helye 10">
+            <a:extLst>
+              <a:ext uri="{FF2B5EF4-FFF2-40B4-BE49-F238E27FC236}">
+                <a16:creationId xmlns:a16="http://schemas.microsoft.com/office/drawing/2014/main" id="{1304DAAD-A571-195A-29C9-8BA795B1C660}"/>
+              </a:ext>
+            </a:extLst>
+          </p:cNvPr>
+          <p:cNvSpPr>
+            <a:spLocks noGrp="1"/>
+          </p:cNvSpPr>
+          <p:nvPr>
+            <p:ph idx="1"/>
+          </p:nvPr>
+        </p:nvSpPr>
+        <p:spPr/>
+        <p:txBody>
+          <a:bodyPr>
+            <a:normAutofit fontScale="55000" lnSpcReduction="20000"/>
+          </a:bodyPr>
+          <a:lstStyle/>
+          <a:p>
+            <a:r>
+              <a:rPr lang="hu-HU" dirty="0"/>
+              <a:t>Függvények, eddigi függvények, a globálisan elérhető függvények listája</a:t>
+            </a:r>
+          </a:p>
+          <a:p>
+            <a:r>
+              <a:rPr lang="hu-HU" dirty="0"/>
+              <a:t>Függvények létrehozása, </a:t>
+            </a:r>
+          </a:p>
+          <a:p>
+            <a:r>
+              <a:rPr lang="hu-HU" dirty="0"/>
+              <a:t>Függvény paraméterek</a:t>
+            </a:r>
+          </a:p>
+          <a:p>
+            <a:r>
+              <a:rPr lang="hu-HU" dirty="0"/>
+              <a:t>Függvények visszatérési értéke</a:t>
+            </a:r>
+          </a:p>
+          <a:p>
+            <a:r>
+              <a:rPr lang="hu-HU" dirty="0"/>
+              <a:t>Több paraméter használata, sorrendiség</a:t>
+            </a:r>
+          </a:p>
+          <a:p>
+            <a:r>
+              <a:rPr lang="hu-HU" dirty="0"/>
+              <a:t>Nevesített paraméterek</a:t>
+            </a:r>
+          </a:p>
+          <a:p>
+            <a:r>
+              <a:rPr lang="hu-HU" dirty="0"/>
+              <a:t>A </a:t>
+            </a:r>
+            <a:r>
+              <a:rPr lang="hu-HU" dirty="0" err="1"/>
+              <a:t>None</a:t>
+            </a:r>
+            <a:r>
+              <a:rPr lang="hu-HU" dirty="0"/>
+              <a:t> típus</a:t>
+            </a:r>
+          </a:p>
+          <a:p>
+            <a:r>
+              <a:rPr lang="hu-HU" dirty="0"/>
+              <a:t>Paraméterek alapértelmezett értéke</a:t>
+            </a:r>
+          </a:p>
+          <a:p>
+            <a:r>
+              <a:rPr lang="hu-HU" dirty="0"/>
+              <a:t>Globális változók módosítása függvényből</a:t>
+            </a:r>
+          </a:p>
+          <a:p>
+            <a:r>
+              <a:rPr lang="hu-HU" dirty="0"/>
+              <a:t>A </a:t>
+            </a:r>
+            <a:r>
+              <a:rPr lang="hu-HU" dirty="0" err="1"/>
+              <a:t>global</a:t>
+            </a:r>
+            <a:r>
+              <a:rPr lang="hu-HU" dirty="0"/>
+              <a:t> kulcsszó</a:t>
+            </a:r>
+          </a:p>
+          <a:p>
+            <a:r>
+              <a:rPr lang="hu-HU" dirty="0"/>
+              <a:t>A </a:t>
+            </a:r>
+            <a:r>
+              <a:rPr lang="hu-HU" dirty="0" err="1"/>
+              <a:t>pass</a:t>
+            </a:r>
+            <a:r>
+              <a:rPr lang="hu-HU" dirty="0"/>
+              <a:t> utasítás</a:t>
+            </a:r>
+          </a:p>
+          <a:p>
+            <a:r>
+              <a:rPr lang="hu-HU" dirty="0"/>
+              <a:t>Lokális változók hatóköre, élettartama</a:t>
+            </a:r>
+          </a:p>
+          <a:p>
+            <a:r>
+              <a:rPr lang="hu-HU" dirty="0" err="1"/>
+              <a:t>Garbage</a:t>
+            </a:r>
+            <a:r>
+              <a:rPr lang="hu-HU" dirty="0"/>
+              <a:t> </a:t>
+            </a:r>
+            <a:r>
+              <a:rPr lang="hu-HU" dirty="0" err="1"/>
+              <a:t>collector</a:t>
+            </a:r>
+            <a:r>
+              <a:rPr lang="hu-HU" dirty="0"/>
+              <a:t>, körkörös hivatkozások</a:t>
+            </a:r>
+          </a:p>
+          <a:p>
+            <a:r>
+              <a:rPr lang="hu-HU" dirty="0" err="1"/>
+              <a:t>Reference</a:t>
+            </a:r>
+            <a:r>
+              <a:rPr lang="hu-HU" dirty="0"/>
+              <a:t> </a:t>
+            </a:r>
+            <a:r>
+              <a:rPr lang="hu-HU" dirty="0" err="1"/>
+              <a:t>counter</a:t>
+            </a:r>
+            <a:r>
+              <a:rPr lang="hu-HU" dirty="0"/>
+              <a:t> – referencia számlálás</a:t>
+            </a:r>
+          </a:p>
+          <a:p>
+            <a:r>
+              <a:rPr lang="hu-HU" dirty="0"/>
+              <a:t>Hibakeresés (</a:t>
+            </a:r>
+            <a:r>
+              <a:rPr lang="hu-HU" dirty="0" err="1"/>
+              <a:t>debuggolás</a:t>
+            </a:r>
+            <a:r>
+              <a:rPr lang="hu-HU" dirty="0"/>
+              <a:t>), szintaktikai és szemantikai hibák</a:t>
+            </a:r>
           </a:p>
         </p:txBody>
       </p:sp>
     </p:spTree>
     <p:extLst>
       <p:ext uri="{BB962C8B-B14F-4D97-AF65-F5344CB8AC3E}">
-        <p14:creationId xmlns:p14="http://schemas.microsoft.com/office/powerpoint/2010/main" val="1183259147"/>
+        <p14:creationId xmlns:p14="http://schemas.microsoft.com/office/powerpoint/2010/main" val="4012319093"/>
       </p:ext>
     </p:extLst>
   </p:cSld>
@@ -4293,10 +4392,10 @@
       </p:grpSpPr>
       <p:sp>
         <p:nvSpPr>
-          <p:cNvPr id="10" name="Cím 9">
-            <a:extLst>
-              <a:ext uri="{FF2B5EF4-FFF2-40B4-BE49-F238E27FC236}">
-                <a16:creationId xmlns:a16="http://schemas.microsoft.com/office/drawing/2014/main" id="{026B303C-F00B-C202-DACD-409846B572C8}"/>
+          <p:cNvPr id="2" name="Cím 1">
+            <a:extLst>
+              <a:ext uri="{FF2B5EF4-FFF2-40B4-BE49-F238E27FC236}">
+                <a16:creationId xmlns:a16="http://schemas.microsoft.com/office/drawing/2014/main" id="{67E45071-3E91-3975-958C-43782E39B6B9}"/>
               </a:ext>
             </a:extLst>
           </p:cNvPr>
@@ -4305,6 +4404,34 @@
           </p:cNvSpPr>
           <p:nvPr>
             <p:ph type="title"/>
+          </p:nvPr>
+        </p:nvSpPr>
+        <p:spPr/>
+        <p:txBody>
+          <a:bodyPr/>
+          <a:lstStyle/>
+          <a:p>
+            <a:r>
+              <a:rPr lang="hu-HU" dirty="0"/>
+              <a:t>Nevezetes algoritmusok</a:t>
+            </a:r>
+          </a:p>
+        </p:txBody>
+      </p:sp>
+      <p:sp>
+        <p:nvSpPr>
+          <p:cNvPr id="3" name="Tartalom helye 2">
+            <a:extLst>
+              <a:ext uri="{FF2B5EF4-FFF2-40B4-BE49-F238E27FC236}">
+                <a16:creationId xmlns:a16="http://schemas.microsoft.com/office/drawing/2014/main" id="{0F52A367-7627-7B81-0E00-66AB83DC996D}"/>
+              </a:ext>
+            </a:extLst>
+          </p:cNvPr>
+          <p:cNvSpPr>
+            <a:spLocks noGrp="1"/>
+          </p:cNvSpPr>
+          <p:nvPr>
+            <p:ph type="body" idx="1"/>
           </p:nvPr>
         </p:nvSpPr>
         <p:spPr/>
@@ -4314,187 +4441,14 @@
           </a:bodyPr>
           <a:lstStyle/>
           <a:p>
-            <a:r>
-              <a:rPr lang="hu-HU" dirty="0"/>
-              <a:t>Függvények</a:t>
-            </a:r>
-          </a:p>
-        </p:txBody>
-      </p:sp>
-      <p:sp>
-        <p:nvSpPr>
-          <p:cNvPr id="11" name="Tartalom helye 10">
-            <a:extLst>
-              <a:ext uri="{FF2B5EF4-FFF2-40B4-BE49-F238E27FC236}">
-                <a16:creationId xmlns:a16="http://schemas.microsoft.com/office/drawing/2014/main" id="{1304DAAD-A571-195A-29C9-8BA795B1C660}"/>
-              </a:ext>
-            </a:extLst>
-          </p:cNvPr>
-          <p:cNvSpPr>
-            <a:spLocks noGrp="1"/>
-          </p:cNvSpPr>
-          <p:nvPr>
-            <p:ph idx="1"/>
-          </p:nvPr>
-        </p:nvSpPr>
-        <p:spPr/>
-        <p:txBody>
-          <a:bodyPr>
-            <a:normAutofit fontScale="55000" lnSpcReduction="20000"/>
-          </a:bodyPr>
-          <a:lstStyle/>
-          <a:p>
-            <a:r>
-              <a:rPr lang="hu-HU" dirty="0"/>
-              <a:t>Függvények, eddigi függvények, a globálisan elérhető függvények listája</a:t>
-            </a:r>
-          </a:p>
-          <a:p>
-            <a:r>
-              <a:rPr lang="hu-HU" dirty="0"/>
-              <a:t>Függvények létrehozása, </a:t>
-            </a:r>
-          </a:p>
-          <a:p>
-            <a:r>
-              <a:rPr lang="hu-HU" dirty="0"/>
-              <a:t>Függvény paraméterek</a:t>
-            </a:r>
-          </a:p>
-          <a:p>
-            <a:r>
-              <a:rPr lang="hu-HU" dirty="0"/>
-              <a:t>Függvények visszatérési értéke</a:t>
-            </a:r>
-          </a:p>
-          <a:p>
-            <a:r>
-              <a:rPr lang="hu-HU" dirty="0"/>
-              <a:t>Több paraméter használata, sorrendiség</a:t>
-            </a:r>
-          </a:p>
-          <a:p>
-            <a:r>
-              <a:rPr lang="hu-HU" dirty="0"/>
-              <a:t>Nevesített paraméterek</a:t>
-            </a:r>
-          </a:p>
-          <a:p>
-            <a:r>
-              <a:rPr lang="hu-HU" dirty="0"/>
-              <a:t>A </a:t>
-            </a:r>
-            <a:r>
-              <a:rPr lang="hu-HU" dirty="0" err="1"/>
-              <a:t>None</a:t>
-            </a:r>
-            <a:r>
-              <a:rPr lang="hu-HU" dirty="0"/>
-              <a:t> típus</a:t>
-            </a:r>
-          </a:p>
-          <a:p>
-            <a:r>
-              <a:rPr lang="hu-HU" dirty="0"/>
-              <a:t>Paraméterek alapértelmezett értéke</a:t>
-            </a:r>
-          </a:p>
-          <a:p>
-            <a:r>
-              <a:rPr lang="hu-HU" dirty="0"/>
-              <a:t>Globális változók módosítása függvényből</a:t>
-            </a:r>
-          </a:p>
-          <a:p>
-            <a:r>
-              <a:rPr lang="hu-HU" dirty="0"/>
-              <a:t>A </a:t>
-            </a:r>
-            <a:r>
-              <a:rPr lang="hu-HU" dirty="0" err="1"/>
-              <a:t>global</a:t>
-            </a:r>
-            <a:r>
-              <a:rPr lang="hu-HU" dirty="0"/>
-              <a:t> kulcsszó</a:t>
-            </a:r>
-          </a:p>
-          <a:p>
-            <a:r>
-              <a:rPr lang="hu-HU" dirty="0"/>
-              <a:t>A </a:t>
-            </a:r>
-            <a:r>
-              <a:rPr lang="hu-HU" dirty="0" err="1"/>
-              <a:t>pass</a:t>
-            </a:r>
-            <a:r>
-              <a:rPr lang="hu-HU" dirty="0"/>
-              <a:t> utasítás</a:t>
-            </a:r>
-          </a:p>
-          <a:p>
-            <a:r>
-              <a:rPr lang="hu-HU" dirty="0"/>
-              <a:t>Lokális változók hatóköre, élettartama</a:t>
-            </a:r>
-          </a:p>
-          <a:p>
-            <a:r>
-              <a:rPr lang="hu-HU" dirty="0" err="1"/>
-              <a:t>Garbage</a:t>
-            </a:r>
-            <a:r>
-              <a:rPr lang="hu-HU" dirty="0"/>
-              <a:t> </a:t>
-            </a:r>
-            <a:r>
-              <a:rPr lang="hu-HU" dirty="0" err="1"/>
-              <a:t>collector</a:t>
-            </a:r>
-            <a:r>
-              <a:rPr lang="hu-HU" dirty="0"/>
-              <a:t>, körkörös hivatkozások</a:t>
-            </a:r>
-          </a:p>
-          <a:p>
-            <a:r>
-              <a:rPr lang="hu-HU" dirty="0" err="1"/>
-              <a:t>Reference</a:t>
-            </a:r>
-            <a:r>
-              <a:rPr lang="hu-HU" dirty="0"/>
-              <a:t> </a:t>
-            </a:r>
-            <a:r>
-              <a:rPr lang="hu-HU" dirty="0" err="1"/>
-              <a:t>counter</a:t>
-            </a:r>
-            <a:r>
-              <a:rPr lang="hu-HU" dirty="0"/>
-              <a:t> – referencia számlálás</a:t>
-            </a:r>
-          </a:p>
-          <a:p>
-            <a:r>
-              <a:rPr lang="hu-HU" dirty="0"/>
-              <a:t>Hibakeresés (</a:t>
-            </a:r>
-            <a:r>
-              <a:rPr lang="hu-HU" dirty="0" err="1"/>
-              <a:t>debuggolás</a:t>
-            </a:r>
-            <a:r>
-              <a:rPr lang="hu-HU" dirty="0"/>
-              <a:t>), szintaktikai és szemantikai hibák</a:t>
-            </a:r>
+            <a:endParaRPr lang="hu-HU" dirty="0"/>
           </a:p>
         </p:txBody>
       </p:sp>
     </p:spTree>
     <p:extLst>
       <p:ext uri="{BB962C8B-B14F-4D97-AF65-F5344CB8AC3E}">
-        <p14:creationId xmlns:p14="http://schemas.microsoft.com/office/powerpoint/2010/main" val="4012319093"/>
+        <p14:creationId xmlns:p14="http://schemas.microsoft.com/office/powerpoint/2010/main" val="2902561149"/>
       </p:ext>
     </p:extLst>
   </p:cSld>
@@ -4523,10 +4477,10 @@
       </p:grpSpPr>
       <p:sp>
         <p:nvSpPr>
-          <p:cNvPr id="2" name="Cím 1">
-            <a:extLst>
-              <a:ext uri="{FF2B5EF4-FFF2-40B4-BE49-F238E27FC236}">
-                <a16:creationId xmlns:a16="http://schemas.microsoft.com/office/drawing/2014/main" id="{67E45071-3E91-3975-958C-43782E39B6B9}"/>
+          <p:cNvPr id="10" name="Cím 9">
+            <a:extLst>
+              <a:ext uri="{FF2B5EF4-FFF2-40B4-BE49-F238E27FC236}">
+                <a16:creationId xmlns:a16="http://schemas.microsoft.com/office/drawing/2014/main" id="{026B303C-F00B-C202-DACD-409846B572C8}"/>
               </a:ext>
             </a:extLst>
           </p:cNvPr>
@@ -4535,34 +4489,6 @@
           </p:cNvSpPr>
           <p:nvPr>
             <p:ph type="title"/>
-          </p:nvPr>
-        </p:nvSpPr>
-        <p:spPr/>
-        <p:txBody>
-          <a:bodyPr/>
-          <a:lstStyle/>
-          <a:p>
-            <a:r>
-              <a:rPr lang="hu-HU" dirty="0"/>
-              <a:t>Nevezetes algoritmusok</a:t>
-            </a:r>
-          </a:p>
-        </p:txBody>
-      </p:sp>
-      <p:sp>
-        <p:nvSpPr>
-          <p:cNvPr id="3" name="Tartalom helye 2">
-            <a:extLst>
-              <a:ext uri="{FF2B5EF4-FFF2-40B4-BE49-F238E27FC236}">
-                <a16:creationId xmlns:a16="http://schemas.microsoft.com/office/drawing/2014/main" id="{0F52A367-7627-7B81-0E00-66AB83DC996D}"/>
-              </a:ext>
-            </a:extLst>
-          </p:cNvPr>
-          <p:cNvSpPr>
-            <a:spLocks noGrp="1"/>
-          </p:cNvSpPr>
-          <p:nvPr>
-            <p:ph type="body" idx="1"/>
           </p:nvPr>
         </p:nvSpPr>
         <p:spPr/>
@@ -4572,14 +4498,95 @@
           </a:bodyPr>
           <a:lstStyle/>
           <a:p>
-            <a:endParaRPr lang="hu-HU" dirty="0"/>
+            <a:r>
+              <a:rPr lang="hu-HU" dirty="0"/>
+              <a:t>Nevezetes algoritmusok</a:t>
+            </a:r>
+          </a:p>
+        </p:txBody>
+      </p:sp>
+      <p:sp>
+        <p:nvSpPr>
+          <p:cNvPr id="11" name="Tartalom helye 10">
+            <a:extLst>
+              <a:ext uri="{FF2B5EF4-FFF2-40B4-BE49-F238E27FC236}">
+                <a16:creationId xmlns:a16="http://schemas.microsoft.com/office/drawing/2014/main" id="{1304DAAD-A571-195A-29C9-8BA795B1C660}"/>
+              </a:ext>
+            </a:extLst>
+          </p:cNvPr>
+          <p:cNvSpPr>
+            <a:spLocks noGrp="1"/>
+          </p:cNvSpPr>
+          <p:nvPr>
+            <p:ph idx="1"/>
+          </p:nvPr>
+        </p:nvSpPr>
+        <p:spPr/>
+        <p:txBody>
+          <a:bodyPr>
+            <a:normAutofit lnSpcReduction="10000"/>
+          </a:bodyPr>
+          <a:lstStyle/>
+          <a:p>
+            <a:r>
+              <a:rPr lang="hu-HU" dirty="0"/>
+              <a:t>minimum kiválasztás</a:t>
+            </a:r>
+          </a:p>
+          <a:p>
+            <a:r>
+              <a:rPr lang="hu-HU" dirty="0"/>
+              <a:t>maximum kiválasztás</a:t>
+            </a:r>
+          </a:p>
+          <a:p>
+            <a:r>
+              <a:rPr lang="hu-HU" dirty="0"/>
+              <a:t>összegzés</a:t>
+            </a:r>
+          </a:p>
+          <a:p>
+            <a:r>
+              <a:rPr lang="hu-HU" dirty="0"/>
+              <a:t>átlag</a:t>
+            </a:r>
+          </a:p>
+          <a:p>
+            <a:r>
+              <a:rPr lang="hu-HU" dirty="0"/>
+              <a:t>számlálás</a:t>
+            </a:r>
+          </a:p>
+          <a:p>
+            <a:r>
+              <a:rPr lang="hu-HU" dirty="0"/>
+              <a:t>kiválasztás</a:t>
+            </a:r>
+          </a:p>
+          <a:p>
+            <a:r>
+              <a:rPr lang="hu-HU" dirty="0"/>
+              <a:t>eldöntés</a:t>
+            </a:r>
+          </a:p>
+          <a:p>
+            <a:r>
+              <a:rPr lang="hu-HU" dirty="0"/>
+              <a:t>lineáris keresés</a:t>
+            </a:r>
+          </a:p>
+          <a:p>
+            <a:r>
+              <a:rPr lang="hu-HU" dirty="0"/>
+              <a:t>buborékos rendezés</a:t>
+            </a:r>
           </a:p>
         </p:txBody>
       </p:sp>
     </p:spTree>
     <p:extLst>
       <p:ext uri="{BB962C8B-B14F-4D97-AF65-F5344CB8AC3E}">
-        <p14:creationId xmlns:p14="http://schemas.microsoft.com/office/powerpoint/2010/main" val="2902561149"/>
+        <p14:creationId xmlns:p14="http://schemas.microsoft.com/office/powerpoint/2010/main" val="1829991547"/>
       </p:ext>
     </p:extLst>
   </p:cSld>
@@ -4608,10 +4615,10 @@
       </p:grpSpPr>
       <p:sp>
         <p:nvSpPr>
-          <p:cNvPr id="10" name="Cím 9">
-            <a:extLst>
-              <a:ext uri="{FF2B5EF4-FFF2-40B4-BE49-F238E27FC236}">
-                <a16:creationId xmlns:a16="http://schemas.microsoft.com/office/drawing/2014/main" id="{026B303C-F00B-C202-DACD-409846B572C8}"/>
+          <p:cNvPr id="2" name="Cím 1">
+            <a:extLst>
+              <a:ext uri="{FF2B5EF4-FFF2-40B4-BE49-F238E27FC236}">
+                <a16:creationId xmlns:a16="http://schemas.microsoft.com/office/drawing/2014/main" id="{67E45071-3E91-3975-958C-43782E39B6B9}"/>
               </a:ext>
             </a:extLst>
           </p:cNvPr>
@@ -4620,6 +4627,50 @@
           </p:cNvSpPr>
           <p:nvPr>
             <p:ph type="title"/>
+          </p:nvPr>
+        </p:nvSpPr>
+        <p:spPr/>
+        <p:txBody>
+          <a:bodyPr/>
+          <a:lstStyle/>
+          <a:p>
+            <a:r>
+              <a:rPr lang="hu-HU" dirty="0"/>
+              <a:t>A </a:t>
+            </a:r>
+            <a:r>
+              <a:rPr lang="hu-HU" dirty="0" err="1"/>
+              <a:t>tuple</a:t>
+            </a:r>
+            <a:r>
+              <a:rPr lang="hu-HU" dirty="0"/>
+              <a:t> és a </a:t>
+            </a:r>
+            <a:r>
+              <a:rPr lang="hu-HU" dirty="0" err="1"/>
+              <a:t>set</a:t>
+            </a:r>
+            <a:r>
+              <a:rPr lang="hu-HU" dirty="0"/>
+              <a:t> konténer típusok</a:t>
+            </a:r>
+          </a:p>
+        </p:txBody>
+      </p:sp>
+      <p:sp>
+        <p:nvSpPr>
+          <p:cNvPr id="3" name="Tartalom helye 2">
+            <a:extLst>
+              <a:ext uri="{FF2B5EF4-FFF2-40B4-BE49-F238E27FC236}">
+                <a16:creationId xmlns:a16="http://schemas.microsoft.com/office/drawing/2014/main" id="{0F52A367-7627-7B81-0E00-66AB83DC996D}"/>
+              </a:ext>
+            </a:extLst>
+          </p:cNvPr>
+          <p:cNvSpPr>
+            <a:spLocks noGrp="1"/>
+          </p:cNvSpPr>
+          <p:nvPr>
+            <p:ph type="body" idx="1"/>
           </p:nvPr>
         </p:nvSpPr>
         <p:spPr/>
@@ -4629,95 +4680,14 @@
           </a:bodyPr>
           <a:lstStyle/>
           <a:p>
-            <a:r>
-              <a:rPr lang="hu-HU" dirty="0"/>
-              <a:t>Nevezetes algoritmusok</a:t>
-            </a:r>
-          </a:p>
-        </p:txBody>
-      </p:sp>
-      <p:sp>
-        <p:nvSpPr>
-          <p:cNvPr id="11" name="Tartalom helye 10">
-            <a:extLst>
-              <a:ext uri="{FF2B5EF4-FFF2-40B4-BE49-F238E27FC236}">
-                <a16:creationId xmlns:a16="http://schemas.microsoft.com/office/drawing/2014/main" id="{1304DAAD-A571-195A-29C9-8BA795B1C660}"/>
-              </a:ext>
-            </a:extLst>
-          </p:cNvPr>
-          <p:cNvSpPr>
-            <a:spLocks noGrp="1"/>
-          </p:cNvSpPr>
-          <p:nvPr>
-            <p:ph idx="1"/>
-          </p:nvPr>
-        </p:nvSpPr>
-        <p:spPr/>
-        <p:txBody>
-          <a:bodyPr>
-            <a:normAutofit lnSpcReduction="10000"/>
-          </a:bodyPr>
-          <a:lstStyle/>
-          <a:p>
-            <a:r>
-              <a:rPr lang="hu-HU" dirty="0"/>
-              <a:t>minimum kiválasztás</a:t>
-            </a:r>
-          </a:p>
-          <a:p>
-            <a:r>
-              <a:rPr lang="hu-HU" dirty="0"/>
-              <a:t>maximum kiválasztás</a:t>
-            </a:r>
-          </a:p>
-          <a:p>
-            <a:r>
-              <a:rPr lang="hu-HU" dirty="0"/>
-              <a:t>összegzés</a:t>
-            </a:r>
-          </a:p>
-          <a:p>
-            <a:r>
-              <a:rPr lang="hu-HU" dirty="0"/>
-              <a:t>átlag</a:t>
-            </a:r>
-          </a:p>
-          <a:p>
-            <a:r>
-              <a:rPr lang="hu-HU" dirty="0"/>
-              <a:t>számlálás</a:t>
-            </a:r>
-          </a:p>
-          <a:p>
-            <a:r>
-              <a:rPr lang="hu-HU" dirty="0"/>
-              <a:t>kiválasztás</a:t>
-            </a:r>
-          </a:p>
-          <a:p>
-            <a:r>
-              <a:rPr lang="hu-HU" dirty="0"/>
-              <a:t>eldöntés</a:t>
-            </a:r>
-          </a:p>
-          <a:p>
-            <a:r>
-              <a:rPr lang="hu-HU" dirty="0"/>
-              <a:t>lineáris keresés</a:t>
-            </a:r>
-          </a:p>
-          <a:p>
-            <a:r>
-              <a:rPr lang="hu-HU" dirty="0"/>
-              <a:t>buborékos rendezés</a:t>
-            </a:r>
+            <a:endParaRPr lang="hu-HU" dirty="0"/>
           </a:p>
         </p:txBody>
       </p:sp>
     </p:spTree>
     <p:extLst>
       <p:ext uri="{BB962C8B-B14F-4D97-AF65-F5344CB8AC3E}">
-        <p14:creationId xmlns:p14="http://schemas.microsoft.com/office/powerpoint/2010/main" val="1829991547"/>
+        <p14:creationId xmlns:p14="http://schemas.microsoft.com/office/powerpoint/2010/main" val="737708845"/>
       </p:ext>
     </p:extLst>
   </p:cSld>
@@ -4746,10 +4716,10 @@
       </p:grpSpPr>
       <p:sp>
         <p:nvSpPr>
-          <p:cNvPr id="2" name="Cím 1">
-            <a:extLst>
-              <a:ext uri="{FF2B5EF4-FFF2-40B4-BE49-F238E27FC236}">
-                <a16:creationId xmlns:a16="http://schemas.microsoft.com/office/drawing/2014/main" id="{67E45071-3E91-3975-958C-43782E39B6B9}"/>
+          <p:cNvPr id="10" name="Cím 9">
+            <a:extLst>
+              <a:ext uri="{FF2B5EF4-FFF2-40B4-BE49-F238E27FC236}">
+                <a16:creationId xmlns:a16="http://schemas.microsoft.com/office/drawing/2014/main" id="{026B303C-F00B-C202-DACD-409846B572C8}"/>
               </a:ext>
             </a:extLst>
           </p:cNvPr>
@@ -4758,50 +4728,6 @@
           </p:cNvSpPr>
           <p:nvPr>
             <p:ph type="title"/>
-          </p:nvPr>
-        </p:nvSpPr>
-        <p:spPr/>
-        <p:txBody>
-          <a:bodyPr/>
-          <a:lstStyle/>
-          <a:p>
-            <a:r>
-              <a:rPr lang="hu-HU" dirty="0"/>
-              <a:t>A </a:t>
-            </a:r>
-            <a:r>
-              <a:rPr lang="hu-HU" dirty="0" err="1"/>
-              <a:t>tuple</a:t>
-            </a:r>
-            <a:r>
-              <a:rPr lang="hu-HU" dirty="0"/>
-              <a:t> és a </a:t>
-            </a:r>
-            <a:r>
-              <a:rPr lang="hu-HU" dirty="0" err="1"/>
-              <a:t>set</a:t>
-            </a:r>
-            <a:r>
-              <a:rPr lang="hu-HU" dirty="0"/>
-              <a:t> konténer típusok</a:t>
-            </a:r>
-          </a:p>
-        </p:txBody>
-      </p:sp>
-      <p:sp>
-        <p:nvSpPr>
-          <p:cNvPr id="3" name="Tartalom helye 2">
-            <a:extLst>
-              <a:ext uri="{FF2B5EF4-FFF2-40B4-BE49-F238E27FC236}">
-                <a16:creationId xmlns:a16="http://schemas.microsoft.com/office/drawing/2014/main" id="{0F52A367-7627-7B81-0E00-66AB83DC996D}"/>
-              </a:ext>
-            </a:extLst>
-          </p:cNvPr>
-          <p:cNvSpPr>
-            <a:spLocks noGrp="1"/>
-          </p:cNvSpPr>
-          <p:nvPr>
-            <p:ph type="body" idx="1"/>
           </p:nvPr>
         </p:nvSpPr>
         <p:spPr/>
@@ -4811,6 +4737,204 @@
           </a:bodyPr>
           <a:lstStyle/>
           <a:p>
+            <a:r>
+              <a:rPr lang="hu-HU" dirty="0"/>
+              <a:t>A </a:t>
+            </a:r>
+            <a:r>
+              <a:rPr lang="hu-HU" dirty="0" err="1"/>
+              <a:t>tuple</a:t>
+            </a:r>
+            <a:r>
+              <a:rPr lang="hu-HU" dirty="0"/>
+              <a:t> és a </a:t>
+            </a:r>
+            <a:r>
+              <a:rPr lang="hu-HU" dirty="0" err="1"/>
+              <a:t>set</a:t>
+            </a:r>
+            <a:r>
+              <a:rPr lang="hu-HU" dirty="0"/>
+              <a:t> konténer típusok</a:t>
+            </a:r>
+          </a:p>
+        </p:txBody>
+      </p:sp>
+      <p:sp>
+        <p:nvSpPr>
+          <p:cNvPr id="11" name="Tartalom helye 10">
+            <a:extLst>
+              <a:ext uri="{FF2B5EF4-FFF2-40B4-BE49-F238E27FC236}">
+                <a16:creationId xmlns:a16="http://schemas.microsoft.com/office/drawing/2014/main" id="{1304DAAD-A571-195A-29C9-8BA795B1C660}"/>
+              </a:ext>
+            </a:extLst>
+          </p:cNvPr>
+          <p:cNvSpPr>
+            <a:spLocks noGrp="1"/>
+          </p:cNvSpPr>
+          <p:nvPr>
+            <p:ph idx="1"/>
+          </p:nvPr>
+        </p:nvSpPr>
+        <p:spPr/>
+        <p:txBody>
+          <a:bodyPr>
+            <a:normAutofit fontScale="92500" lnSpcReduction="10000"/>
+          </a:bodyPr>
+          <a:lstStyle/>
+          <a:p>
+            <a:r>
+              <a:rPr lang="hu-HU" dirty="0"/>
+              <a:t>A </a:t>
+            </a:r>
+            <a:r>
+              <a:rPr lang="hu-HU" dirty="0" err="1"/>
+              <a:t>dict</a:t>
+            </a:r>
+            <a:r>
+              <a:rPr lang="hu-HU" dirty="0"/>
+              <a:t> típus, Műveletek </a:t>
+            </a:r>
+            <a:r>
+              <a:rPr lang="hu-HU" dirty="0" err="1"/>
+              <a:t>dict</a:t>
+            </a:r>
+            <a:r>
+              <a:rPr lang="hu-HU" dirty="0"/>
+              <a:t>-tel: módosítás index alapján, pop(), update(), </a:t>
+            </a:r>
+            <a:r>
+              <a:rPr lang="hu-HU" dirty="0" err="1"/>
+              <a:t>copy</a:t>
+            </a:r>
+            <a:r>
+              <a:rPr lang="hu-HU" dirty="0"/>
+              <a:t>(), </a:t>
+            </a:r>
+            <a:r>
+              <a:rPr lang="hu-HU" dirty="0" err="1"/>
+              <a:t>dict</a:t>
+            </a:r>
+            <a:r>
+              <a:rPr lang="hu-HU" dirty="0"/>
+              <a:t>()</a:t>
+            </a:r>
+          </a:p>
+          <a:p>
+            <a:r>
+              <a:rPr lang="hu-HU" dirty="0"/>
+              <a:t>A </a:t>
+            </a:r>
+            <a:r>
+              <a:rPr lang="hu-HU" dirty="0" err="1"/>
+              <a:t>keys</a:t>
+            </a:r>
+            <a:r>
+              <a:rPr lang="hu-HU" dirty="0"/>
+              <a:t>(), </a:t>
+            </a:r>
+            <a:r>
+              <a:rPr lang="hu-HU" dirty="0" err="1"/>
+              <a:t>values</a:t>
+            </a:r>
+            <a:r>
+              <a:rPr lang="hu-HU" dirty="0"/>
+              <a:t>(), </a:t>
+            </a:r>
+            <a:r>
+              <a:rPr lang="hu-HU" dirty="0" err="1"/>
+              <a:t>items</a:t>
+            </a:r>
+            <a:r>
+              <a:rPr lang="hu-HU" dirty="0"/>
+              <a:t>() metódusok és az </a:t>
+            </a:r>
+            <a:r>
+              <a:rPr lang="hu-HU" dirty="0" err="1"/>
+              <a:t>enumerate</a:t>
+            </a:r>
+            <a:r>
+              <a:rPr lang="hu-HU" dirty="0"/>
+              <a:t>() függvény</a:t>
+            </a:r>
+          </a:p>
+          <a:p>
+            <a:r>
+              <a:rPr lang="hu-HU" dirty="0" err="1"/>
+              <a:t>Dict</a:t>
+            </a:r>
+            <a:r>
+              <a:rPr lang="hu-HU" dirty="0"/>
+              <a:t> bejárása ciklussal</a:t>
+            </a:r>
+          </a:p>
+          <a:p>
+            <a:r>
+              <a:rPr lang="hu-HU" dirty="0" err="1"/>
+              <a:t>Dict</a:t>
+            </a:r>
+            <a:r>
+              <a:rPr lang="hu-HU" dirty="0"/>
+              <a:t> </a:t>
+            </a:r>
+            <a:r>
+              <a:rPr lang="hu-HU" dirty="0" err="1"/>
+              <a:t>unpacking</a:t>
+            </a:r>
+            <a:endParaRPr lang="hu-HU" dirty="0"/>
+          </a:p>
+          <a:p>
+            <a:r>
+              <a:rPr lang="hu-HU" dirty="0"/>
+              <a:t>CRUD műveletek: </a:t>
+            </a:r>
+            <a:r>
+              <a:rPr lang="hu-HU" dirty="0" err="1"/>
+              <a:t>read</a:t>
+            </a:r>
+            <a:endParaRPr lang="hu-HU" dirty="0"/>
+          </a:p>
+          <a:p>
+            <a:r>
+              <a:rPr lang="hu-HU" dirty="0"/>
+              <a:t>CRUD műveletek: update</a:t>
+            </a:r>
+          </a:p>
+          <a:p>
+            <a:r>
+              <a:rPr lang="hu-HU" dirty="0"/>
+              <a:t>CRUD műveletek: </a:t>
+            </a:r>
+            <a:r>
+              <a:rPr lang="hu-HU" dirty="0" err="1"/>
+              <a:t>create</a:t>
+            </a:r>
+            <a:endParaRPr lang="hu-HU" dirty="0"/>
+          </a:p>
+          <a:p>
+            <a:r>
+              <a:rPr lang="hu-HU" dirty="0"/>
+              <a:t>CRUD műveletek: </a:t>
+            </a:r>
+            <a:r>
+              <a:rPr lang="hu-HU" dirty="0" err="1"/>
+              <a:t>delete</a:t>
+            </a:r>
+            <a:endParaRPr lang="hu-HU" dirty="0"/>
+          </a:p>
+          <a:p>
+            <a:r>
+              <a:rPr lang="hu-HU" dirty="0"/>
+              <a:t>CRUD: </a:t>
+            </a:r>
+            <a:r>
+              <a:rPr lang="hu-HU" dirty="0" err="1"/>
+              <a:t>újrafelhasználhatóvá</a:t>
+            </a:r>
+            <a:r>
+              <a:rPr lang="hu-HU"/>
+              <a:t> tétel</a:t>
+            </a:r>
             <a:endParaRPr lang="hu-HU" dirty="0"/>
           </a:p>
         </p:txBody>
@@ -4818,7 +4942,7 @@
     </p:spTree>
     <p:extLst>
       <p:ext uri="{BB962C8B-B14F-4D97-AF65-F5344CB8AC3E}">
-        <p14:creationId xmlns:p14="http://schemas.microsoft.com/office/powerpoint/2010/main" val="737708845"/>
+        <p14:creationId xmlns:p14="http://schemas.microsoft.com/office/powerpoint/2010/main" val="3829063260"/>
       </p:ext>
     </p:extLst>
   </p:cSld>
@@ -4847,10 +4971,10 @@
       </p:grpSpPr>
       <p:sp>
         <p:nvSpPr>
-          <p:cNvPr id="10" name="Cím 9">
-            <a:extLst>
-              <a:ext uri="{FF2B5EF4-FFF2-40B4-BE49-F238E27FC236}">
-                <a16:creationId xmlns:a16="http://schemas.microsoft.com/office/drawing/2014/main" id="{026B303C-F00B-C202-DACD-409846B572C8}"/>
+          <p:cNvPr id="2" name="Cím 1">
+            <a:extLst>
+              <a:ext uri="{FF2B5EF4-FFF2-40B4-BE49-F238E27FC236}">
+                <a16:creationId xmlns:a16="http://schemas.microsoft.com/office/drawing/2014/main" id="{67E45071-3E91-3975-958C-43782E39B6B9}"/>
               </a:ext>
             </a:extLst>
           </p:cNvPr>
@@ -4859,6 +4983,42 @@
           </p:cNvSpPr>
           <p:nvPr>
             <p:ph type="title"/>
+          </p:nvPr>
+        </p:nvSpPr>
+        <p:spPr/>
+        <p:txBody>
+          <a:bodyPr/>
+          <a:lstStyle/>
+          <a:p>
+            <a:r>
+              <a:rPr lang="hu-HU" dirty="0"/>
+              <a:t>A </a:t>
+            </a:r>
+            <a:r>
+              <a:rPr lang="hu-HU" dirty="0" err="1"/>
+              <a:t>dict</a:t>
+            </a:r>
+            <a:r>
+              <a:rPr lang="hu-HU" dirty="0"/>
+              <a:t> konténer típus, CRUD műveletek</a:t>
+            </a:r>
+          </a:p>
+        </p:txBody>
+      </p:sp>
+      <p:sp>
+        <p:nvSpPr>
+          <p:cNvPr id="3" name="Tartalom helye 2">
+            <a:extLst>
+              <a:ext uri="{FF2B5EF4-FFF2-40B4-BE49-F238E27FC236}">
+                <a16:creationId xmlns:a16="http://schemas.microsoft.com/office/drawing/2014/main" id="{0F52A367-7627-7B81-0E00-66AB83DC996D}"/>
+              </a:ext>
+            </a:extLst>
+          </p:cNvPr>
+          <p:cNvSpPr>
+            <a:spLocks noGrp="1"/>
+          </p:cNvSpPr>
+          <p:nvPr>
+            <p:ph type="body" idx="1"/>
           </p:nvPr>
         </p:nvSpPr>
         <p:spPr/>
@@ -4868,204 +5028,6 @@
           </a:bodyPr>
           <a:lstStyle/>
           <a:p>
-            <a:r>
-              <a:rPr lang="hu-HU" dirty="0"/>
-              <a:t>A </a:t>
-            </a:r>
-            <a:r>
-              <a:rPr lang="hu-HU" dirty="0" err="1"/>
-              <a:t>tuple</a:t>
-            </a:r>
-            <a:r>
-              <a:rPr lang="hu-HU" dirty="0"/>
-              <a:t> és a </a:t>
-            </a:r>
-            <a:r>
-              <a:rPr lang="hu-HU" dirty="0" err="1"/>
-              <a:t>set</a:t>
-            </a:r>
-            <a:r>
-              <a:rPr lang="hu-HU" dirty="0"/>
-              <a:t> konténer típusok</a:t>
-            </a:r>
-          </a:p>
-        </p:txBody>
-      </p:sp>
-      <p:sp>
-        <p:nvSpPr>
-          <p:cNvPr id="11" name="Tartalom helye 10">
-            <a:extLst>
-              <a:ext uri="{FF2B5EF4-FFF2-40B4-BE49-F238E27FC236}">
-                <a16:creationId xmlns:a16="http://schemas.microsoft.com/office/drawing/2014/main" id="{1304DAAD-A571-195A-29C9-8BA795B1C660}"/>
-              </a:ext>
-            </a:extLst>
-          </p:cNvPr>
-          <p:cNvSpPr>
-            <a:spLocks noGrp="1"/>
-          </p:cNvSpPr>
-          <p:nvPr>
-            <p:ph idx="1"/>
-          </p:nvPr>
-        </p:nvSpPr>
-        <p:spPr/>
-        <p:txBody>
-          <a:bodyPr>
-            <a:normAutofit fontScale="92500" lnSpcReduction="10000"/>
-          </a:bodyPr>
-          <a:lstStyle/>
-          <a:p>
-            <a:r>
-              <a:rPr lang="hu-HU" dirty="0"/>
-              <a:t>A </a:t>
-            </a:r>
-            <a:r>
-              <a:rPr lang="hu-HU" dirty="0" err="1"/>
-              <a:t>dict</a:t>
-            </a:r>
-            <a:r>
-              <a:rPr lang="hu-HU" dirty="0"/>
-              <a:t> típus, Műveletek </a:t>
-            </a:r>
-            <a:r>
-              <a:rPr lang="hu-HU" dirty="0" err="1"/>
-              <a:t>dict</a:t>
-            </a:r>
-            <a:r>
-              <a:rPr lang="hu-HU" dirty="0"/>
-              <a:t>-tel: módosítás index alapján, pop(), update(), </a:t>
-            </a:r>
-            <a:r>
-              <a:rPr lang="hu-HU" dirty="0" err="1"/>
-              <a:t>copy</a:t>
-            </a:r>
-            <a:r>
-              <a:rPr lang="hu-HU" dirty="0"/>
-              <a:t>(), </a:t>
-            </a:r>
-            <a:r>
-              <a:rPr lang="hu-HU" dirty="0" err="1"/>
-              <a:t>dict</a:t>
-            </a:r>
-            <a:r>
-              <a:rPr lang="hu-HU" dirty="0"/>
-              <a:t>()</a:t>
-            </a:r>
-          </a:p>
-          <a:p>
-            <a:r>
-              <a:rPr lang="hu-HU" dirty="0"/>
-              <a:t>A </a:t>
-            </a:r>
-            <a:r>
-              <a:rPr lang="hu-HU" dirty="0" err="1"/>
-              <a:t>keys</a:t>
-            </a:r>
-            <a:r>
-              <a:rPr lang="hu-HU" dirty="0"/>
-              <a:t>(), </a:t>
-            </a:r>
-            <a:r>
-              <a:rPr lang="hu-HU" dirty="0" err="1"/>
-              <a:t>values</a:t>
-            </a:r>
-            <a:r>
-              <a:rPr lang="hu-HU" dirty="0"/>
-              <a:t>(), </a:t>
-            </a:r>
-            <a:r>
-              <a:rPr lang="hu-HU" dirty="0" err="1"/>
-              <a:t>items</a:t>
-            </a:r>
-            <a:r>
-              <a:rPr lang="hu-HU" dirty="0"/>
-              <a:t>() metódusok és az </a:t>
-            </a:r>
-            <a:r>
-              <a:rPr lang="hu-HU" dirty="0" err="1"/>
-              <a:t>enumerate</a:t>
-            </a:r>
-            <a:r>
-              <a:rPr lang="hu-HU" dirty="0"/>
-              <a:t>() függvény</a:t>
-            </a:r>
-          </a:p>
-          <a:p>
-            <a:r>
-              <a:rPr lang="hu-HU" dirty="0" err="1"/>
-              <a:t>Dict</a:t>
-            </a:r>
-            <a:r>
-              <a:rPr lang="hu-HU" dirty="0"/>
-              <a:t> bejárása ciklussal</a:t>
-            </a:r>
-          </a:p>
-          <a:p>
-            <a:r>
-              <a:rPr lang="hu-HU" dirty="0" err="1"/>
-              <a:t>Dict</a:t>
-            </a:r>
-            <a:r>
-              <a:rPr lang="hu-HU" dirty="0"/>
-              <a:t> </a:t>
-            </a:r>
-            <a:r>
-              <a:rPr lang="hu-HU" dirty="0" err="1"/>
-              <a:t>unpacking</a:t>
-            </a:r>
-            <a:endParaRPr lang="hu-HU" dirty="0"/>
-          </a:p>
-          <a:p>
-            <a:r>
-              <a:rPr lang="hu-HU" dirty="0"/>
-              <a:t>CRUD műveletek: </a:t>
-            </a:r>
-            <a:r>
-              <a:rPr lang="hu-HU" dirty="0" err="1"/>
-              <a:t>read</a:t>
-            </a:r>
-            <a:endParaRPr lang="hu-HU" dirty="0"/>
-          </a:p>
-          <a:p>
-            <a:r>
-              <a:rPr lang="hu-HU" dirty="0"/>
-              <a:t>CRUD műveletek: update</a:t>
-            </a:r>
-          </a:p>
-          <a:p>
-            <a:r>
-              <a:rPr lang="hu-HU" dirty="0"/>
-              <a:t>CRUD műveletek: </a:t>
-            </a:r>
-            <a:r>
-              <a:rPr lang="hu-HU" dirty="0" err="1"/>
-              <a:t>create</a:t>
-            </a:r>
-            <a:endParaRPr lang="hu-HU" dirty="0"/>
-          </a:p>
-          <a:p>
-            <a:r>
-              <a:rPr lang="hu-HU" dirty="0"/>
-              <a:t>CRUD műveletek: </a:t>
-            </a:r>
-            <a:r>
-              <a:rPr lang="hu-HU" dirty="0" err="1"/>
-              <a:t>delete</a:t>
-            </a:r>
-            <a:endParaRPr lang="hu-HU" dirty="0"/>
-          </a:p>
-          <a:p>
-            <a:r>
-              <a:rPr lang="hu-HU" dirty="0"/>
-              <a:t>CRUD: </a:t>
-            </a:r>
-            <a:r>
-              <a:rPr lang="hu-HU" dirty="0" err="1"/>
-              <a:t>újrafelhasználhatóvá</a:t>
-            </a:r>
-            <a:r>
-              <a:rPr lang="hu-HU"/>
-              <a:t> tétel</a:t>
-            </a:r>
             <a:endParaRPr lang="hu-HU" dirty="0"/>
           </a:p>
         </p:txBody>
@@ -5073,7 +5035,7 @@
     </p:spTree>
     <p:extLst>
       <p:ext uri="{BB962C8B-B14F-4D97-AF65-F5344CB8AC3E}">
-        <p14:creationId xmlns:p14="http://schemas.microsoft.com/office/powerpoint/2010/main" val="3829063260"/>
+        <p14:creationId xmlns:p14="http://schemas.microsoft.com/office/powerpoint/2010/main" val="2577954397"/>
       </p:ext>
     </p:extLst>
   </p:cSld>
@@ -5123,7 +5085,7 @@
           <a:p>
             <a:r>
               <a:rPr lang="hu-HU" dirty="0"/>
-              <a:t>Miről lesz szó? </a:t>
+              <a:t>Miről lesz szó?</a:t>
             </a:r>
           </a:p>
         </p:txBody>
@@ -5151,128 +5113,293 @@
           </a:bodyPr>
           <a:lstStyle/>
           <a:p>
-            <a:r>
-              <a:rPr lang="hu-HU" dirty="0"/>
+            <a:pPr marL="514350" indent="-514350">
+              <a:buFont typeface="+mj-lt"/>
+              <a:buAutoNum type="arabicPeriod"/>
+            </a:pPr>
+            <a:r>
+              <a:rPr lang="hu-HU" b="0" i="0" dirty="0">
+                <a:solidFill>
+                  <a:srgbClr val="232629"/>
+                </a:solidFill>
+                <a:effectLst/>
+                <a:latin typeface="ui-monospace"/>
+              </a:rPr>
               <a:t>A Python nyelv, fejlesztő környezet, számok és operátorok</a:t>
             </a:r>
           </a:p>
           <a:p>
-            <a:r>
-              <a:rPr lang="hu-HU" dirty="0"/>
+            <a:pPr marL="514350" indent="-514350">
+              <a:buFont typeface="+mj-lt"/>
+              <a:buAutoNum type="arabicPeriod"/>
+            </a:pPr>
+            <a:r>
+              <a:rPr lang="hu-HU" b="0" i="0" dirty="0">
+                <a:solidFill>
+                  <a:srgbClr val="232629"/>
+                </a:solidFill>
+                <a:effectLst/>
+                <a:latin typeface="ui-monospace"/>
+              </a:rPr>
               <a:t>Alap adattípusok, operátorok</a:t>
             </a:r>
           </a:p>
           <a:p>
-            <a:r>
-              <a:rPr lang="hu-HU" dirty="0"/>
+            <a:pPr marL="514350" indent="-514350">
+              <a:buFont typeface="+mj-lt"/>
+              <a:buAutoNum type="arabicPeriod"/>
+            </a:pPr>
+            <a:r>
+              <a:rPr lang="hu-HU" b="0" i="0" dirty="0">
+                <a:solidFill>
+                  <a:srgbClr val="232629"/>
+                </a:solidFill>
+                <a:effectLst/>
+                <a:latin typeface="ui-monospace"/>
+              </a:rPr>
               <a:t>A </a:t>
             </a:r>
             <a:r>
-              <a:rPr lang="hu-HU" dirty="0" err="1"/>
+              <a:rPr lang="hu-HU" b="0" i="0" dirty="0" err="1">
+                <a:solidFill>
+                  <a:srgbClr val="232629"/>
+                </a:solidFill>
+                <a:effectLst/>
+                <a:latin typeface="ui-monospace"/>
+              </a:rPr>
               <a:t>list</a:t>
             </a:r>
             <a:r>
-              <a:rPr lang="hu-HU" dirty="0"/>
+              <a:rPr lang="hu-HU" b="0" i="0" dirty="0">
+                <a:solidFill>
+                  <a:srgbClr val="232629"/>
+                </a:solidFill>
+                <a:effectLst/>
+                <a:latin typeface="ui-monospace"/>
+              </a:rPr>
               <a:t> konténer típus, ciklusok</a:t>
             </a:r>
           </a:p>
           <a:p>
-            <a:r>
-              <a:rPr lang="hu-HU" dirty="0" err="1"/>
-              <a:t>if</a:t>
-            </a:r>
-            <a:r>
-              <a:rPr lang="hu-HU" dirty="0"/>
-              <a:t> </a:t>
-            </a:r>
-            <a:r>
-              <a:rPr lang="hu-HU" dirty="0" err="1"/>
-              <a:t>else</a:t>
-            </a:r>
-            <a:r>
-              <a:rPr lang="hu-HU" dirty="0"/>
-              <a:t> vezérlési szerkezet, vezérlési szerkezetek egymásba ágyazása</a:t>
-            </a:r>
-          </a:p>
-          <a:p>
-            <a:r>
-              <a:rPr lang="hu-HU" dirty="0"/>
+            <a:pPr marL="514350" indent="-514350">
+              <a:buFont typeface="+mj-lt"/>
+              <a:buAutoNum type="arabicPeriod"/>
+            </a:pPr>
+            <a:r>
+              <a:rPr lang="hu-HU" b="0" i="0" dirty="0">
+                <a:solidFill>
+                  <a:srgbClr val="232629"/>
+                </a:solidFill>
+                <a:effectLst/>
+                <a:latin typeface="ui-monospace"/>
+              </a:rPr>
+              <a:t>További vezérlési szerkezetek</a:t>
+            </a:r>
+          </a:p>
+          <a:p>
+            <a:pPr marL="514350" indent="-514350">
+              <a:buFont typeface="+mj-lt"/>
+              <a:buAutoNum type="arabicPeriod"/>
+            </a:pPr>
+            <a:r>
+              <a:rPr lang="hu-HU" b="0" i="0" dirty="0">
+                <a:solidFill>
+                  <a:srgbClr val="232629"/>
+                </a:solidFill>
+                <a:effectLst/>
+                <a:latin typeface="ui-monospace"/>
+              </a:rPr>
               <a:t>Listák kezelésének haladó technikái</a:t>
             </a:r>
           </a:p>
           <a:p>
-            <a:r>
-              <a:rPr lang="hu-HU" dirty="0"/>
+            <a:pPr marL="514350" indent="-514350">
+              <a:buFont typeface="+mj-lt"/>
+              <a:buAutoNum type="arabicPeriod"/>
+            </a:pPr>
+            <a:r>
+              <a:rPr lang="hu-HU" b="0" i="0" dirty="0">
+                <a:solidFill>
+                  <a:srgbClr val="232629"/>
+                </a:solidFill>
+                <a:effectLst/>
+                <a:latin typeface="ui-monospace"/>
+              </a:rPr>
               <a:t>Függvények</a:t>
             </a:r>
           </a:p>
           <a:p>
-            <a:r>
-              <a:rPr lang="hu-HU" dirty="0"/>
+            <a:pPr marL="514350" indent="-514350">
+              <a:buFont typeface="+mj-lt"/>
+              <a:buAutoNum type="arabicPeriod"/>
+            </a:pPr>
+            <a:r>
+              <a:rPr lang="hu-HU" b="0" i="0" dirty="0">
+                <a:solidFill>
+                  <a:srgbClr val="232629"/>
+                </a:solidFill>
+                <a:effectLst/>
+                <a:latin typeface="ui-monospace"/>
+              </a:rPr>
               <a:t>Nevezetes algoritmusok</a:t>
             </a:r>
           </a:p>
           <a:p>
-            <a:r>
-              <a:rPr lang="hu-HU" dirty="0"/>
+            <a:pPr marL="514350" indent="-514350">
+              <a:buFont typeface="+mj-lt"/>
+              <a:buAutoNum type="arabicPeriod"/>
+            </a:pPr>
+            <a:r>
+              <a:rPr lang="hu-HU" b="0" i="0" dirty="0">
+                <a:solidFill>
+                  <a:srgbClr val="232629"/>
+                </a:solidFill>
+                <a:effectLst/>
+                <a:latin typeface="ui-monospace"/>
+              </a:rPr>
               <a:t>A </a:t>
             </a:r>
             <a:r>
-              <a:rPr lang="hu-HU" dirty="0" err="1"/>
+              <a:rPr lang="hu-HU" b="0" i="0" dirty="0" err="1">
+                <a:solidFill>
+                  <a:srgbClr val="232629"/>
+                </a:solidFill>
+                <a:effectLst/>
+                <a:latin typeface="ui-monospace"/>
+              </a:rPr>
               <a:t>tuple</a:t>
             </a:r>
             <a:r>
-              <a:rPr lang="hu-HU" dirty="0"/>
+              <a:rPr lang="hu-HU" b="0" i="0" dirty="0">
+                <a:solidFill>
+                  <a:srgbClr val="232629"/>
+                </a:solidFill>
+                <a:effectLst/>
+                <a:latin typeface="ui-monospace"/>
+              </a:rPr>
               <a:t> és a </a:t>
             </a:r>
             <a:r>
-              <a:rPr lang="hu-HU" dirty="0" err="1"/>
+              <a:rPr lang="hu-HU" b="0" i="0" dirty="0" err="1">
+                <a:solidFill>
+                  <a:srgbClr val="232629"/>
+                </a:solidFill>
+                <a:effectLst/>
+                <a:latin typeface="ui-monospace"/>
+              </a:rPr>
               <a:t>set</a:t>
             </a:r>
             <a:r>
-              <a:rPr lang="hu-HU" dirty="0"/>
+              <a:rPr lang="hu-HU" b="0" i="0" dirty="0">
+                <a:solidFill>
+                  <a:srgbClr val="232629"/>
+                </a:solidFill>
+                <a:effectLst/>
+                <a:latin typeface="ui-monospace"/>
+              </a:rPr>
               <a:t> konténer típusok</a:t>
             </a:r>
           </a:p>
           <a:p>
-            <a:r>
-              <a:rPr lang="hu-HU" dirty="0"/>
+            <a:pPr marL="514350" indent="-514350">
+              <a:buFont typeface="+mj-lt"/>
+              <a:buAutoNum type="arabicPeriod"/>
+            </a:pPr>
+            <a:r>
+              <a:rPr lang="hu-HU" b="0" i="0" dirty="0">
+                <a:solidFill>
+                  <a:srgbClr val="232629"/>
+                </a:solidFill>
+                <a:effectLst/>
+                <a:latin typeface="ui-monospace"/>
+              </a:rPr>
               <a:t>A </a:t>
             </a:r>
             <a:r>
-              <a:rPr lang="hu-HU" dirty="0" err="1"/>
+              <a:rPr lang="hu-HU" b="0" i="0" dirty="0" err="1">
+                <a:solidFill>
+                  <a:srgbClr val="232629"/>
+                </a:solidFill>
+                <a:effectLst/>
+                <a:latin typeface="ui-monospace"/>
+              </a:rPr>
               <a:t>dict</a:t>
             </a:r>
             <a:r>
-              <a:rPr lang="hu-HU" dirty="0"/>
+              <a:rPr lang="hu-HU" b="0" i="0" dirty="0">
+                <a:solidFill>
+                  <a:srgbClr val="232629"/>
+                </a:solidFill>
+                <a:effectLst/>
+                <a:latin typeface="ui-monospace"/>
+              </a:rPr>
               <a:t> konténer típus, CRUD műveletek</a:t>
             </a:r>
           </a:p>
           <a:p>
-            <a:r>
-              <a:rPr lang="hu-HU" dirty="0"/>
+            <a:pPr marL="514350" indent="-514350">
+              <a:buFont typeface="+mj-lt"/>
+              <a:buAutoNum type="arabicPeriod"/>
+            </a:pPr>
+            <a:r>
+              <a:rPr lang="hu-HU" b="0" i="0" dirty="0">
+                <a:solidFill>
+                  <a:srgbClr val="232629"/>
+                </a:solidFill>
+                <a:effectLst/>
+                <a:latin typeface="ui-monospace"/>
+              </a:rPr>
               <a:t>A Python modulrendszere, standard </a:t>
             </a:r>
             <a:r>
-              <a:rPr lang="hu-HU" dirty="0" err="1"/>
+              <a:rPr lang="hu-HU" b="0" i="0" dirty="0" err="1">
+                <a:solidFill>
+                  <a:srgbClr val="232629"/>
+                </a:solidFill>
+                <a:effectLst/>
+                <a:latin typeface="ui-monospace"/>
+              </a:rPr>
               <a:t>library</a:t>
             </a:r>
-            <a:endParaRPr lang="hu-HU" dirty="0"/>
-          </a:p>
-          <a:p>
-            <a:r>
-              <a:rPr lang="hu-HU" dirty="0"/>
+            <a:endParaRPr lang="hu-HU" b="0" i="0" dirty="0">
+              <a:solidFill>
+                <a:srgbClr val="232629"/>
+              </a:solidFill>
+              <a:effectLst/>
+              <a:latin typeface="ui-monospace"/>
+            </a:endParaRPr>
+          </a:p>
+          <a:p>
+            <a:pPr marL="514350" indent="-514350">
+              <a:buFont typeface="+mj-lt"/>
+              <a:buAutoNum type="arabicPeriod"/>
+            </a:pPr>
+            <a:r>
+              <a:rPr lang="hu-HU" b="0" i="0" dirty="0">
+                <a:solidFill>
+                  <a:srgbClr val="232629"/>
+                </a:solidFill>
+                <a:effectLst/>
+                <a:latin typeface="ui-monospace"/>
+              </a:rPr>
               <a:t>Fájlkezelés</a:t>
             </a:r>
           </a:p>
           <a:p>
-            <a:r>
-              <a:rPr lang="hu-HU" dirty="0"/>
+            <a:pPr marL="514350" indent="-514350">
+              <a:buFont typeface="+mj-lt"/>
+              <a:buAutoNum type="arabicPeriod"/>
+            </a:pPr>
+            <a:r>
+              <a:rPr lang="hu-HU" b="0" i="0" dirty="0">
+                <a:solidFill>
+                  <a:srgbClr val="232629"/>
+                </a:solidFill>
+                <a:effectLst/>
+                <a:latin typeface="ui-monospace"/>
+              </a:rPr>
               <a:t>Összetett feladat</a:t>
             </a:r>
-          </a:p>
-          <a:p>
-            <a:endParaRPr lang="hu-HU" dirty="0"/>
           </a:p>
         </p:txBody>
       </p:sp>
@@ -5313,10 +5440,10 @@
       </p:grpSpPr>
       <p:sp>
         <p:nvSpPr>
-          <p:cNvPr id="2" name="Cím 1">
-            <a:extLst>
-              <a:ext uri="{FF2B5EF4-FFF2-40B4-BE49-F238E27FC236}">
-                <a16:creationId xmlns:a16="http://schemas.microsoft.com/office/drawing/2014/main" id="{67E45071-3E91-3975-958C-43782E39B6B9}"/>
+          <p:cNvPr id="10" name="Cím 9">
+            <a:extLst>
+              <a:ext uri="{FF2B5EF4-FFF2-40B4-BE49-F238E27FC236}">
+                <a16:creationId xmlns:a16="http://schemas.microsoft.com/office/drawing/2014/main" id="{026B303C-F00B-C202-DACD-409846B572C8}"/>
               </a:ext>
             </a:extLst>
           </p:cNvPr>
@@ -5325,42 +5452,6 @@
           </p:cNvSpPr>
           <p:nvPr>
             <p:ph type="title"/>
-          </p:nvPr>
-        </p:nvSpPr>
-        <p:spPr/>
-        <p:txBody>
-          <a:bodyPr/>
-          <a:lstStyle/>
-          <a:p>
-            <a:r>
-              <a:rPr lang="hu-HU" dirty="0"/>
-              <a:t>A </a:t>
-            </a:r>
-            <a:r>
-              <a:rPr lang="hu-HU" dirty="0" err="1"/>
-              <a:t>dict</a:t>
-            </a:r>
-            <a:r>
-              <a:rPr lang="hu-HU" dirty="0"/>
-              <a:t> konténer típus, CRUD műveletek</a:t>
-            </a:r>
-          </a:p>
-        </p:txBody>
-      </p:sp>
-      <p:sp>
-        <p:nvSpPr>
-          <p:cNvPr id="3" name="Tartalom helye 2">
-            <a:extLst>
-              <a:ext uri="{FF2B5EF4-FFF2-40B4-BE49-F238E27FC236}">
-                <a16:creationId xmlns:a16="http://schemas.microsoft.com/office/drawing/2014/main" id="{0F52A367-7627-7B81-0E00-66AB83DC996D}"/>
-              </a:ext>
-            </a:extLst>
-          </p:cNvPr>
-          <p:cNvSpPr>
-            <a:spLocks noGrp="1"/>
-          </p:cNvSpPr>
-          <p:nvPr>
-            <p:ph type="body" idx="1"/>
           </p:nvPr>
         </p:nvSpPr>
         <p:spPr/>
@@ -5370,14 +5461,236 @@
           </a:bodyPr>
           <a:lstStyle/>
           <a:p>
+            <a:r>
+              <a:rPr lang="hu-HU" dirty="0"/>
+              <a:t>A </a:t>
+            </a:r>
+            <a:r>
+              <a:rPr lang="hu-HU" dirty="0" err="1"/>
+              <a:t>dict</a:t>
+            </a:r>
+            <a:r>
+              <a:rPr lang="hu-HU" dirty="0"/>
+              <a:t> konténer típus, CRUD műveletek</a:t>
+            </a:r>
+          </a:p>
+        </p:txBody>
+      </p:sp>
+      <p:sp>
+        <p:nvSpPr>
+          <p:cNvPr id="11" name="Tartalom helye 10">
+            <a:extLst>
+              <a:ext uri="{FF2B5EF4-FFF2-40B4-BE49-F238E27FC236}">
+                <a16:creationId xmlns:a16="http://schemas.microsoft.com/office/drawing/2014/main" id="{1304DAAD-A571-195A-29C9-8BA795B1C660}"/>
+              </a:ext>
+            </a:extLst>
+          </p:cNvPr>
+          <p:cNvSpPr>
+            <a:spLocks noGrp="1"/>
+          </p:cNvSpPr>
+          <p:nvPr>
+            <p:ph idx="1"/>
+          </p:nvPr>
+        </p:nvSpPr>
+        <p:spPr/>
+        <p:txBody>
+          <a:bodyPr>
+            <a:normAutofit fontScale="85000" lnSpcReduction="20000"/>
+          </a:bodyPr>
+          <a:lstStyle/>
+          <a:p>
+            <a:r>
+              <a:rPr lang="hu-HU" dirty="0"/>
+              <a:t>A </a:t>
+            </a:r>
+            <a:r>
+              <a:rPr lang="hu-HU" dirty="0" err="1"/>
+              <a:t>tuple</a:t>
+            </a:r>
+            <a:r>
+              <a:rPr lang="hu-HU" dirty="0"/>
+              <a:t> típus</a:t>
+            </a:r>
+          </a:p>
+          <a:p>
+            <a:r>
+              <a:rPr lang="hu-HU" dirty="0"/>
+              <a:t>A + operátor használata</a:t>
+            </a:r>
+          </a:p>
+          <a:p>
+            <a:r>
+              <a:rPr lang="hu-HU" dirty="0"/>
+              <a:t>Elem beszúrása </a:t>
+            </a:r>
+            <a:r>
+              <a:rPr lang="hu-HU" dirty="0" err="1"/>
+              <a:t>tuple</a:t>
+            </a:r>
+            <a:r>
+              <a:rPr lang="hu-HU" dirty="0"/>
+              <a:t>-be</a:t>
+            </a:r>
+          </a:p>
+          <a:p>
+            <a:r>
+              <a:rPr lang="hu-HU" dirty="0" err="1"/>
+              <a:t>Tuple</a:t>
+            </a:r>
+            <a:r>
+              <a:rPr lang="hu-HU" dirty="0"/>
+              <a:t> módosítása</a:t>
+            </a:r>
+          </a:p>
+          <a:p>
+            <a:r>
+              <a:rPr lang="hu-HU" dirty="0" err="1"/>
+              <a:t>Tuple</a:t>
+            </a:r>
+            <a:r>
+              <a:rPr lang="hu-HU" dirty="0"/>
+              <a:t> bejárása ciklussal</a:t>
+            </a:r>
+          </a:p>
+          <a:p>
+            <a:r>
+              <a:rPr lang="hu-HU" dirty="0"/>
+              <a:t>A </a:t>
+            </a:r>
+            <a:r>
+              <a:rPr lang="hu-HU" dirty="0" err="1"/>
+              <a:t>tuple</a:t>
+            </a:r>
+            <a:r>
+              <a:rPr lang="hu-HU" dirty="0"/>
+              <a:t> felhasználása valós életben</a:t>
+            </a:r>
+          </a:p>
+          <a:p>
+            <a:r>
+              <a:rPr lang="hu-HU" dirty="0" err="1"/>
+              <a:t>Tuple</a:t>
+            </a:r>
+            <a:r>
+              <a:rPr lang="hu-HU" dirty="0"/>
+              <a:t> </a:t>
+            </a:r>
+            <a:r>
+              <a:rPr lang="hu-HU" dirty="0" err="1"/>
+              <a:t>unpacking</a:t>
+            </a:r>
             <a:endParaRPr lang="hu-HU" dirty="0"/>
+          </a:p>
+          <a:p>
+            <a:r>
+              <a:rPr lang="hu-HU" dirty="0"/>
+              <a:t>A </a:t>
+            </a:r>
+            <a:r>
+              <a:rPr lang="hu-HU" dirty="0" err="1"/>
+              <a:t>set</a:t>
+            </a:r>
+            <a:r>
+              <a:rPr lang="hu-HU" dirty="0"/>
+              <a:t> típus</a:t>
+            </a:r>
+          </a:p>
+          <a:p>
+            <a:r>
+              <a:rPr lang="hu-HU" dirty="0" err="1"/>
+              <a:t>Set</a:t>
+            </a:r>
+            <a:r>
+              <a:rPr lang="hu-HU" dirty="0"/>
+              <a:t> metódusok: add(), update(), </a:t>
+            </a:r>
+            <a:r>
+              <a:rPr lang="hu-HU" dirty="0" err="1"/>
+              <a:t>remove</a:t>
+            </a:r>
+            <a:r>
+              <a:rPr lang="hu-HU" dirty="0"/>
+              <a:t>(), </a:t>
+            </a:r>
+            <a:r>
+              <a:rPr lang="hu-HU" dirty="0" err="1"/>
+              <a:t>discard</a:t>
+            </a:r>
+            <a:r>
+              <a:rPr lang="hu-HU" dirty="0"/>
+              <a:t>()</a:t>
+            </a:r>
+          </a:p>
+          <a:p>
+            <a:r>
+              <a:rPr lang="hu-HU" dirty="0"/>
+              <a:t>Halmazműveletek: </a:t>
+            </a:r>
+            <a:r>
+              <a:rPr lang="hu-HU" dirty="0" err="1"/>
+              <a:t>union</a:t>
+            </a:r>
+            <a:r>
+              <a:rPr lang="hu-HU" dirty="0"/>
+              <a:t>(), </a:t>
+            </a:r>
+            <a:r>
+              <a:rPr lang="hu-HU" dirty="0" err="1"/>
+              <a:t>intersection</a:t>
+            </a:r>
+            <a:r>
+              <a:rPr lang="hu-HU" dirty="0"/>
+              <a:t>(), </a:t>
+            </a:r>
+            <a:r>
+              <a:rPr lang="hu-HU" dirty="0" err="1"/>
+              <a:t>difference</a:t>
+            </a:r>
+            <a:r>
+              <a:rPr lang="hu-HU" dirty="0"/>
+              <a:t>(), </a:t>
+            </a:r>
+            <a:r>
+              <a:rPr lang="hu-HU" dirty="0" err="1"/>
+              <a:t>issuperset</a:t>
+            </a:r>
+            <a:r>
+              <a:rPr lang="hu-HU" dirty="0"/>
+              <a:t>(), </a:t>
+            </a:r>
+            <a:r>
+              <a:rPr lang="hu-HU" dirty="0" err="1"/>
+              <a:t>issubset</a:t>
+            </a:r>
+            <a:r>
+              <a:rPr lang="hu-HU" dirty="0"/>
+              <a:t>()</a:t>
+            </a:r>
+          </a:p>
+          <a:p>
+            <a:r>
+              <a:rPr lang="hu-HU" dirty="0" err="1"/>
+              <a:t>Set</a:t>
+            </a:r>
+            <a:r>
+              <a:rPr lang="hu-HU" dirty="0"/>
+              <a:t> bejárása </a:t>
+            </a:r>
+            <a:r>
+              <a:rPr lang="hu-HU" dirty="0" err="1"/>
+              <a:t>for</a:t>
+            </a:r>
+            <a:r>
+              <a:rPr lang="hu-HU" dirty="0"/>
+              <a:t> ciklussal</a:t>
+            </a:r>
           </a:p>
         </p:txBody>
       </p:sp>
     </p:spTree>
     <p:extLst>
       <p:ext uri="{BB962C8B-B14F-4D97-AF65-F5344CB8AC3E}">
-        <p14:creationId xmlns:p14="http://schemas.microsoft.com/office/powerpoint/2010/main" val="2577954397"/>
+        <p14:creationId xmlns:p14="http://schemas.microsoft.com/office/powerpoint/2010/main" val="3762969098"/>
       </p:ext>
     </p:extLst>
   </p:cSld>
@@ -5406,10 +5719,10 @@
       </p:grpSpPr>
       <p:sp>
         <p:nvSpPr>
-          <p:cNvPr id="10" name="Cím 9">
-            <a:extLst>
-              <a:ext uri="{FF2B5EF4-FFF2-40B4-BE49-F238E27FC236}">
-                <a16:creationId xmlns:a16="http://schemas.microsoft.com/office/drawing/2014/main" id="{026B303C-F00B-C202-DACD-409846B572C8}"/>
+          <p:cNvPr id="2" name="Cím 1">
+            <a:extLst>
+              <a:ext uri="{FF2B5EF4-FFF2-40B4-BE49-F238E27FC236}">
+                <a16:creationId xmlns:a16="http://schemas.microsoft.com/office/drawing/2014/main" id="{67E45071-3E91-3975-958C-43782E39B6B9}"/>
               </a:ext>
             </a:extLst>
           </p:cNvPr>
@@ -5418,6 +5731,39 @@
           </p:cNvSpPr>
           <p:nvPr>
             <p:ph type="title"/>
+          </p:nvPr>
+        </p:nvSpPr>
+        <p:spPr/>
+        <p:txBody>
+          <a:bodyPr/>
+          <a:lstStyle/>
+          <a:p>
+            <a:r>
+              <a:rPr lang="hu-HU" dirty="0"/>
+              <a:t>A Python modulrendszere, standard </a:t>
+            </a:r>
+            <a:r>
+              <a:rPr lang="hu-HU" dirty="0" err="1"/>
+              <a:t>library</a:t>
+            </a:r>
+            <a:endParaRPr lang="hu-HU" dirty="0"/>
+          </a:p>
+        </p:txBody>
+      </p:sp>
+      <p:sp>
+        <p:nvSpPr>
+          <p:cNvPr id="3" name="Tartalom helye 2">
+            <a:extLst>
+              <a:ext uri="{FF2B5EF4-FFF2-40B4-BE49-F238E27FC236}">
+                <a16:creationId xmlns:a16="http://schemas.microsoft.com/office/drawing/2014/main" id="{0F52A367-7627-7B81-0E00-66AB83DC996D}"/>
+              </a:ext>
+            </a:extLst>
+          </p:cNvPr>
+          <p:cNvSpPr>
+            <a:spLocks noGrp="1"/>
+          </p:cNvSpPr>
+          <p:nvPr>
+            <p:ph type="body" idx="1"/>
           </p:nvPr>
         </p:nvSpPr>
         <p:spPr/>
@@ -5427,236 +5773,14 @@
           </a:bodyPr>
           <a:lstStyle/>
           <a:p>
-            <a:r>
-              <a:rPr lang="hu-HU" dirty="0"/>
-              <a:t>A </a:t>
-            </a:r>
-            <a:r>
-              <a:rPr lang="hu-HU" dirty="0" err="1"/>
-              <a:t>dict</a:t>
-            </a:r>
-            <a:r>
-              <a:rPr lang="hu-HU" dirty="0"/>
-              <a:t> konténer típus, CRUD műveletek</a:t>
-            </a:r>
-          </a:p>
-        </p:txBody>
-      </p:sp>
-      <p:sp>
-        <p:nvSpPr>
-          <p:cNvPr id="11" name="Tartalom helye 10">
-            <a:extLst>
-              <a:ext uri="{FF2B5EF4-FFF2-40B4-BE49-F238E27FC236}">
-                <a16:creationId xmlns:a16="http://schemas.microsoft.com/office/drawing/2014/main" id="{1304DAAD-A571-195A-29C9-8BA795B1C660}"/>
-              </a:ext>
-            </a:extLst>
-          </p:cNvPr>
-          <p:cNvSpPr>
-            <a:spLocks noGrp="1"/>
-          </p:cNvSpPr>
-          <p:nvPr>
-            <p:ph idx="1"/>
-          </p:nvPr>
-        </p:nvSpPr>
-        <p:spPr/>
-        <p:txBody>
-          <a:bodyPr>
-            <a:normAutofit fontScale="85000" lnSpcReduction="20000"/>
-          </a:bodyPr>
-          <a:lstStyle/>
-          <a:p>
-            <a:r>
-              <a:rPr lang="hu-HU" dirty="0"/>
-              <a:t>A </a:t>
-            </a:r>
-            <a:r>
-              <a:rPr lang="hu-HU" dirty="0" err="1"/>
-              <a:t>tuple</a:t>
-            </a:r>
-            <a:r>
-              <a:rPr lang="hu-HU" dirty="0"/>
-              <a:t> típus</a:t>
-            </a:r>
-          </a:p>
-          <a:p>
-            <a:r>
-              <a:rPr lang="hu-HU" dirty="0"/>
-              <a:t>A + operátor használata</a:t>
-            </a:r>
-          </a:p>
-          <a:p>
-            <a:r>
-              <a:rPr lang="hu-HU" dirty="0"/>
-              <a:t>Elem beszúrása </a:t>
-            </a:r>
-            <a:r>
-              <a:rPr lang="hu-HU" dirty="0" err="1"/>
-              <a:t>tuple</a:t>
-            </a:r>
-            <a:r>
-              <a:rPr lang="hu-HU" dirty="0"/>
-              <a:t>-be</a:t>
-            </a:r>
-          </a:p>
-          <a:p>
-            <a:r>
-              <a:rPr lang="hu-HU" dirty="0" err="1"/>
-              <a:t>Tuple</a:t>
-            </a:r>
-            <a:r>
-              <a:rPr lang="hu-HU" dirty="0"/>
-              <a:t> módosítása</a:t>
-            </a:r>
-          </a:p>
-          <a:p>
-            <a:r>
-              <a:rPr lang="hu-HU" dirty="0" err="1"/>
-              <a:t>Tuple</a:t>
-            </a:r>
-            <a:r>
-              <a:rPr lang="hu-HU" dirty="0"/>
-              <a:t> bejárása ciklussal</a:t>
-            </a:r>
-          </a:p>
-          <a:p>
-            <a:r>
-              <a:rPr lang="hu-HU" dirty="0"/>
-              <a:t>A </a:t>
-            </a:r>
-            <a:r>
-              <a:rPr lang="hu-HU" dirty="0" err="1"/>
-              <a:t>tuple</a:t>
-            </a:r>
-            <a:r>
-              <a:rPr lang="hu-HU" dirty="0"/>
-              <a:t> felhasználása valós életben</a:t>
-            </a:r>
-          </a:p>
-          <a:p>
-            <a:r>
-              <a:rPr lang="hu-HU" dirty="0" err="1"/>
-              <a:t>Tuple</a:t>
-            </a:r>
-            <a:r>
-              <a:rPr lang="hu-HU" dirty="0"/>
-              <a:t> </a:t>
-            </a:r>
-            <a:r>
-              <a:rPr lang="hu-HU" dirty="0" err="1"/>
-              <a:t>unpacking</a:t>
-            </a:r>
             <a:endParaRPr lang="hu-HU" dirty="0"/>
-          </a:p>
-          <a:p>
-            <a:r>
-              <a:rPr lang="hu-HU" dirty="0"/>
-              <a:t>A </a:t>
-            </a:r>
-            <a:r>
-              <a:rPr lang="hu-HU" dirty="0" err="1"/>
-              <a:t>set</a:t>
-            </a:r>
-            <a:r>
-              <a:rPr lang="hu-HU" dirty="0"/>
-              <a:t> típus</a:t>
-            </a:r>
-          </a:p>
-          <a:p>
-            <a:r>
-              <a:rPr lang="hu-HU" dirty="0" err="1"/>
-              <a:t>Set</a:t>
-            </a:r>
-            <a:r>
-              <a:rPr lang="hu-HU" dirty="0"/>
-              <a:t> metódusok: add(), update(), </a:t>
-            </a:r>
-            <a:r>
-              <a:rPr lang="hu-HU" dirty="0" err="1"/>
-              <a:t>remove</a:t>
-            </a:r>
-            <a:r>
-              <a:rPr lang="hu-HU" dirty="0"/>
-              <a:t>(), </a:t>
-            </a:r>
-            <a:r>
-              <a:rPr lang="hu-HU" dirty="0" err="1"/>
-              <a:t>discard</a:t>
-            </a:r>
-            <a:r>
-              <a:rPr lang="hu-HU" dirty="0"/>
-              <a:t>()</a:t>
-            </a:r>
-          </a:p>
-          <a:p>
-            <a:r>
-              <a:rPr lang="hu-HU" dirty="0"/>
-              <a:t>Halmazműveletek: </a:t>
-            </a:r>
-            <a:r>
-              <a:rPr lang="hu-HU" dirty="0" err="1"/>
-              <a:t>union</a:t>
-            </a:r>
-            <a:r>
-              <a:rPr lang="hu-HU" dirty="0"/>
-              <a:t>(), </a:t>
-            </a:r>
-            <a:r>
-              <a:rPr lang="hu-HU" dirty="0" err="1"/>
-              <a:t>intersection</a:t>
-            </a:r>
-            <a:r>
-              <a:rPr lang="hu-HU" dirty="0"/>
-              <a:t>(), </a:t>
-            </a:r>
-            <a:r>
-              <a:rPr lang="hu-HU" dirty="0" err="1"/>
-              <a:t>difference</a:t>
-            </a:r>
-            <a:r>
-              <a:rPr lang="hu-HU" dirty="0"/>
-              <a:t>(), </a:t>
-            </a:r>
-            <a:r>
-              <a:rPr lang="hu-HU" dirty="0" err="1"/>
-              <a:t>issuperset</a:t>
-            </a:r>
-            <a:r>
-              <a:rPr lang="hu-HU" dirty="0"/>
-              <a:t>(), </a:t>
-            </a:r>
-            <a:r>
-              <a:rPr lang="hu-HU" dirty="0" err="1"/>
-              <a:t>issubset</a:t>
-            </a:r>
-            <a:r>
-              <a:rPr lang="hu-HU" dirty="0"/>
-              <a:t>()</a:t>
-            </a:r>
-          </a:p>
-          <a:p>
-            <a:r>
-              <a:rPr lang="hu-HU" dirty="0" err="1"/>
-              <a:t>Set</a:t>
-            </a:r>
-            <a:r>
-              <a:rPr lang="hu-HU" dirty="0"/>
-              <a:t> bejárása </a:t>
-            </a:r>
-            <a:r>
-              <a:rPr lang="hu-HU" dirty="0" err="1"/>
-              <a:t>for</a:t>
-            </a:r>
-            <a:r>
-              <a:rPr lang="hu-HU" dirty="0"/>
-              <a:t> ciklussal</a:t>
-            </a:r>
           </a:p>
         </p:txBody>
       </p:sp>
     </p:spTree>
     <p:extLst>
       <p:ext uri="{BB962C8B-B14F-4D97-AF65-F5344CB8AC3E}">
-        <p14:creationId xmlns:p14="http://schemas.microsoft.com/office/powerpoint/2010/main" val="3762969098"/>
+        <p14:creationId xmlns:p14="http://schemas.microsoft.com/office/powerpoint/2010/main" val="2665335602"/>
       </p:ext>
     </p:extLst>
   </p:cSld>
@@ -5685,10 +5809,10 @@
       </p:grpSpPr>
       <p:sp>
         <p:nvSpPr>
-          <p:cNvPr id="2" name="Cím 1">
-            <a:extLst>
-              <a:ext uri="{FF2B5EF4-FFF2-40B4-BE49-F238E27FC236}">
-                <a16:creationId xmlns:a16="http://schemas.microsoft.com/office/drawing/2014/main" id="{67E45071-3E91-3975-958C-43782E39B6B9}"/>
+          <p:cNvPr id="10" name="Cím 9">
+            <a:extLst>
+              <a:ext uri="{FF2B5EF4-FFF2-40B4-BE49-F238E27FC236}">
+                <a16:creationId xmlns:a16="http://schemas.microsoft.com/office/drawing/2014/main" id="{026B303C-F00B-C202-DACD-409846B572C8}"/>
               </a:ext>
             </a:extLst>
           </p:cNvPr>
@@ -5697,39 +5821,6 @@
           </p:cNvSpPr>
           <p:nvPr>
             <p:ph type="title"/>
-          </p:nvPr>
-        </p:nvSpPr>
-        <p:spPr/>
-        <p:txBody>
-          <a:bodyPr/>
-          <a:lstStyle/>
-          <a:p>
-            <a:r>
-              <a:rPr lang="hu-HU" dirty="0"/>
-              <a:t>A Python modulrendszere, standard </a:t>
-            </a:r>
-            <a:r>
-              <a:rPr lang="hu-HU" dirty="0" err="1"/>
-              <a:t>library</a:t>
-            </a:r>
-            <a:endParaRPr lang="hu-HU" dirty="0"/>
-          </a:p>
-        </p:txBody>
-      </p:sp>
-      <p:sp>
-        <p:nvSpPr>
-          <p:cNvPr id="3" name="Tartalom helye 2">
-            <a:extLst>
-              <a:ext uri="{FF2B5EF4-FFF2-40B4-BE49-F238E27FC236}">
-                <a16:creationId xmlns:a16="http://schemas.microsoft.com/office/drawing/2014/main" id="{0F52A367-7627-7B81-0E00-66AB83DC996D}"/>
-              </a:ext>
-            </a:extLst>
-          </p:cNvPr>
-          <p:cNvSpPr>
-            <a:spLocks noGrp="1"/>
-          </p:cNvSpPr>
-          <p:nvPr>
-            <p:ph type="body" idx="1"/>
           </p:nvPr>
         </p:nvSpPr>
         <p:spPr/>
@@ -5739,14 +5830,162 @@
           </a:bodyPr>
           <a:lstStyle/>
           <a:p>
+            <a:r>
+              <a:rPr lang="hu-HU" dirty="0"/>
+              <a:t>A Python modulrendszere, standard </a:t>
+            </a:r>
+            <a:r>
+              <a:rPr lang="hu-HU" dirty="0" err="1"/>
+              <a:t>library</a:t>
+            </a:r>
             <a:endParaRPr lang="hu-HU" dirty="0"/>
+          </a:p>
+        </p:txBody>
+      </p:sp>
+      <p:sp>
+        <p:nvSpPr>
+          <p:cNvPr id="11" name="Tartalom helye 10">
+            <a:extLst>
+              <a:ext uri="{FF2B5EF4-FFF2-40B4-BE49-F238E27FC236}">
+                <a16:creationId xmlns:a16="http://schemas.microsoft.com/office/drawing/2014/main" id="{1304DAAD-A571-195A-29C9-8BA795B1C660}"/>
+              </a:ext>
+            </a:extLst>
+          </p:cNvPr>
+          <p:cNvSpPr>
+            <a:spLocks noGrp="1"/>
+          </p:cNvSpPr>
+          <p:nvPr>
+            <p:ph idx="1"/>
+          </p:nvPr>
+        </p:nvSpPr>
+        <p:spPr/>
+        <p:txBody>
+          <a:bodyPr>
+            <a:normAutofit fontScale="55000" lnSpcReduction="20000"/>
+          </a:bodyPr>
+          <a:lstStyle/>
+          <a:p>
+            <a:r>
+              <a:rPr lang="hu-HU" dirty="0"/>
+              <a:t>A fájl, mint modul, Modulban attribútumai: változók, függvények és osztályok</a:t>
+            </a:r>
+          </a:p>
+          <a:p>
+            <a:r>
+              <a:rPr lang="hu-HU" dirty="0"/>
+              <a:t>Csomagok és névterek</a:t>
+            </a:r>
+          </a:p>
+          <a:p>
+            <a:r>
+              <a:rPr lang="hu-HU" dirty="0"/>
+              <a:t>Teljes modul importálása</a:t>
+            </a:r>
+          </a:p>
+          <a:p>
+            <a:r>
+              <a:rPr lang="hu-HU" dirty="0"/>
+              <a:t>Modul egy attribútumainak importálása</a:t>
+            </a:r>
+          </a:p>
+          <a:p>
+            <a:r>
+              <a:rPr lang="hu-HU" dirty="0"/>
+              <a:t>Modul minden attribútumainak importálása</a:t>
+            </a:r>
+          </a:p>
+          <a:p>
+            <a:r>
+              <a:rPr lang="hu-HU" dirty="0"/>
+              <a:t>A main modul</a:t>
+            </a:r>
+          </a:p>
+          <a:p>
+            <a:r>
+              <a:rPr lang="hu-HU" dirty="0"/>
+              <a:t>A </a:t>
+            </a:r>
+            <a:r>
+              <a:rPr lang="hu-HU" dirty="0" err="1"/>
+              <a:t>date</a:t>
+            </a:r>
+            <a:r>
+              <a:rPr lang="hu-HU" dirty="0"/>
+              <a:t> modul</a:t>
+            </a:r>
+          </a:p>
+          <a:p>
+            <a:r>
+              <a:rPr lang="hu-HU" dirty="0"/>
+              <a:t>A random modul</a:t>
+            </a:r>
+          </a:p>
+          <a:p>
+            <a:r>
+              <a:rPr lang="hu-HU" dirty="0"/>
+              <a:t>Az </a:t>
+            </a:r>
+            <a:r>
+              <a:rPr lang="hu-HU" dirty="0" err="1"/>
+              <a:t>os</a:t>
+            </a:r>
+            <a:r>
+              <a:rPr lang="hu-HU" dirty="0"/>
+              <a:t> modul</a:t>
+            </a:r>
+          </a:p>
+          <a:p>
+            <a:r>
+              <a:rPr lang="hu-HU" dirty="0"/>
+              <a:t>Modulok névütközése</a:t>
+            </a:r>
+          </a:p>
+          <a:p>
+            <a:r>
+              <a:rPr lang="hu-HU" dirty="0"/>
+              <a:t>Importálása más néven</a:t>
+            </a:r>
+          </a:p>
+          <a:p>
+            <a:r>
+              <a:rPr lang="hu-HU" dirty="0"/>
+              <a:t>Importálás csomagból</a:t>
+            </a:r>
+          </a:p>
+          <a:p>
+            <a:r>
+              <a:rPr lang="hu-HU" dirty="0"/>
+              <a:t>A </a:t>
+            </a:r>
+            <a:r>
+              <a:rPr lang="hu-HU" dirty="0" err="1"/>
+              <a:t>pip</a:t>
+            </a:r>
+            <a:r>
+              <a:rPr lang="hu-HU" dirty="0"/>
+              <a:t> csomagkezelő</a:t>
+            </a:r>
+          </a:p>
+          <a:p>
+            <a:r>
+              <a:rPr lang="hu-HU" dirty="0"/>
+              <a:t>A </a:t>
+            </a:r>
+            <a:r>
+              <a:rPr lang="hu-HU" dirty="0" err="1"/>
+              <a:t>pypi</a:t>
+            </a:r>
+            <a:r>
+              <a:rPr lang="hu-HU" dirty="0"/>
+              <a:t> oldal</a:t>
+            </a:r>
           </a:p>
         </p:txBody>
       </p:sp>
     </p:spTree>
     <p:extLst>
       <p:ext uri="{BB962C8B-B14F-4D97-AF65-F5344CB8AC3E}">
-        <p14:creationId xmlns:p14="http://schemas.microsoft.com/office/powerpoint/2010/main" val="2665335602"/>
+        <p14:creationId xmlns:p14="http://schemas.microsoft.com/office/powerpoint/2010/main" val="1563335149"/>
       </p:ext>
     </p:extLst>
   </p:cSld>
@@ -5775,10 +6014,10 @@
       </p:grpSpPr>
       <p:sp>
         <p:nvSpPr>
-          <p:cNvPr id="10" name="Cím 9">
-            <a:extLst>
-              <a:ext uri="{FF2B5EF4-FFF2-40B4-BE49-F238E27FC236}">
-                <a16:creationId xmlns:a16="http://schemas.microsoft.com/office/drawing/2014/main" id="{026B303C-F00B-C202-DACD-409846B572C8}"/>
+          <p:cNvPr id="2" name="Cím 1">
+            <a:extLst>
+              <a:ext uri="{FF2B5EF4-FFF2-40B4-BE49-F238E27FC236}">
+                <a16:creationId xmlns:a16="http://schemas.microsoft.com/office/drawing/2014/main" id="{67E45071-3E91-3975-958C-43782E39B6B9}"/>
               </a:ext>
             </a:extLst>
           </p:cNvPr>
@@ -5787,6 +6026,34 @@
           </p:cNvSpPr>
           <p:nvPr>
             <p:ph type="title"/>
+          </p:nvPr>
+        </p:nvSpPr>
+        <p:spPr/>
+        <p:txBody>
+          <a:bodyPr/>
+          <a:lstStyle/>
+          <a:p>
+            <a:r>
+              <a:rPr lang="hu-HU" dirty="0"/>
+              <a:t>Fájlkezelés</a:t>
+            </a:r>
+          </a:p>
+        </p:txBody>
+      </p:sp>
+      <p:sp>
+        <p:nvSpPr>
+          <p:cNvPr id="3" name="Tartalom helye 2">
+            <a:extLst>
+              <a:ext uri="{FF2B5EF4-FFF2-40B4-BE49-F238E27FC236}">
+                <a16:creationId xmlns:a16="http://schemas.microsoft.com/office/drawing/2014/main" id="{0F52A367-7627-7B81-0E00-66AB83DC996D}"/>
+              </a:ext>
+            </a:extLst>
+          </p:cNvPr>
+          <p:cNvSpPr>
+            <a:spLocks noGrp="1"/>
+          </p:cNvSpPr>
+          <p:nvPr>
+            <p:ph type="body" idx="1"/>
           </p:nvPr>
         </p:nvSpPr>
         <p:spPr/>
@@ -5796,162 +6063,14 @@
           </a:bodyPr>
           <a:lstStyle/>
           <a:p>
-            <a:r>
-              <a:rPr lang="hu-HU" dirty="0"/>
-              <a:t>A Python modulrendszere, standard </a:t>
-            </a:r>
-            <a:r>
-              <a:rPr lang="hu-HU" dirty="0" err="1"/>
-              <a:t>library</a:t>
-            </a:r>
             <a:endParaRPr lang="hu-HU" dirty="0"/>
-          </a:p>
-        </p:txBody>
-      </p:sp>
-      <p:sp>
-        <p:nvSpPr>
-          <p:cNvPr id="11" name="Tartalom helye 10">
-            <a:extLst>
-              <a:ext uri="{FF2B5EF4-FFF2-40B4-BE49-F238E27FC236}">
-                <a16:creationId xmlns:a16="http://schemas.microsoft.com/office/drawing/2014/main" id="{1304DAAD-A571-195A-29C9-8BA795B1C660}"/>
-              </a:ext>
-            </a:extLst>
-          </p:cNvPr>
-          <p:cNvSpPr>
-            <a:spLocks noGrp="1"/>
-          </p:cNvSpPr>
-          <p:nvPr>
-            <p:ph idx="1"/>
-          </p:nvPr>
-        </p:nvSpPr>
-        <p:spPr/>
-        <p:txBody>
-          <a:bodyPr>
-            <a:normAutofit fontScale="55000" lnSpcReduction="20000"/>
-          </a:bodyPr>
-          <a:lstStyle/>
-          <a:p>
-            <a:r>
-              <a:rPr lang="hu-HU" dirty="0"/>
-              <a:t>A fájl, mint modul, Modulban attribútumai: változók, függvények és osztályok</a:t>
-            </a:r>
-          </a:p>
-          <a:p>
-            <a:r>
-              <a:rPr lang="hu-HU" dirty="0"/>
-              <a:t>Csomagok és névterek</a:t>
-            </a:r>
-          </a:p>
-          <a:p>
-            <a:r>
-              <a:rPr lang="hu-HU" dirty="0"/>
-              <a:t>Teljes modul importálása</a:t>
-            </a:r>
-          </a:p>
-          <a:p>
-            <a:r>
-              <a:rPr lang="hu-HU" dirty="0"/>
-              <a:t>Modul egy attribútumainak importálása</a:t>
-            </a:r>
-          </a:p>
-          <a:p>
-            <a:r>
-              <a:rPr lang="hu-HU" dirty="0"/>
-              <a:t>Modul minden attribútumainak importálása</a:t>
-            </a:r>
-          </a:p>
-          <a:p>
-            <a:r>
-              <a:rPr lang="hu-HU" dirty="0"/>
-              <a:t>A main modul</a:t>
-            </a:r>
-          </a:p>
-          <a:p>
-            <a:r>
-              <a:rPr lang="hu-HU" dirty="0"/>
-              <a:t>A </a:t>
-            </a:r>
-            <a:r>
-              <a:rPr lang="hu-HU" dirty="0" err="1"/>
-              <a:t>date</a:t>
-            </a:r>
-            <a:r>
-              <a:rPr lang="hu-HU" dirty="0"/>
-              <a:t> modul</a:t>
-            </a:r>
-          </a:p>
-          <a:p>
-            <a:r>
-              <a:rPr lang="hu-HU" dirty="0"/>
-              <a:t>A random modul</a:t>
-            </a:r>
-          </a:p>
-          <a:p>
-            <a:r>
-              <a:rPr lang="hu-HU" dirty="0"/>
-              <a:t>Az </a:t>
-            </a:r>
-            <a:r>
-              <a:rPr lang="hu-HU" dirty="0" err="1"/>
-              <a:t>os</a:t>
-            </a:r>
-            <a:r>
-              <a:rPr lang="hu-HU" dirty="0"/>
-              <a:t> modul</a:t>
-            </a:r>
-          </a:p>
-          <a:p>
-            <a:r>
-              <a:rPr lang="hu-HU" dirty="0"/>
-              <a:t>Modulok névütközése</a:t>
-            </a:r>
-          </a:p>
-          <a:p>
-            <a:r>
-              <a:rPr lang="hu-HU" dirty="0"/>
-              <a:t>Importálása más néven</a:t>
-            </a:r>
-          </a:p>
-          <a:p>
-            <a:r>
-              <a:rPr lang="hu-HU" dirty="0"/>
-              <a:t>Importálás csomagból</a:t>
-            </a:r>
-          </a:p>
-          <a:p>
-            <a:r>
-              <a:rPr lang="hu-HU" dirty="0"/>
-              <a:t>A </a:t>
-            </a:r>
-            <a:r>
-              <a:rPr lang="hu-HU" dirty="0" err="1"/>
-              <a:t>pip</a:t>
-            </a:r>
-            <a:r>
-              <a:rPr lang="hu-HU" dirty="0"/>
-              <a:t> csomagkezelő</a:t>
-            </a:r>
-          </a:p>
-          <a:p>
-            <a:r>
-              <a:rPr lang="hu-HU" dirty="0"/>
-              <a:t>A </a:t>
-            </a:r>
-            <a:r>
-              <a:rPr lang="hu-HU" dirty="0" err="1"/>
-              <a:t>pypi</a:t>
-            </a:r>
-            <a:r>
-              <a:rPr lang="hu-HU" dirty="0"/>
-              <a:t> oldal</a:t>
-            </a:r>
           </a:p>
         </p:txBody>
       </p:sp>
     </p:spTree>
     <p:extLst>
       <p:ext uri="{BB962C8B-B14F-4D97-AF65-F5344CB8AC3E}">
-        <p14:creationId xmlns:p14="http://schemas.microsoft.com/office/powerpoint/2010/main" val="1563335149"/>
+        <p14:creationId xmlns:p14="http://schemas.microsoft.com/office/powerpoint/2010/main" val="797157590"/>
       </p:ext>
     </p:extLst>
   </p:cSld>
@@ -5980,91 +6099,6 @@
       </p:grpSpPr>
       <p:sp>
         <p:nvSpPr>
-          <p:cNvPr id="2" name="Cím 1">
-            <a:extLst>
-              <a:ext uri="{FF2B5EF4-FFF2-40B4-BE49-F238E27FC236}">
-                <a16:creationId xmlns:a16="http://schemas.microsoft.com/office/drawing/2014/main" id="{67E45071-3E91-3975-958C-43782E39B6B9}"/>
-              </a:ext>
-            </a:extLst>
-          </p:cNvPr>
-          <p:cNvSpPr>
-            <a:spLocks noGrp="1"/>
-          </p:cNvSpPr>
-          <p:nvPr>
-            <p:ph type="title"/>
-          </p:nvPr>
-        </p:nvSpPr>
-        <p:spPr/>
-        <p:txBody>
-          <a:bodyPr/>
-          <a:lstStyle/>
-          <a:p>
-            <a:r>
-              <a:rPr lang="hu-HU" dirty="0"/>
-              <a:t>Fájlkezelés</a:t>
-            </a:r>
-          </a:p>
-        </p:txBody>
-      </p:sp>
-      <p:sp>
-        <p:nvSpPr>
-          <p:cNvPr id="3" name="Tartalom helye 2">
-            <a:extLst>
-              <a:ext uri="{FF2B5EF4-FFF2-40B4-BE49-F238E27FC236}">
-                <a16:creationId xmlns:a16="http://schemas.microsoft.com/office/drawing/2014/main" id="{0F52A367-7627-7B81-0E00-66AB83DC996D}"/>
-              </a:ext>
-            </a:extLst>
-          </p:cNvPr>
-          <p:cNvSpPr>
-            <a:spLocks noGrp="1"/>
-          </p:cNvSpPr>
-          <p:nvPr>
-            <p:ph type="body" idx="1"/>
-          </p:nvPr>
-        </p:nvSpPr>
-        <p:spPr/>
-        <p:txBody>
-          <a:bodyPr>
-            <a:normAutofit/>
-          </a:bodyPr>
-          <a:lstStyle/>
-          <a:p>
-            <a:endParaRPr lang="hu-HU" dirty="0"/>
-          </a:p>
-        </p:txBody>
-      </p:sp>
-    </p:spTree>
-    <p:extLst>
-      <p:ext uri="{BB962C8B-B14F-4D97-AF65-F5344CB8AC3E}">
-        <p14:creationId xmlns:p14="http://schemas.microsoft.com/office/powerpoint/2010/main" val="797157590"/>
-      </p:ext>
-    </p:extLst>
-  </p:cSld>
-  <p:clrMapOvr>
-    <a:masterClrMapping/>
-  </p:clrMapOvr>
-</p:sld>
-</file>
-
-<file path=ppt/slides/slide25.xml><?xml version="1.0" encoding="utf-8"?>
-<p:sld xmlns:a="http://schemas.openxmlformats.org/drawingml/2006/main" xmlns:r="http://schemas.openxmlformats.org/officeDocument/2006/relationships" xmlns:p="http://schemas.openxmlformats.org/presentationml/2006/main">
-  <p:cSld>
-    <p:spTree>
-      <p:nvGrpSpPr>
-        <p:cNvPr id="1" name=""/>
-        <p:cNvGrpSpPr/>
-        <p:nvPr/>
-      </p:nvGrpSpPr>
-      <p:grpSpPr>
-        <a:xfrm>
-          <a:off x="0" y="0"/>
-          <a:ext cx="0" cy="0"/>
-          <a:chOff x="0" y="0"/>
-          <a:chExt cx="0" cy="0"/>
-        </a:xfrm>
-      </p:grpSpPr>
-      <p:sp>
-        <p:nvSpPr>
           <p:cNvPr id="10" name="Cím 9">
             <a:extLst>
               <a:ext uri="{FF2B5EF4-FFF2-40B4-BE49-F238E27FC236}">
@@ -6208,7 +6242,7 @@
 </p:sld>
 </file>
 
-<file path=ppt/slides/slide26.xml><?xml version="1.0" encoding="utf-8"?>
+<file path=ppt/slides/slide25.xml><?xml version="1.0" encoding="utf-8"?>
 <p:sld xmlns:a="http://schemas.openxmlformats.org/drawingml/2006/main" xmlns:r="http://schemas.openxmlformats.org/officeDocument/2006/relationships" xmlns:p="http://schemas.openxmlformats.org/presentationml/2006/main">
   <p:cSld>
     <p:spTree>
@@ -6335,10 +6369,6 @@
               <a:rPr lang="hu-HU" dirty="0"/>
               <a:t>A Python nyelv, fejlesztő környezet, számok és operátorok</a:t>
             </a:r>
-            <a:br>
-              <a:rPr lang="hu-HU" dirty="0"/>
-            </a:br>
-            <a:endParaRPr lang="hu-HU" dirty="0"/>
           </a:p>
         </p:txBody>
       </p:sp>
@@ -6682,10 +6712,10 @@
       </p:grpSpPr>
       <p:sp>
         <p:nvSpPr>
-          <p:cNvPr id="4" name="Cím 3">
-            <a:extLst>
-              <a:ext uri="{FF2B5EF4-FFF2-40B4-BE49-F238E27FC236}">
-                <a16:creationId xmlns:a16="http://schemas.microsoft.com/office/drawing/2014/main" id="{8D8D5F6B-E238-4F7E-BF6C-6981024AAF68}"/>
+          <p:cNvPr id="2" name="Cím 1">
+            <a:extLst>
+              <a:ext uri="{FF2B5EF4-FFF2-40B4-BE49-F238E27FC236}">
+                <a16:creationId xmlns:a16="http://schemas.microsoft.com/office/drawing/2014/main" id="{67E45071-3E91-3975-958C-43782E39B6B9}"/>
               </a:ext>
             </a:extLst>
           </p:cNvPr>
@@ -6703,17 +6733,17 @@
           <a:p>
             <a:r>
               <a:rPr lang="hu-HU" dirty="0"/>
-              <a:t>A Python nyelv, fejlesztő környezet, számok és operátorok</a:t>
-            </a:r>
-          </a:p>
-        </p:txBody>
-      </p:sp>
-      <p:sp>
-        <p:nvSpPr>
-          <p:cNvPr id="5" name="Szöveg helye 4">
-            <a:extLst>
-              <a:ext uri="{FF2B5EF4-FFF2-40B4-BE49-F238E27FC236}">
-                <a16:creationId xmlns:a16="http://schemas.microsoft.com/office/drawing/2014/main" id="{99147CC0-FF23-BD9B-F789-85501253DEFE}"/>
+              <a:t>Alap adattípusok, operátorok</a:t>
+            </a:r>
+          </a:p>
+        </p:txBody>
+      </p:sp>
+      <p:sp>
+        <p:nvSpPr>
+          <p:cNvPr id="3" name="Tartalom helye 2">
+            <a:extLst>
+              <a:ext uri="{FF2B5EF4-FFF2-40B4-BE49-F238E27FC236}">
+                <a16:creationId xmlns:a16="http://schemas.microsoft.com/office/drawing/2014/main" id="{0F52A367-7627-7B81-0E00-66AB83DC996D}"/>
               </a:ext>
             </a:extLst>
           </p:cNvPr>
@@ -6726,31 +6756,25 @@
         </p:nvSpPr>
         <p:spPr/>
         <p:txBody>
-          <a:bodyPr/>
-          <a:lstStyle/>
-          <a:p>
-            <a:r>
-              <a:rPr lang="hu-HU" dirty="0"/>
-              <a:t>A programozási nyelvekről</a:t>
-            </a:r>
+          <a:bodyPr>
+            <a:normAutofit/>
+          </a:bodyPr>
+          <a:lstStyle/>
+          <a:p>
+            <a:endParaRPr lang="hu-HU" dirty="0"/>
           </a:p>
         </p:txBody>
       </p:sp>
     </p:spTree>
     <p:extLst>
       <p:ext uri="{BB962C8B-B14F-4D97-AF65-F5344CB8AC3E}">
-        <p14:creationId xmlns:p14="http://schemas.microsoft.com/office/powerpoint/2010/main" val="1122101112"/>
+        <p14:creationId xmlns:p14="http://schemas.microsoft.com/office/powerpoint/2010/main" val="505069116"/>
       </p:ext>
     </p:extLst>
   </p:cSld>
   <p:clrMapOvr>
     <a:masterClrMapping/>
   </p:clrMapOvr>
-  <p:extLst>
-    <p:ext uri="{6950BFC3-D8DA-4A85-94F7-54DA5524770B}">
-      <p188:commentRel xmlns:p188="http://schemas.microsoft.com/office/powerpoint/2018/8/main" r:id="rId2"/>
-    </p:ext>
-  </p:extLst>
 </p:sld>
 </file>
 
@@ -6773,10 +6797,10 @@
       </p:grpSpPr>
       <p:sp>
         <p:nvSpPr>
-          <p:cNvPr id="2" name="Cím 1">
-            <a:extLst>
-              <a:ext uri="{FF2B5EF4-FFF2-40B4-BE49-F238E27FC236}">
-                <a16:creationId xmlns:a16="http://schemas.microsoft.com/office/drawing/2014/main" id="{67E45071-3E91-3975-958C-43782E39B6B9}"/>
+          <p:cNvPr id="10" name="Cím 9">
+            <a:extLst>
+              <a:ext uri="{FF2B5EF4-FFF2-40B4-BE49-F238E27FC236}">
+                <a16:creationId xmlns:a16="http://schemas.microsoft.com/office/drawing/2014/main" id="{026B303C-F00B-C202-DACD-409846B572C8}"/>
               </a:ext>
             </a:extLst>
           </p:cNvPr>
@@ -6785,34 +6809,6 @@
           </p:cNvSpPr>
           <p:nvPr>
             <p:ph type="title"/>
-          </p:nvPr>
-        </p:nvSpPr>
-        <p:spPr/>
-        <p:txBody>
-          <a:bodyPr/>
-          <a:lstStyle/>
-          <a:p>
-            <a:r>
-              <a:rPr lang="hu-HU" dirty="0"/>
-              <a:t>Alap adattípusok, operátorok</a:t>
-            </a:r>
-          </a:p>
-        </p:txBody>
-      </p:sp>
-      <p:sp>
-        <p:nvSpPr>
-          <p:cNvPr id="3" name="Tartalom helye 2">
-            <a:extLst>
-              <a:ext uri="{FF2B5EF4-FFF2-40B4-BE49-F238E27FC236}">
-                <a16:creationId xmlns:a16="http://schemas.microsoft.com/office/drawing/2014/main" id="{0F52A367-7627-7B81-0E00-66AB83DC996D}"/>
-              </a:ext>
-            </a:extLst>
-          </p:cNvPr>
-          <p:cNvSpPr>
-            <a:spLocks noGrp="1"/>
-          </p:cNvSpPr>
-          <p:nvPr>
-            <p:ph type="body" idx="1"/>
           </p:nvPr>
         </p:nvSpPr>
         <p:spPr/>
@@ -6822,14 +6818,187 @@
           </a:bodyPr>
           <a:lstStyle/>
           <a:p>
+            <a:r>
+              <a:rPr lang="hu-HU" dirty="0"/>
+              <a:t>Alap adattípusok, operátorok</a:t>
+            </a:r>
+          </a:p>
+        </p:txBody>
+      </p:sp>
+      <p:sp>
+        <p:nvSpPr>
+          <p:cNvPr id="11" name="Tartalom helye 10">
+            <a:extLst>
+              <a:ext uri="{FF2B5EF4-FFF2-40B4-BE49-F238E27FC236}">
+                <a16:creationId xmlns:a16="http://schemas.microsoft.com/office/drawing/2014/main" id="{1304DAAD-A571-195A-29C9-8BA795B1C660}"/>
+              </a:ext>
+            </a:extLst>
+          </p:cNvPr>
+          <p:cNvSpPr>
+            <a:spLocks noGrp="1"/>
+          </p:cNvSpPr>
+          <p:nvPr>
+            <p:ph idx="1"/>
+          </p:nvPr>
+        </p:nvSpPr>
+        <p:spPr/>
+        <p:txBody>
+          <a:bodyPr>
+            <a:normAutofit fontScale="47500" lnSpcReduction="20000"/>
+          </a:bodyPr>
+          <a:lstStyle/>
+          <a:p>
+            <a:r>
+              <a:rPr lang="hu-HU" dirty="0"/>
+              <a:t>Változók létrehozása, az értékadó operátor</a:t>
+            </a:r>
+          </a:p>
+          <a:p>
+            <a:r>
+              <a:rPr lang="hu-HU" dirty="0"/>
+              <a:t>A nyelv foglalt szavai, foglalt szavak listája</a:t>
+            </a:r>
+          </a:p>
+          <a:p>
+            <a:r>
+              <a:rPr lang="hu-HU" dirty="0"/>
+              <a:t>Névadási konvenciók</a:t>
+            </a:r>
+          </a:p>
+          <a:p>
+            <a:r>
+              <a:rPr lang="hu-HU" dirty="0" err="1"/>
+              <a:t>Módosíthatatlanság</a:t>
+            </a:r>
+            <a:r>
+              <a:rPr lang="hu-HU" dirty="0"/>
+              <a:t>  (</a:t>
+            </a:r>
+            <a:r>
+              <a:rPr lang="hu-HU" dirty="0" err="1"/>
+              <a:t>immutability</a:t>
+            </a:r>
+            <a:r>
+              <a:rPr lang="hu-HU" dirty="0"/>
+              <a:t>)</a:t>
+            </a:r>
+          </a:p>
+          <a:p>
+            <a:r>
+              <a:rPr lang="hu-HU" dirty="0"/>
+              <a:t>Operátorok, operandus, kifejezés, utasítás</a:t>
+            </a:r>
+          </a:p>
+          <a:p>
+            <a:r>
+              <a:rPr lang="hu-HU" dirty="0"/>
+              <a:t>statikus és dinamikus típusosság</a:t>
+            </a:r>
+          </a:p>
+          <a:p>
+            <a:r>
+              <a:rPr lang="hu-HU" dirty="0"/>
+              <a:t>explicit és implicit típusmegadás</a:t>
+            </a:r>
+          </a:p>
+          <a:p>
+            <a:r>
+              <a:rPr lang="hu-HU" dirty="0"/>
+              <a:t>statikus, dinamikus, explicit, implicit variációk</a:t>
+            </a:r>
+          </a:p>
+          <a:p>
+            <a:r>
+              <a:rPr lang="hu-HU" dirty="0"/>
+              <a:t>Összevont operátor</a:t>
+            </a:r>
+          </a:p>
+          <a:p>
+            <a:r>
+              <a:rPr lang="hu-HU" dirty="0"/>
+              <a:t>Típus konverzió</a:t>
+            </a:r>
+          </a:p>
+          <a:p>
+            <a:r>
+              <a:rPr lang="hu-HU" dirty="0"/>
+              <a:t>Adatok bekérése a felhasználótól</a:t>
+            </a:r>
+          </a:p>
+          <a:p>
+            <a:r>
+              <a:rPr lang="hu-HU" dirty="0"/>
+              <a:t>Az </a:t>
+            </a:r>
+            <a:r>
+              <a:rPr lang="hu-HU" dirty="0" err="1"/>
+              <a:t>str</a:t>
+            </a:r>
+            <a:r>
+              <a:rPr lang="hu-HU" dirty="0"/>
+              <a:t> (szöveges) típus, Aposztróf, időzőjel, </a:t>
+            </a:r>
+            <a:r>
+              <a:rPr lang="hu-HU" dirty="0" err="1"/>
+              <a:t>escape-elés</a:t>
+            </a:r>
             <a:endParaRPr lang="hu-HU" dirty="0"/>
+          </a:p>
+          <a:p>
+            <a:r>
+              <a:rPr lang="hu-HU" dirty="0"/>
+              <a:t>Többsoros </a:t>
+            </a:r>
+            <a:r>
+              <a:rPr lang="hu-HU" dirty="0" err="1"/>
+              <a:t>string</a:t>
+            </a:r>
+            <a:endParaRPr lang="hu-HU" dirty="0"/>
+          </a:p>
+          <a:p>
+            <a:r>
+              <a:rPr lang="hu-HU" dirty="0"/>
+              <a:t>Formázott szövegek</a:t>
+            </a:r>
+          </a:p>
+          <a:p>
+            <a:r>
+              <a:rPr lang="hu-HU" dirty="0"/>
+              <a:t>Formázott szövegek (f </a:t>
+            </a:r>
+            <a:r>
+              <a:rPr lang="hu-HU" dirty="0" err="1"/>
+              <a:t>string</a:t>
+            </a:r>
+            <a:r>
+              <a:rPr lang="hu-HU" dirty="0"/>
+              <a:t>, r </a:t>
+            </a:r>
+            <a:r>
+              <a:rPr lang="hu-HU" dirty="0" err="1"/>
+              <a:t>string</a:t>
+            </a:r>
+            <a:r>
+              <a:rPr lang="hu-HU" dirty="0"/>
+              <a:t>)</a:t>
+            </a:r>
+          </a:p>
+          <a:p>
+            <a:r>
+              <a:rPr lang="hu-HU" dirty="0" err="1"/>
+              <a:t>String</a:t>
+            </a:r>
+            <a:r>
+              <a:rPr lang="hu-HU" dirty="0"/>
+              <a:t> tulajdonságok és metódusok</a:t>
+            </a:r>
           </a:p>
         </p:txBody>
       </p:sp>
     </p:spTree>
     <p:extLst>
       <p:ext uri="{BB962C8B-B14F-4D97-AF65-F5344CB8AC3E}">
-        <p14:creationId xmlns:p14="http://schemas.microsoft.com/office/powerpoint/2010/main" val="505069116"/>
+        <p14:creationId xmlns:p14="http://schemas.microsoft.com/office/powerpoint/2010/main" val="1675522082"/>
       </p:ext>
     </p:extLst>
   </p:cSld>
@@ -6858,10 +7027,10 @@
       </p:grpSpPr>
       <p:sp>
         <p:nvSpPr>
-          <p:cNvPr id="10" name="Cím 9">
-            <a:extLst>
-              <a:ext uri="{FF2B5EF4-FFF2-40B4-BE49-F238E27FC236}">
-                <a16:creationId xmlns:a16="http://schemas.microsoft.com/office/drawing/2014/main" id="{026B303C-F00B-C202-DACD-409846B572C8}"/>
+          <p:cNvPr id="2" name="Cím 1">
+            <a:extLst>
+              <a:ext uri="{FF2B5EF4-FFF2-40B4-BE49-F238E27FC236}">
+                <a16:creationId xmlns:a16="http://schemas.microsoft.com/office/drawing/2014/main" id="{67E45071-3E91-3975-958C-43782E39B6B9}"/>
               </a:ext>
             </a:extLst>
           </p:cNvPr>
@@ -6870,6 +7039,42 @@
           </p:cNvSpPr>
           <p:nvPr>
             <p:ph type="title"/>
+          </p:nvPr>
+        </p:nvSpPr>
+        <p:spPr/>
+        <p:txBody>
+          <a:bodyPr/>
+          <a:lstStyle/>
+          <a:p>
+            <a:r>
+              <a:rPr lang="hu-HU" dirty="0"/>
+              <a:t>A </a:t>
+            </a:r>
+            <a:r>
+              <a:rPr lang="hu-HU" dirty="0" err="1"/>
+              <a:t>list</a:t>
+            </a:r>
+            <a:r>
+              <a:rPr lang="hu-HU" dirty="0"/>
+              <a:t> konténer típus, ciklusok</a:t>
+            </a:r>
+          </a:p>
+        </p:txBody>
+      </p:sp>
+      <p:sp>
+        <p:nvSpPr>
+          <p:cNvPr id="3" name="Tartalom helye 2">
+            <a:extLst>
+              <a:ext uri="{FF2B5EF4-FFF2-40B4-BE49-F238E27FC236}">
+                <a16:creationId xmlns:a16="http://schemas.microsoft.com/office/drawing/2014/main" id="{0F52A367-7627-7B81-0E00-66AB83DC996D}"/>
+              </a:ext>
+            </a:extLst>
+          </p:cNvPr>
+          <p:cNvSpPr>
+            <a:spLocks noGrp="1"/>
+          </p:cNvSpPr>
+          <p:nvPr>
+            <p:ph type="body" idx="1"/>
           </p:nvPr>
         </p:nvSpPr>
         <p:spPr/>
@@ -6879,187 +7084,14 @@
           </a:bodyPr>
           <a:lstStyle/>
           <a:p>
-            <a:r>
-              <a:rPr lang="hu-HU" dirty="0"/>
-              <a:t>Alap adattípusok, operátorok</a:t>
-            </a:r>
-          </a:p>
-        </p:txBody>
-      </p:sp>
-      <p:sp>
-        <p:nvSpPr>
-          <p:cNvPr id="11" name="Tartalom helye 10">
-            <a:extLst>
-              <a:ext uri="{FF2B5EF4-FFF2-40B4-BE49-F238E27FC236}">
-                <a16:creationId xmlns:a16="http://schemas.microsoft.com/office/drawing/2014/main" id="{1304DAAD-A571-195A-29C9-8BA795B1C660}"/>
-              </a:ext>
-            </a:extLst>
-          </p:cNvPr>
-          <p:cNvSpPr>
-            <a:spLocks noGrp="1"/>
-          </p:cNvSpPr>
-          <p:nvPr>
-            <p:ph idx="1"/>
-          </p:nvPr>
-        </p:nvSpPr>
-        <p:spPr/>
-        <p:txBody>
-          <a:bodyPr>
-            <a:normAutofit fontScale="47500" lnSpcReduction="20000"/>
-          </a:bodyPr>
-          <a:lstStyle/>
-          <a:p>
-            <a:r>
-              <a:rPr lang="hu-HU" dirty="0"/>
-              <a:t>Változók létrehozása, az értékadó operátor</a:t>
-            </a:r>
-          </a:p>
-          <a:p>
-            <a:r>
-              <a:rPr lang="hu-HU" dirty="0"/>
-              <a:t>A nyelv foglalt szavai, foglalt szavak listája</a:t>
-            </a:r>
-          </a:p>
-          <a:p>
-            <a:r>
-              <a:rPr lang="hu-HU" dirty="0"/>
-              <a:t>Névadási konvenciók</a:t>
-            </a:r>
-          </a:p>
-          <a:p>
-            <a:r>
-              <a:rPr lang="hu-HU" dirty="0" err="1"/>
-              <a:t>Módosíthatatlanság</a:t>
-            </a:r>
-            <a:r>
-              <a:rPr lang="hu-HU" dirty="0"/>
-              <a:t>  (</a:t>
-            </a:r>
-            <a:r>
-              <a:rPr lang="hu-HU" dirty="0" err="1"/>
-              <a:t>immutability</a:t>
-            </a:r>
-            <a:r>
-              <a:rPr lang="hu-HU" dirty="0"/>
-              <a:t>)</a:t>
-            </a:r>
-          </a:p>
-          <a:p>
-            <a:r>
-              <a:rPr lang="hu-HU" dirty="0"/>
-              <a:t>Operátorok, operandus, kifejezés, utasítás</a:t>
-            </a:r>
-          </a:p>
-          <a:p>
-            <a:r>
-              <a:rPr lang="hu-HU" dirty="0"/>
-              <a:t>statikus és dinamikus típusosság</a:t>
-            </a:r>
-          </a:p>
-          <a:p>
-            <a:r>
-              <a:rPr lang="hu-HU" dirty="0"/>
-              <a:t>explicit és implicit típusmegadás</a:t>
-            </a:r>
-          </a:p>
-          <a:p>
-            <a:r>
-              <a:rPr lang="hu-HU" dirty="0"/>
-              <a:t>statikus, dinamikus, explicit, implicit variációk</a:t>
-            </a:r>
-          </a:p>
-          <a:p>
-            <a:r>
-              <a:rPr lang="hu-HU" dirty="0"/>
-              <a:t>Összevont operátor</a:t>
-            </a:r>
-          </a:p>
-          <a:p>
-            <a:r>
-              <a:rPr lang="hu-HU" dirty="0"/>
-              <a:t>Típus konverzió</a:t>
-            </a:r>
-          </a:p>
-          <a:p>
-            <a:r>
-              <a:rPr lang="hu-HU" dirty="0"/>
-              <a:t>Adatok bekérése a felhasználótól</a:t>
-            </a:r>
-          </a:p>
-          <a:p>
-            <a:r>
-              <a:rPr lang="hu-HU" dirty="0"/>
-              <a:t>Az </a:t>
-            </a:r>
-            <a:r>
-              <a:rPr lang="hu-HU" dirty="0" err="1"/>
-              <a:t>str</a:t>
-            </a:r>
-            <a:r>
-              <a:rPr lang="hu-HU" dirty="0"/>
-              <a:t> (szöveges) típus, Aposztróf, időzőjel, </a:t>
-            </a:r>
-            <a:r>
-              <a:rPr lang="hu-HU" dirty="0" err="1"/>
-              <a:t>escape-elés</a:t>
-            </a:r>
             <a:endParaRPr lang="hu-HU" dirty="0"/>
-          </a:p>
-          <a:p>
-            <a:r>
-              <a:rPr lang="hu-HU" dirty="0"/>
-              <a:t>Többsoros </a:t>
-            </a:r>
-            <a:r>
-              <a:rPr lang="hu-HU" dirty="0" err="1"/>
-              <a:t>string</a:t>
-            </a:r>
-            <a:endParaRPr lang="hu-HU" dirty="0"/>
-          </a:p>
-          <a:p>
-            <a:r>
-              <a:rPr lang="hu-HU" dirty="0"/>
-              <a:t>Formázott szövegek</a:t>
-            </a:r>
-          </a:p>
-          <a:p>
-            <a:r>
-              <a:rPr lang="hu-HU" dirty="0"/>
-              <a:t>Formázott szövegek (f </a:t>
-            </a:r>
-            <a:r>
-              <a:rPr lang="hu-HU" dirty="0" err="1"/>
-              <a:t>string</a:t>
-            </a:r>
-            <a:r>
-              <a:rPr lang="hu-HU" dirty="0"/>
-              <a:t>, r </a:t>
-            </a:r>
-            <a:r>
-              <a:rPr lang="hu-HU" dirty="0" err="1"/>
-              <a:t>string</a:t>
-            </a:r>
-            <a:r>
-              <a:rPr lang="hu-HU" dirty="0"/>
-              <a:t>)</a:t>
-            </a:r>
-          </a:p>
-          <a:p>
-            <a:r>
-              <a:rPr lang="hu-HU" dirty="0" err="1"/>
-              <a:t>String</a:t>
-            </a:r>
-            <a:r>
-              <a:rPr lang="hu-HU" dirty="0"/>
-              <a:t> tulajdonságok és metódusok</a:t>
-            </a:r>
           </a:p>
         </p:txBody>
       </p:sp>
     </p:spTree>
     <p:extLst>
       <p:ext uri="{BB962C8B-B14F-4D97-AF65-F5344CB8AC3E}">
-        <p14:creationId xmlns:p14="http://schemas.microsoft.com/office/powerpoint/2010/main" val="1675522082"/>
+        <p14:creationId xmlns:p14="http://schemas.microsoft.com/office/powerpoint/2010/main" val="147733182"/>
       </p:ext>
     </p:extLst>
   </p:cSld>
@@ -7088,10 +7120,10 @@
       </p:grpSpPr>
       <p:sp>
         <p:nvSpPr>
-          <p:cNvPr id="2" name="Cím 1">
-            <a:extLst>
-              <a:ext uri="{FF2B5EF4-FFF2-40B4-BE49-F238E27FC236}">
-                <a16:creationId xmlns:a16="http://schemas.microsoft.com/office/drawing/2014/main" id="{67E45071-3E91-3975-958C-43782E39B6B9}"/>
+          <p:cNvPr id="10" name="Cím 9">
+            <a:extLst>
+              <a:ext uri="{FF2B5EF4-FFF2-40B4-BE49-F238E27FC236}">
+                <a16:creationId xmlns:a16="http://schemas.microsoft.com/office/drawing/2014/main" id="{026B303C-F00B-C202-DACD-409846B572C8}"/>
               </a:ext>
             </a:extLst>
           </p:cNvPr>
@@ -7100,42 +7132,6 @@
           </p:cNvSpPr>
           <p:nvPr>
             <p:ph type="title"/>
-          </p:nvPr>
-        </p:nvSpPr>
-        <p:spPr/>
-        <p:txBody>
-          <a:bodyPr/>
-          <a:lstStyle/>
-          <a:p>
-            <a:r>
-              <a:rPr lang="hu-HU" dirty="0"/>
-              <a:t>A </a:t>
-            </a:r>
-            <a:r>
-              <a:rPr lang="hu-HU" dirty="0" err="1"/>
-              <a:t>list</a:t>
-            </a:r>
-            <a:r>
-              <a:rPr lang="hu-HU" dirty="0"/>
-              <a:t> konténer típus, ciklusok</a:t>
-            </a:r>
-          </a:p>
-        </p:txBody>
-      </p:sp>
-      <p:sp>
-        <p:nvSpPr>
-          <p:cNvPr id="3" name="Tartalom helye 2">
-            <a:extLst>
-              <a:ext uri="{FF2B5EF4-FFF2-40B4-BE49-F238E27FC236}">
-                <a16:creationId xmlns:a16="http://schemas.microsoft.com/office/drawing/2014/main" id="{0F52A367-7627-7B81-0E00-66AB83DC996D}"/>
-              </a:ext>
-            </a:extLst>
-          </p:cNvPr>
-          <p:cNvSpPr>
-            <a:spLocks noGrp="1"/>
-          </p:cNvSpPr>
-          <p:nvPr>
-            <p:ph type="body" idx="1"/>
           </p:nvPr>
         </p:nvSpPr>
         <p:spPr/>
@@ -7145,6 +7141,167 @@
           </a:bodyPr>
           <a:lstStyle/>
           <a:p>
+            <a:r>
+              <a:rPr lang="hu-HU" dirty="0"/>
+              <a:t>A </a:t>
+            </a:r>
+            <a:r>
+              <a:rPr lang="hu-HU" dirty="0" err="1"/>
+              <a:t>list</a:t>
+            </a:r>
+            <a:r>
+              <a:rPr lang="hu-HU" dirty="0"/>
+              <a:t> konténer típus, ciklusok</a:t>
+            </a:r>
+          </a:p>
+        </p:txBody>
+      </p:sp>
+      <p:sp>
+        <p:nvSpPr>
+          <p:cNvPr id="11" name="Tartalom helye 10">
+            <a:extLst>
+              <a:ext uri="{FF2B5EF4-FFF2-40B4-BE49-F238E27FC236}">
+                <a16:creationId xmlns:a16="http://schemas.microsoft.com/office/drawing/2014/main" id="{1304DAAD-A571-195A-29C9-8BA795B1C660}"/>
+              </a:ext>
+            </a:extLst>
+          </p:cNvPr>
+          <p:cNvSpPr>
+            <a:spLocks noGrp="1"/>
+          </p:cNvSpPr>
+          <p:nvPr>
+            <p:ph idx="1"/>
+          </p:nvPr>
+        </p:nvSpPr>
+        <p:spPr/>
+        <p:txBody>
+          <a:bodyPr>
+            <a:normAutofit fontScale="62500" lnSpcReduction="20000"/>
+          </a:bodyPr>
+          <a:lstStyle/>
+          <a:p>
+            <a:r>
+              <a:rPr lang="hu-HU" dirty="0"/>
+              <a:t>Listák létrehozása</a:t>
+            </a:r>
+          </a:p>
+          <a:p>
+            <a:r>
+              <a:rPr lang="hu-HU" dirty="0"/>
+              <a:t>Listák: elérés index alapján</a:t>
+            </a:r>
+          </a:p>
+          <a:p>
+            <a:r>
+              <a:rPr lang="hu-HU" dirty="0"/>
+              <a:t>Listák: aritmetikai operátorok</a:t>
+            </a:r>
+          </a:p>
+          <a:p>
+            <a:r>
+              <a:rPr lang="hu-HU" dirty="0"/>
+              <a:t>Listák </a:t>
+            </a:r>
+            <a:r>
+              <a:rPr lang="hu-HU" dirty="0" err="1"/>
+              <a:t>firssítése</a:t>
+            </a:r>
+            <a:endParaRPr lang="hu-HU" dirty="0"/>
+          </a:p>
+          <a:p>
+            <a:r>
+              <a:rPr lang="hu-HU" dirty="0"/>
+              <a:t>Listák egyéb metódusai</a:t>
+            </a:r>
+          </a:p>
+          <a:p>
+            <a:r>
+              <a:rPr lang="hu-HU" dirty="0"/>
+              <a:t>Objektum Referencia szerinti átadás módosíthatatlan objektumok esetében</a:t>
+            </a:r>
+          </a:p>
+          <a:p>
+            <a:r>
+              <a:rPr lang="hu-HU" dirty="0"/>
+              <a:t>Objektum Referencia szerinti átadás módosítható objektumok esetében</a:t>
+            </a:r>
+          </a:p>
+          <a:p>
+            <a:r>
+              <a:rPr lang="hu-HU" dirty="0"/>
+              <a:t>Listák másolása: a </a:t>
+            </a:r>
+            <a:r>
+              <a:rPr lang="hu-HU" dirty="0" err="1"/>
+              <a:t>copy</a:t>
+            </a:r>
+            <a:r>
+              <a:rPr lang="hu-HU" dirty="0"/>
+              <a:t>() metódus, memóriacímek</a:t>
+            </a:r>
+          </a:p>
+          <a:p>
+            <a:r>
+              <a:rPr lang="hu-HU" dirty="0"/>
+              <a:t>Az in operátor</a:t>
+            </a:r>
+          </a:p>
+          <a:p>
+            <a:r>
+              <a:rPr lang="hu-HU" dirty="0"/>
+              <a:t>A </a:t>
+            </a:r>
+            <a:r>
+              <a:rPr lang="hu-HU" dirty="0" err="1"/>
+              <a:t>for</a:t>
+            </a:r>
+            <a:r>
+              <a:rPr lang="hu-HU" dirty="0"/>
+              <a:t> ciklus, Behúzás alapú szintaxis</a:t>
+            </a:r>
+          </a:p>
+          <a:p>
+            <a:r>
+              <a:rPr lang="hu-HU" dirty="0"/>
+              <a:t>A </a:t>
+            </a:r>
+            <a:r>
+              <a:rPr lang="hu-HU" dirty="0" err="1"/>
+              <a:t>range</a:t>
+            </a:r>
+            <a:r>
+              <a:rPr lang="hu-HU" dirty="0"/>
+              <a:t>() függvény</a:t>
+            </a:r>
+          </a:p>
+          <a:p>
+            <a:r>
+              <a:rPr lang="hu-HU" dirty="0"/>
+              <a:t>A </a:t>
+            </a:r>
+            <a:r>
+              <a:rPr lang="hu-HU" dirty="0" err="1"/>
+              <a:t>range</a:t>
+            </a:r>
+            <a:r>
+              <a:rPr lang="hu-HU" dirty="0"/>
+              <a:t>() függvény paraméter listája</a:t>
+            </a:r>
+          </a:p>
+          <a:p>
+            <a:r>
+              <a:rPr lang="hu-HU" dirty="0"/>
+              <a:t>Listák bejárása </a:t>
+            </a:r>
+            <a:r>
+              <a:rPr lang="hu-HU" dirty="0" err="1"/>
+              <a:t>for</a:t>
+            </a:r>
+            <a:r>
+              <a:rPr lang="hu-HU" dirty="0"/>
+              <a:t> ciklussal</a:t>
+            </a:r>
+          </a:p>
+          <a:p>
             <a:endParaRPr lang="hu-HU" dirty="0"/>
           </a:p>
         </p:txBody>
@@ -7152,7 +7309,7 @@
     </p:spTree>
     <p:extLst>
       <p:ext uri="{BB962C8B-B14F-4D97-AF65-F5344CB8AC3E}">
-        <p14:creationId xmlns:p14="http://schemas.microsoft.com/office/powerpoint/2010/main" val="147733182"/>
+        <p14:creationId xmlns:p14="http://schemas.microsoft.com/office/powerpoint/2010/main" val="3964163544"/>
       </p:ext>
     </p:extLst>
   </p:cSld>
@@ -7181,10 +7338,10 @@
       </p:grpSpPr>
       <p:sp>
         <p:nvSpPr>
-          <p:cNvPr id="10" name="Cím 9">
-            <a:extLst>
-              <a:ext uri="{FF2B5EF4-FFF2-40B4-BE49-F238E27FC236}">
-                <a16:creationId xmlns:a16="http://schemas.microsoft.com/office/drawing/2014/main" id="{026B303C-F00B-C202-DACD-409846B572C8}"/>
+          <p:cNvPr id="2" name="Cím 1">
+            <a:extLst>
+              <a:ext uri="{FF2B5EF4-FFF2-40B4-BE49-F238E27FC236}">
+                <a16:creationId xmlns:a16="http://schemas.microsoft.com/office/drawing/2014/main" id="{67E45071-3E91-3975-958C-43782E39B6B9}"/>
               </a:ext>
             </a:extLst>
           </p:cNvPr>
@@ -7193,6 +7350,34 @@
           </p:cNvSpPr>
           <p:nvPr>
             <p:ph type="title"/>
+          </p:nvPr>
+        </p:nvSpPr>
+        <p:spPr/>
+        <p:txBody>
+          <a:bodyPr/>
+          <a:lstStyle/>
+          <a:p>
+            <a:r>
+              <a:rPr lang="hu-HU" dirty="0"/>
+              <a:t>További vezérlési szerkezetek</a:t>
+            </a:r>
+          </a:p>
+        </p:txBody>
+      </p:sp>
+      <p:sp>
+        <p:nvSpPr>
+          <p:cNvPr id="3" name="Tartalom helye 2">
+            <a:extLst>
+              <a:ext uri="{FF2B5EF4-FFF2-40B4-BE49-F238E27FC236}">
+                <a16:creationId xmlns:a16="http://schemas.microsoft.com/office/drawing/2014/main" id="{0F52A367-7627-7B81-0E00-66AB83DC996D}"/>
+              </a:ext>
+            </a:extLst>
+          </p:cNvPr>
+          <p:cNvSpPr>
+            <a:spLocks noGrp="1"/>
+          </p:cNvSpPr>
+          <p:nvPr>
+            <p:ph type="body" idx="1"/>
           </p:nvPr>
         </p:nvSpPr>
         <p:spPr/>
@@ -7202,167 +7387,6 @@
           </a:bodyPr>
           <a:lstStyle/>
           <a:p>
-            <a:r>
-              <a:rPr lang="hu-HU" dirty="0"/>
-              <a:t>A </a:t>
-            </a:r>
-            <a:r>
-              <a:rPr lang="hu-HU" dirty="0" err="1"/>
-              <a:t>list</a:t>
-            </a:r>
-            <a:r>
-              <a:rPr lang="hu-HU" dirty="0"/>
-              <a:t> konténer típus, ciklusok</a:t>
-            </a:r>
-          </a:p>
-        </p:txBody>
-      </p:sp>
-      <p:sp>
-        <p:nvSpPr>
-          <p:cNvPr id="11" name="Tartalom helye 10">
-            <a:extLst>
-              <a:ext uri="{FF2B5EF4-FFF2-40B4-BE49-F238E27FC236}">
-                <a16:creationId xmlns:a16="http://schemas.microsoft.com/office/drawing/2014/main" id="{1304DAAD-A571-195A-29C9-8BA795B1C660}"/>
-              </a:ext>
-            </a:extLst>
-          </p:cNvPr>
-          <p:cNvSpPr>
-            <a:spLocks noGrp="1"/>
-          </p:cNvSpPr>
-          <p:nvPr>
-            <p:ph idx="1"/>
-          </p:nvPr>
-        </p:nvSpPr>
-        <p:spPr/>
-        <p:txBody>
-          <a:bodyPr>
-            <a:normAutofit fontScale="62500" lnSpcReduction="20000"/>
-          </a:bodyPr>
-          <a:lstStyle/>
-          <a:p>
-            <a:r>
-              <a:rPr lang="hu-HU" dirty="0"/>
-              <a:t>Listák létrehozása</a:t>
-            </a:r>
-          </a:p>
-          <a:p>
-            <a:r>
-              <a:rPr lang="hu-HU" dirty="0"/>
-              <a:t>Listák: elérés index alapján</a:t>
-            </a:r>
-          </a:p>
-          <a:p>
-            <a:r>
-              <a:rPr lang="hu-HU" dirty="0"/>
-              <a:t>Listák: aritmetikai operátorok</a:t>
-            </a:r>
-          </a:p>
-          <a:p>
-            <a:r>
-              <a:rPr lang="hu-HU" dirty="0"/>
-              <a:t>Listák </a:t>
-            </a:r>
-            <a:r>
-              <a:rPr lang="hu-HU" dirty="0" err="1"/>
-              <a:t>firssítése</a:t>
-            </a:r>
-            <a:endParaRPr lang="hu-HU" dirty="0"/>
-          </a:p>
-          <a:p>
-            <a:r>
-              <a:rPr lang="hu-HU" dirty="0"/>
-              <a:t>Listák egyéb metódusai</a:t>
-            </a:r>
-          </a:p>
-          <a:p>
-            <a:r>
-              <a:rPr lang="hu-HU" dirty="0"/>
-              <a:t>Objektum Referencia szerinti átadás módosíthatatlan objektumok esetében</a:t>
-            </a:r>
-          </a:p>
-          <a:p>
-            <a:r>
-              <a:rPr lang="hu-HU" dirty="0"/>
-              <a:t>Objektum Referencia szerinti átadás módosítható objektumok esetében</a:t>
-            </a:r>
-          </a:p>
-          <a:p>
-            <a:r>
-              <a:rPr lang="hu-HU" dirty="0"/>
-              <a:t>Listák másolása: a </a:t>
-            </a:r>
-            <a:r>
-              <a:rPr lang="hu-HU" dirty="0" err="1"/>
-              <a:t>copy</a:t>
-            </a:r>
-            <a:r>
-              <a:rPr lang="hu-HU" dirty="0"/>
-              <a:t>() metódus, memóriacímek</a:t>
-            </a:r>
-          </a:p>
-          <a:p>
-            <a:r>
-              <a:rPr lang="hu-HU" dirty="0"/>
-              <a:t>Az in operátor</a:t>
-            </a:r>
-          </a:p>
-          <a:p>
-            <a:r>
-              <a:rPr lang="hu-HU" dirty="0"/>
-              <a:t>A </a:t>
-            </a:r>
-            <a:r>
-              <a:rPr lang="hu-HU" dirty="0" err="1"/>
-              <a:t>for</a:t>
-            </a:r>
-            <a:r>
-              <a:rPr lang="hu-HU" dirty="0"/>
-              <a:t> ciklus, Behúzás alapú szintaxis</a:t>
-            </a:r>
-          </a:p>
-          <a:p>
-            <a:r>
-              <a:rPr lang="hu-HU" dirty="0"/>
-              <a:t>A </a:t>
-            </a:r>
-            <a:r>
-              <a:rPr lang="hu-HU" dirty="0" err="1"/>
-              <a:t>range</a:t>
-            </a:r>
-            <a:r>
-              <a:rPr lang="hu-HU" dirty="0"/>
-              <a:t>() függvény</a:t>
-            </a:r>
-          </a:p>
-          <a:p>
-            <a:r>
-              <a:rPr lang="hu-HU" dirty="0"/>
-              <a:t>A </a:t>
-            </a:r>
-            <a:r>
-              <a:rPr lang="hu-HU" dirty="0" err="1"/>
-              <a:t>range</a:t>
-            </a:r>
-            <a:r>
-              <a:rPr lang="hu-HU" dirty="0"/>
-              <a:t>() függvény paraméter listája</a:t>
-            </a:r>
-          </a:p>
-          <a:p>
-            <a:r>
-              <a:rPr lang="hu-HU" dirty="0"/>
-              <a:t>Listák bejárása </a:t>
-            </a:r>
-            <a:r>
-              <a:rPr lang="hu-HU" dirty="0" err="1"/>
-              <a:t>for</a:t>
-            </a:r>
-            <a:r>
-              <a:rPr lang="hu-HU" dirty="0"/>
-              <a:t> ciklussal</a:t>
-            </a:r>
-          </a:p>
-          <a:p>
             <a:endParaRPr lang="hu-HU" dirty="0"/>
           </a:p>
         </p:txBody>
@@ -7370,7 +7394,7 @@
     </p:spTree>
     <p:extLst>
       <p:ext uri="{BB962C8B-B14F-4D97-AF65-F5344CB8AC3E}">
-        <p14:creationId xmlns:p14="http://schemas.microsoft.com/office/powerpoint/2010/main" val="3964163544"/>
+        <p14:creationId xmlns:p14="http://schemas.microsoft.com/office/powerpoint/2010/main" val="1626009815"/>
       </p:ext>
     </p:extLst>
   </p:cSld>
